--- a/github/my-project/Git & GitHub Mastery.pptx
+++ b/github/my-project/Git & GitHub Mastery.pptx
@@ -5,7 +5,7 @@
     <p:sldMasterId id="2147483659" r:id="rId1"/>
   </p:sldMasterIdLst>
   <p:notesMasterIdLst>
-    <p:notesMasterId r:id="rId19"/>
+    <p:notesMasterId r:id="rId20"/>
   </p:notesMasterIdLst>
   <p:sldIdLst>
     <p:sldId id="256" r:id="rId2"/>
@@ -22,33 +22,41 @@
     <p:sldId id="267" r:id="rId13"/>
     <p:sldId id="268" r:id="rId14"/>
     <p:sldId id="269" r:id="rId15"/>
-    <p:sldId id="270" r:id="rId16"/>
-    <p:sldId id="271" r:id="rId17"/>
-    <p:sldId id="272" r:id="rId18"/>
+    <p:sldId id="271" r:id="rId16"/>
+    <p:sldId id="274" r:id="rId17"/>
+    <p:sldId id="270" r:id="rId18"/>
+    <p:sldId id="272" r:id="rId19"/>
   </p:sldIdLst>
   <p:sldSz cx="12192000" cy="6858000"/>
   <p:notesSz cx="6858000" cy="9144000"/>
   <p:embeddedFontLst>
     <p:embeddedFont>
       <p:font typeface="JetBrains Mono" panose="020B0604020202020204" charset="0"/>
-      <p:regular r:id="rId20"/>
-      <p:bold r:id="rId21"/>
-      <p:italic r:id="rId22"/>
-      <p:boldItalic r:id="rId23"/>
+      <p:regular r:id="rId21"/>
+      <p:bold r:id="rId22"/>
+      <p:italic r:id="rId23"/>
+      <p:boldItalic r:id="rId24"/>
+    </p:embeddedFont>
+    <p:embeddedFont>
+      <p:font typeface="Lato" panose="020F0502020204030203" pitchFamily="34" charset="0"/>
+      <p:regular r:id="rId25"/>
+      <p:bold r:id="rId26"/>
+      <p:italic r:id="rId27"/>
+      <p:boldItalic r:id="rId28"/>
     </p:embeddedFont>
     <p:embeddedFont>
       <p:font typeface="Urbanist" panose="020B0604020202020204" charset="0"/>
-      <p:regular r:id="rId24"/>
-      <p:bold r:id="rId25"/>
-      <p:italic r:id="rId26"/>
-      <p:boldItalic r:id="rId27"/>
+      <p:regular r:id="rId29"/>
+      <p:bold r:id="rId30"/>
+      <p:italic r:id="rId31"/>
+      <p:boldItalic r:id="rId32"/>
     </p:embeddedFont>
     <p:embeddedFont>
       <p:font typeface="Urbanist SemiBold" panose="020B0604020202020204" charset="0"/>
-      <p:regular r:id="rId28"/>
-      <p:bold r:id="rId29"/>
-      <p:italic r:id="rId30"/>
-      <p:boldItalic r:id="rId31"/>
+      <p:regular r:id="rId33"/>
+      <p:bold r:id="rId34"/>
+      <p:italic r:id="rId35"/>
+      <p:boldItalic r:id="rId36"/>
     </p:embeddedFont>
   </p:embeddedFontLst>
   <p:defaultTextStyle>
@@ -1369,6 +1377,214 @@
   <p:cSld>
     <p:spTree>
       <p:nvGrpSpPr>
+        <p:cNvPr id="1" name="Shape 300"/>
+        <p:cNvGrpSpPr/>
+        <p:nvPr/>
+      </p:nvGrpSpPr>
+      <p:grpSpPr>
+        <a:xfrm>
+          <a:off x="0" y="0"/>
+          <a:ext cx="0" cy="0"/>
+          <a:chOff x="0" y="0"/>
+          <a:chExt cx="0" cy="0"/>
+        </a:xfrm>
+      </p:grpSpPr>
+      <p:sp>
+        <p:nvSpPr>
+          <p:cNvPr id="301" name="Google Shape;301;p16:notes"/>
+          <p:cNvSpPr txBox="1">
+            <a:spLocks noGrp="1"/>
+          </p:cNvSpPr>
+          <p:nvPr>
+            <p:ph type="body" idx="1"/>
+          </p:nvPr>
+        </p:nvSpPr>
+        <p:spPr>
+          <a:xfrm>
+            <a:off x="685800" y="4343400"/>
+            <a:ext cx="5486400" cy="4114800"/>
+          </a:xfrm>
+          <a:prstGeom prst="rect">
+            <a:avLst/>
+          </a:prstGeom>
+        </p:spPr>
+        <p:txBody>
+          <a:bodyPr spcFirstLastPara="1" wrap="square" lIns="91425" tIns="91425" rIns="91425" bIns="91425" anchor="t" anchorCtr="0">
+            <a:noAutofit/>
+          </a:bodyPr>
+          <a:lstStyle/>
+          <a:p>
+            <a:pPr marL="0" lvl="0" indent="0" algn="l" rtl="0">
+              <a:spcBef>
+                <a:spcPts val="0"/>
+              </a:spcBef>
+              <a:spcAft>
+                <a:spcPts val="0"/>
+              </a:spcAft>
+              <a:buNone/>
+            </a:pPr>
+            <a:endParaRPr/>
+          </a:p>
+        </p:txBody>
+      </p:sp>
+      <p:sp>
+        <p:nvSpPr>
+          <p:cNvPr id="302" name="Google Shape;302;p16:notes"/>
+          <p:cNvSpPr>
+            <a:spLocks noGrp="1" noRot="1" noChangeAspect="1"/>
+          </p:cNvSpPr>
+          <p:nvPr>
+            <p:ph type="sldImg" idx="2"/>
+          </p:nvPr>
+        </p:nvSpPr>
+        <p:spPr>
+          <a:xfrm>
+            <a:off x="381000" y="685800"/>
+            <a:ext cx="6096000" cy="3429000"/>
+          </a:xfrm>
+          <a:custGeom>
+            <a:avLst/>
+            <a:gdLst/>
+            <a:ahLst/>
+            <a:cxnLst/>
+            <a:rect l="l" t="t" r="r" b="b"/>
+            <a:pathLst>
+              <a:path w="120000" h="120000" extrusionOk="0">
+                <a:moveTo>
+                  <a:pt x="0" y="0"/>
+                </a:moveTo>
+                <a:lnTo>
+                  <a:pt x="120000" y="0"/>
+                </a:lnTo>
+                <a:lnTo>
+                  <a:pt x="120000" y="120000"/>
+                </a:lnTo>
+                <a:lnTo>
+                  <a:pt x="0" y="120000"/>
+                </a:lnTo>
+                <a:close/>
+              </a:path>
+            </a:pathLst>
+          </a:custGeom>
+        </p:spPr>
+      </p:sp>
+    </p:spTree>
+  </p:cSld>
+  <p:clrMapOvr>
+    <a:masterClrMapping/>
+  </p:clrMapOvr>
+</p:notes>
+</file>
+
+<file path=ppt/notesSlides/notesSlide16.xml><?xml version="1.0" encoding="utf-8"?>
+<p:notes xmlns:a="http://schemas.openxmlformats.org/drawingml/2006/main" xmlns:r="http://schemas.openxmlformats.org/officeDocument/2006/relationships" xmlns:p="http://schemas.openxmlformats.org/presentationml/2006/main" showMasterSp="0" showMasterPhAnim="0">
+  <p:cSld>
+    <p:spTree>
+      <p:nvGrpSpPr>
+        <p:cNvPr id="1" name="Shape 80"/>
+        <p:cNvGrpSpPr/>
+        <p:nvPr/>
+      </p:nvGrpSpPr>
+      <p:grpSpPr>
+        <a:xfrm>
+          <a:off x="0" y="0"/>
+          <a:ext cx="0" cy="0"/>
+          <a:chOff x="0" y="0"/>
+          <a:chExt cx="0" cy="0"/>
+        </a:xfrm>
+      </p:grpSpPr>
+      <p:sp>
+        <p:nvSpPr>
+          <p:cNvPr id="81" name="Google Shape;81;p1:notes"/>
+          <p:cNvSpPr txBox="1">
+            <a:spLocks noGrp="1"/>
+          </p:cNvSpPr>
+          <p:nvPr>
+            <p:ph type="body" idx="1"/>
+          </p:nvPr>
+        </p:nvSpPr>
+        <p:spPr>
+          <a:xfrm>
+            <a:off x="685800" y="4343400"/>
+            <a:ext cx="5486400" cy="4114800"/>
+          </a:xfrm>
+          <a:prstGeom prst="rect">
+            <a:avLst/>
+          </a:prstGeom>
+        </p:spPr>
+        <p:txBody>
+          <a:bodyPr spcFirstLastPara="1" wrap="square" lIns="91425" tIns="91425" rIns="91425" bIns="91425" anchor="t" anchorCtr="0">
+            <a:noAutofit/>
+          </a:bodyPr>
+          <a:lstStyle/>
+          <a:p>
+            <a:pPr marL="0" lvl="0" indent="0" algn="l" rtl="0">
+              <a:spcBef>
+                <a:spcPts val="0"/>
+              </a:spcBef>
+              <a:spcAft>
+                <a:spcPts val="0"/>
+              </a:spcAft>
+              <a:buNone/>
+            </a:pPr>
+            <a:endParaRPr/>
+          </a:p>
+        </p:txBody>
+      </p:sp>
+      <p:sp>
+        <p:nvSpPr>
+          <p:cNvPr id="82" name="Google Shape;82;p1:notes"/>
+          <p:cNvSpPr>
+            <a:spLocks noGrp="1" noRot="1" noChangeAspect="1"/>
+          </p:cNvSpPr>
+          <p:nvPr>
+            <p:ph type="sldImg" idx="2"/>
+          </p:nvPr>
+        </p:nvSpPr>
+        <p:spPr>
+          <a:xfrm>
+            <a:off x="381000" y="685800"/>
+            <a:ext cx="6096000" cy="3429000"/>
+          </a:xfrm>
+          <a:custGeom>
+            <a:avLst/>
+            <a:gdLst/>
+            <a:ahLst/>
+            <a:cxnLst/>
+            <a:rect l="l" t="t" r="r" b="b"/>
+            <a:pathLst>
+              <a:path w="120000" h="120000" extrusionOk="0">
+                <a:moveTo>
+                  <a:pt x="0" y="0"/>
+                </a:moveTo>
+                <a:lnTo>
+                  <a:pt x="120000" y="0"/>
+                </a:lnTo>
+                <a:lnTo>
+                  <a:pt x="120000" y="120000"/>
+                </a:lnTo>
+                <a:lnTo>
+                  <a:pt x="0" y="120000"/>
+                </a:lnTo>
+                <a:close/>
+              </a:path>
+            </a:pathLst>
+          </a:custGeom>
+        </p:spPr>
+      </p:sp>
+    </p:spTree>
+  </p:cSld>
+  <p:clrMapOvr>
+    <a:masterClrMapping/>
+  </p:clrMapOvr>
+</p:notes>
+</file>
+
+<file path=ppt/notesSlides/notesSlide17.xml><?xml version="1.0" encoding="utf-8"?>
+<p:notes xmlns:a="http://schemas.openxmlformats.org/drawingml/2006/main" xmlns:r="http://schemas.openxmlformats.org/officeDocument/2006/relationships" xmlns:p="http://schemas.openxmlformats.org/presentationml/2006/main" showMasterSp="0" showMasterPhAnim="0">
+  <p:cSld>
+    <p:spTree>
+      <p:nvGrpSpPr>
         <p:cNvPr id="1" name="Shape 283"/>
         <p:cNvGrpSpPr/>
         <p:nvPr/>
@@ -1468,111 +1684,7 @@
 </p:notes>
 </file>
 
-<file path=ppt/notesSlides/notesSlide16.xml><?xml version="1.0" encoding="utf-8"?>
-<p:notes xmlns:a="http://schemas.openxmlformats.org/drawingml/2006/main" xmlns:r="http://schemas.openxmlformats.org/officeDocument/2006/relationships" xmlns:p="http://schemas.openxmlformats.org/presentationml/2006/main" showMasterSp="0" showMasterPhAnim="0">
-  <p:cSld>
-    <p:spTree>
-      <p:nvGrpSpPr>
-        <p:cNvPr id="1" name="Shape 300"/>
-        <p:cNvGrpSpPr/>
-        <p:nvPr/>
-      </p:nvGrpSpPr>
-      <p:grpSpPr>
-        <a:xfrm>
-          <a:off x="0" y="0"/>
-          <a:ext cx="0" cy="0"/>
-          <a:chOff x="0" y="0"/>
-          <a:chExt cx="0" cy="0"/>
-        </a:xfrm>
-      </p:grpSpPr>
-      <p:sp>
-        <p:nvSpPr>
-          <p:cNvPr id="301" name="Google Shape;301;p16:notes"/>
-          <p:cNvSpPr txBox="1">
-            <a:spLocks noGrp="1"/>
-          </p:cNvSpPr>
-          <p:nvPr>
-            <p:ph type="body" idx="1"/>
-          </p:nvPr>
-        </p:nvSpPr>
-        <p:spPr>
-          <a:xfrm>
-            <a:off x="685800" y="4343400"/>
-            <a:ext cx="5486400" cy="4114800"/>
-          </a:xfrm>
-          <a:prstGeom prst="rect">
-            <a:avLst/>
-          </a:prstGeom>
-        </p:spPr>
-        <p:txBody>
-          <a:bodyPr spcFirstLastPara="1" wrap="square" lIns="91425" tIns="91425" rIns="91425" bIns="91425" anchor="t" anchorCtr="0">
-            <a:noAutofit/>
-          </a:bodyPr>
-          <a:lstStyle/>
-          <a:p>
-            <a:pPr marL="0" lvl="0" indent="0" algn="l" rtl="0">
-              <a:spcBef>
-                <a:spcPts val="0"/>
-              </a:spcBef>
-              <a:spcAft>
-                <a:spcPts val="0"/>
-              </a:spcAft>
-              <a:buNone/>
-            </a:pPr>
-            <a:endParaRPr/>
-          </a:p>
-        </p:txBody>
-      </p:sp>
-      <p:sp>
-        <p:nvSpPr>
-          <p:cNvPr id="302" name="Google Shape;302;p16:notes"/>
-          <p:cNvSpPr>
-            <a:spLocks noGrp="1" noRot="1" noChangeAspect="1"/>
-          </p:cNvSpPr>
-          <p:nvPr>
-            <p:ph type="sldImg" idx="2"/>
-          </p:nvPr>
-        </p:nvSpPr>
-        <p:spPr>
-          <a:xfrm>
-            <a:off x="381000" y="685800"/>
-            <a:ext cx="6096000" cy="3429000"/>
-          </a:xfrm>
-          <a:custGeom>
-            <a:avLst/>
-            <a:gdLst/>
-            <a:ahLst/>
-            <a:cxnLst/>
-            <a:rect l="l" t="t" r="r" b="b"/>
-            <a:pathLst>
-              <a:path w="120000" h="120000" extrusionOk="0">
-                <a:moveTo>
-                  <a:pt x="0" y="0"/>
-                </a:moveTo>
-                <a:lnTo>
-                  <a:pt x="120000" y="0"/>
-                </a:lnTo>
-                <a:lnTo>
-                  <a:pt x="120000" y="120000"/>
-                </a:lnTo>
-                <a:lnTo>
-                  <a:pt x="0" y="120000"/>
-                </a:lnTo>
-                <a:close/>
-              </a:path>
-            </a:pathLst>
-          </a:custGeom>
-        </p:spPr>
-      </p:sp>
-    </p:spTree>
-  </p:cSld>
-  <p:clrMapOvr>
-    <a:masterClrMapping/>
-  </p:clrMapOvr>
-</p:notes>
-</file>
-
-<file path=ppt/notesSlides/notesSlide17.xml><?xml version="1.0" encoding="utf-8"?>
+<file path=ppt/notesSlides/notesSlide18.xml><?xml version="1.0" encoding="utf-8"?>
 <p:notes xmlns:a="http://schemas.openxmlformats.org/drawingml/2006/main" xmlns:r="http://schemas.openxmlformats.org/officeDocument/2006/relationships" xmlns:p="http://schemas.openxmlformats.org/presentationml/2006/main" showMasterSp="0" showMasterPhAnim="0">
   <p:cSld>
     <p:spTree>
@@ -2055,8 +2167,8 @@
         </p:nvSpPr>
         <p:spPr>
           <a:xfrm>
-            <a:off x="1143225" y="685800"/>
-            <a:ext cx="4572225" cy="3429000"/>
+            <a:off x="381000" y="685800"/>
+            <a:ext cx="6096000" cy="3429000"/>
           </a:xfrm>
           <a:custGeom>
             <a:avLst/>
@@ -12391,7 +12503,7 @@
         </p:nvSpPr>
         <p:spPr>
           <a:xfrm>
-            <a:off x="2200512" y="2105424"/>
+            <a:off x="2200511" y="2338066"/>
             <a:ext cx="7790973" cy="1151084"/>
           </a:xfrm>
           <a:prstGeom prst="rect">
@@ -12655,13 +12767,13 @@
   <p:clrMapOvr>
     <a:masterClrMapping/>
   </p:clrMapOvr>
-  <mc:AlternateContent xmlns:mc="http://schemas.openxmlformats.org/markup-compatibility/2006">
-    <mc:Choice xmlns:p159="http://schemas.microsoft.com/office/powerpoint/2015/09/main" Requires="p159">
+  <mc:AlternateContent xmlns:mc="http://schemas.openxmlformats.org/markup-compatibility/2006" xmlns:p159="http://schemas.microsoft.com/office/powerpoint/2015/09/main">
+    <mc:Choice Requires="p159">
       <p:transition xmlns:p14="http://schemas.microsoft.com/office/powerpoint/2010/main" spd="slow" p14:dur="2000">
         <p159:morph option="byObject"/>
       </p:transition>
     </mc:Choice>
-    <mc:Fallback>
+    <mc:Fallback xmlns="">
       <p:transition spd="slow">
         <p:fade/>
       </p:transition>
@@ -13107,13 +13219,13 @@
   <p:clrMapOvr>
     <a:masterClrMapping/>
   </p:clrMapOvr>
-  <mc:AlternateContent xmlns:mc="http://schemas.openxmlformats.org/markup-compatibility/2006">
-    <mc:Choice xmlns:p159="http://schemas.microsoft.com/office/powerpoint/2015/09/main" Requires="p159">
+  <mc:AlternateContent xmlns:mc="http://schemas.openxmlformats.org/markup-compatibility/2006" xmlns:p159="http://schemas.microsoft.com/office/powerpoint/2015/09/main">
+    <mc:Choice Requires="p159">
       <p:transition xmlns:p14="http://schemas.microsoft.com/office/powerpoint/2010/main" spd="slow" p14:dur="2000">
         <p159:morph option="byObject"/>
       </p:transition>
     </mc:Choice>
-    <mc:Fallback>
+    <mc:Fallback xmlns="">
       <p:transition spd="slow">
         <p:fade/>
       </p:transition>
@@ -13330,13 +13442,13 @@
   <p:clrMapOvr>
     <a:masterClrMapping/>
   </p:clrMapOvr>
-  <mc:AlternateContent xmlns:mc="http://schemas.openxmlformats.org/markup-compatibility/2006">
-    <mc:Choice xmlns:p159="http://schemas.microsoft.com/office/powerpoint/2015/09/main" Requires="p159">
+  <mc:AlternateContent xmlns:mc="http://schemas.openxmlformats.org/markup-compatibility/2006" xmlns:p159="http://schemas.microsoft.com/office/powerpoint/2015/09/main">
+    <mc:Choice Requires="p159">
       <p:transition xmlns:p14="http://schemas.microsoft.com/office/powerpoint/2010/main" spd="slow" p14:dur="2000">
         <p159:morph option="byObject"/>
       </p:transition>
     </mc:Choice>
-    <mc:Fallback>
+    <mc:Fallback xmlns="">
       <p:transition spd="slow">
         <p:fade/>
       </p:transition>
@@ -14483,13 +14595,13 @@
   <p:clrMapOvr>
     <a:masterClrMapping/>
   </p:clrMapOvr>
-  <mc:AlternateContent xmlns:mc="http://schemas.openxmlformats.org/markup-compatibility/2006">
-    <mc:Choice xmlns:p159="http://schemas.microsoft.com/office/powerpoint/2015/09/main" Requires="p159">
+  <mc:AlternateContent xmlns:mc="http://schemas.openxmlformats.org/markup-compatibility/2006" xmlns:p159="http://schemas.microsoft.com/office/powerpoint/2015/09/main">
+    <mc:Choice Requires="p159">
       <p:transition xmlns:p14="http://schemas.microsoft.com/office/powerpoint/2010/main" spd="slow" p14:dur="2000">
         <p159:morph option="byObject"/>
       </p:transition>
     </mc:Choice>
-    <mc:Fallback>
+    <mc:Fallback xmlns="">
       <p:transition spd="slow">
         <p:fade/>
       </p:transition>
@@ -14620,7 +14732,7 @@
           <p:nvPr>
             <p:extLst>
               <p:ext uri="{D42A27DB-BD31-4B8C-83A1-F6EECF244321}">
-                <p14:modId xmlns:p14="http://schemas.microsoft.com/office/powerpoint/2010/main" val="3981484451"/>
+                <p14:modId xmlns:p14="http://schemas.microsoft.com/office/powerpoint/2010/main" val="118190558"/>
               </p:ext>
             </p:extLst>
           </p:nvPr>
@@ -15023,7 +15135,7 @@
                         <a:buNone/>
                       </a:pPr>
                       <a:r>
-                        <a:rPr lang="en-US" sz="1500" b="0" i="0" u="none" strike="noStrike" cap="none">
+                        <a:rPr lang="en-US" sz="1500" b="0" i="0" u="none" strike="noStrike" cap="none" dirty="0">
                           <a:solidFill>
                             <a:schemeClr val="tx1"/>
                           </a:solidFill>
@@ -15034,7 +15146,7 @@
                         </a:rPr>
                         <a:t>Initialize a new local repo</a:t>
                       </a:r>
-                      <a:endParaRPr>
+                      <a:endParaRPr dirty="0">
                         <a:solidFill>
                           <a:schemeClr val="tx1"/>
                         </a:solidFill>
@@ -16989,13 +17101,13 @@
   <p:clrMapOvr>
     <a:masterClrMapping/>
   </p:clrMapOvr>
-  <mc:AlternateContent xmlns:mc="http://schemas.openxmlformats.org/markup-compatibility/2006">
-    <mc:Choice xmlns:p159="http://schemas.microsoft.com/office/powerpoint/2015/09/main" Requires="p159">
+  <mc:AlternateContent xmlns:mc="http://schemas.openxmlformats.org/markup-compatibility/2006" xmlns:p159="http://schemas.microsoft.com/office/powerpoint/2015/09/main">
+    <mc:Choice Requires="p159">
       <p:transition xmlns:p14="http://schemas.microsoft.com/office/powerpoint/2010/main" spd="slow" p14:dur="2000">
         <p159:morph option="byObject"/>
       </p:transition>
     </mc:Choice>
-    <mc:Fallback>
+    <mc:Fallback xmlns="">
       <p:transition spd="slow">
         <p:fade/>
       </p:transition>
@@ -17056,33 +17168,6 @@
           </a:ln>
         </p:spPr>
       </p:pic>
-      <p:pic>
-        <p:nvPicPr>
-          <p:cNvPr id="276" name="Google Shape;276;p26" descr="image.png"/>
-          <p:cNvPicPr preferRelativeResize="0"/>
-          <p:nvPr/>
-        </p:nvPicPr>
-        <p:blipFill rotWithShape="1">
-          <a:blip r:embed="rId4">
-            <a:alphaModFix/>
-          </a:blip>
-          <a:srcRect/>
-          <a:stretch/>
-        </p:blipFill>
-        <p:spPr>
-          <a:xfrm>
-            <a:off x="6381750" y="1957387"/>
-            <a:ext cx="5229225" cy="3810000"/>
-          </a:xfrm>
-          <a:prstGeom prst="rect">
-            <a:avLst/>
-          </a:prstGeom>
-          <a:noFill/>
-          <a:ln>
-            <a:noFill/>
-          </a:ln>
-        </p:spPr>
-      </p:pic>
       <p:sp>
         <p:nvSpPr>
           <p:cNvPr id="277" name="Google Shape;277;p26"/>
@@ -17091,8 +17176,8 @@
         </p:nvSpPr>
         <p:spPr>
           <a:xfrm>
-            <a:off x="581025" y="2705100"/>
-            <a:ext cx="5490686" cy="361950"/>
+            <a:off x="590550" y="2103035"/>
+            <a:ext cx="5490686" cy="430887"/>
           </a:xfrm>
           <a:prstGeom prst="rect">
             <a:avLst/>
@@ -17118,7 +17203,7 @@
               <a:buNone/>
             </a:pPr>
             <a:r>
-              <a:rPr lang="en-US" sz="2400" b="1" i="0" u="none" strike="noStrike" cap="none">
+              <a:rPr lang="en-US" sz="2800" b="1" i="0" u="none" strike="noStrike" cap="none" dirty="0">
                 <a:solidFill>
                   <a:srgbClr val="238636"/>
                 </a:solidFill>
@@ -17129,7 +17214,7 @@
               </a:rPr>
               <a:t>Visualizing the Data Flow</a:t>
             </a:r>
-            <a:endParaRPr/>
+            <a:endParaRPr sz="1600" dirty="0"/>
           </a:p>
         </p:txBody>
       </p:sp>
@@ -17141,8 +17226,8 @@
         </p:nvSpPr>
         <p:spPr>
           <a:xfrm>
-            <a:off x="581025" y="3209925"/>
-            <a:ext cx="5229225" cy="914400"/>
+            <a:off x="581025" y="2764929"/>
+            <a:ext cx="5229225" cy="1772793"/>
           </a:xfrm>
           <a:prstGeom prst="rect">
             <a:avLst/>
@@ -17171,7 +17256,7 @@
               <a:buNone/>
             </a:pPr>
             <a:r>
-              <a:rPr lang="en-US" sz="1500" b="0" i="0" u="none" strike="noStrike" cap="none">
+              <a:rPr lang="en-US" sz="1800" b="0" i="0" u="none" strike="noStrike" cap="none" dirty="0">
                 <a:solidFill>
                   <a:srgbClr val="8B949E"/>
                 </a:solidFill>
@@ -17182,7 +17267,7 @@
               </a:rPr>
               <a:t>The core of Git/GitHub is the movement of code between these four areas. Understanding this "schematic" is key to resolving conflicts and managing versions.</a:t>
             </a:r>
-            <a:endParaRPr/>
+            <a:endParaRPr sz="1800" dirty="0"/>
           </a:p>
         </p:txBody>
       </p:sp>
@@ -17194,8 +17279,8 @@
         </p:nvSpPr>
         <p:spPr>
           <a:xfrm>
-            <a:off x="581025" y="4267200"/>
-            <a:ext cx="5229225" cy="609600"/>
+            <a:off x="590550" y="4537722"/>
+            <a:ext cx="5229225" cy="886397"/>
           </a:xfrm>
           <a:prstGeom prst="rect">
             <a:avLst/>
@@ -17224,7 +17309,7 @@
               <a:buNone/>
             </a:pPr>
             <a:r>
-              <a:rPr lang="en-US" sz="1500" b="1" i="0" u="none" strike="noStrike" cap="none" dirty="0">
+              <a:rPr lang="en-US" sz="1800" b="1" i="0" u="none" strike="noStrike" cap="none" dirty="0">
                 <a:solidFill>
                   <a:srgbClr val="8B949E"/>
                 </a:solidFill>
@@ -17236,7 +17321,7 @@
               <a:t>Pro-Tip:</a:t>
             </a:r>
             <a:r>
-              <a:rPr lang="en-US" sz="1500" b="0" i="0" u="none" strike="noStrike" cap="none" dirty="0">
+              <a:rPr lang="en-US" sz="1800" b="0" i="0" u="none" strike="noStrike" cap="none" dirty="0">
                 <a:solidFill>
                   <a:srgbClr val="8B949E"/>
                 </a:solidFill>
@@ -17247,7 +17332,7 @@
               </a:rPr>
               <a:t> Always git pull before starting work to ensure you are on the latest version!</a:t>
             </a:r>
-            <a:endParaRPr dirty="0"/>
+            <a:endParaRPr sz="1800" dirty="0"/>
           </a:p>
         </p:txBody>
       </p:sp>
@@ -17258,7 +17343,7 @@
           <p:nvPr/>
         </p:nvPicPr>
         <p:blipFill rotWithShape="1">
-          <a:blip r:embed="rId5">
+          <a:blip r:embed="rId4">
             <a:alphaModFix/>
           </a:blip>
           <a:srcRect/>
@@ -17266,7 +17351,7 @@
         </p:blipFill>
         <p:spPr>
           <a:xfrm>
-            <a:off x="6391275" y="1966912"/>
+            <a:off x="6352222" y="1923781"/>
             <a:ext cx="5210175" cy="3790950"/>
           </a:xfrm>
           <a:prstGeom prst="rect">
@@ -17313,7 +17398,7 @@
               <a:buNone/>
             </a:pPr>
             <a:r>
-              <a:rPr lang="en-US" sz="3150" b="1" i="0" u="none" strike="noStrike" cap="none">
+              <a:rPr lang="en-US" sz="3150" b="1" i="0" u="none" strike="noStrike" cap="none" dirty="0">
                 <a:solidFill>
                   <a:srgbClr val="F0F6FC"/>
                 </a:solidFill>
@@ -17324,7 +17409,7 @@
               </a:rPr>
               <a:t>The Complete Workflow</a:t>
             </a:r>
-            <a:endParaRPr/>
+            <a:endParaRPr dirty="0"/>
           </a:p>
         </p:txBody>
       </p:sp>
@@ -17381,13 +17466,13 @@
   <p:clrMapOvr>
     <a:masterClrMapping/>
   </p:clrMapOvr>
-  <mc:AlternateContent xmlns:mc="http://schemas.openxmlformats.org/markup-compatibility/2006">
-    <mc:Choice xmlns:p159="http://schemas.microsoft.com/office/powerpoint/2015/09/main" Requires="p159">
+  <mc:AlternateContent xmlns:mc="http://schemas.openxmlformats.org/markup-compatibility/2006" xmlns:p159="http://schemas.microsoft.com/office/powerpoint/2015/09/main">
+    <mc:Choice Requires="p159">
       <p:transition xmlns:p14="http://schemas.microsoft.com/office/powerpoint/2010/main" spd="slow" p14:dur="2000">
         <p159:morph option="byObject"/>
       </p:transition>
     </mc:Choice>
-    <mc:Fallback>
+    <mc:Fallback xmlns="">
       <p:transition spd="slow">
         <p:fade/>
       </p:transition>
@@ -17397,6 +17482,3758 @@
 </file>
 
 <file path=ppt/slides/slide15.xml><?xml version="1.0" encoding="utf-8"?>
+<p:sld xmlns:a="http://schemas.openxmlformats.org/drawingml/2006/main" xmlns:r="http://schemas.openxmlformats.org/officeDocument/2006/relationships" xmlns:p="http://schemas.openxmlformats.org/presentationml/2006/main">
+  <p:cSld>
+    <p:bg>
+      <p:bgPr>
+        <a:solidFill>
+          <a:srgbClr val="161B22"/>
+        </a:solidFill>
+        <a:effectLst/>
+      </p:bgPr>
+    </p:bg>
+    <p:spTree>
+      <p:nvGrpSpPr>
+        <p:cNvPr id="1" name="Shape 303"/>
+        <p:cNvGrpSpPr/>
+        <p:nvPr/>
+      </p:nvGrpSpPr>
+      <p:grpSpPr>
+        <a:xfrm>
+          <a:off x="0" y="0"/>
+          <a:ext cx="0" cy="0"/>
+          <a:chOff x="0" y="0"/>
+          <a:chExt cx="0" cy="0"/>
+        </a:xfrm>
+      </p:grpSpPr>
+      <p:pic>
+        <p:nvPicPr>
+          <p:cNvPr id="304" name="Google Shape;304;p28" descr="image.png"/>
+          <p:cNvPicPr preferRelativeResize="0"/>
+          <p:nvPr/>
+        </p:nvPicPr>
+        <p:blipFill rotWithShape="1">
+          <a:blip r:embed="rId3">
+            <a:alphaModFix/>
+          </a:blip>
+          <a:srcRect/>
+          <a:stretch/>
+        </p:blipFill>
+        <p:spPr>
+          <a:xfrm>
+            <a:off x="0" y="0"/>
+            <a:ext cx="12192000" cy="6858000"/>
+          </a:xfrm>
+          <a:prstGeom prst="rect">
+            <a:avLst/>
+          </a:prstGeom>
+          <a:noFill/>
+          <a:ln>
+            <a:noFill/>
+          </a:ln>
+        </p:spPr>
+      </p:pic>
+      <p:pic>
+        <p:nvPicPr>
+          <p:cNvPr id="305" name="Google Shape;305;p28" descr="image.png"/>
+          <p:cNvPicPr preferRelativeResize="0"/>
+          <p:nvPr/>
+        </p:nvPicPr>
+        <p:blipFill rotWithShape="1">
+          <a:blip r:embed="rId4">
+            <a:alphaModFix/>
+          </a:blip>
+          <a:srcRect/>
+          <a:stretch/>
+        </p:blipFill>
+        <p:spPr>
+          <a:xfrm>
+            <a:off x="581025" y="2324100"/>
+            <a:ext cx="5229225" cy="3076575"/>
+          </a:xfrm>
+          <a:prstGeom prst="rect">
+            <a:avLst/>
+          </a:prstGeom>
+          <a:noFill/>
+          <a:ln>
+            <a:noFill/>
+          </a:ln>
+        </p:spPr>
+      </p:pic>
+      <p:pic>
+        <p:nvPicPr>
+          <p:cNvPr id="306" name="Google Shape;306;p28" descr="image.png"/>
+          <p:cNvPicPr preferRelativeResize="0"/>
+          <p:nvPr/>
+        </p:nvPicPr>
+        <p:blipFill rotWithShape="1">
+          <a:blip r:embed="rId5">
+            <a:alphaModFix/>
+          </a:blip>
+          <a:srcRect/>
+          <a:stretch/>
+        </p:blipFill>
+        <p:spPr>
+          <a:xfrm>
+            <a:off x="6381750" y="2324100"/>
+            <a:ext cx="5229225" cy="3076575"/>
+          </a:xfrm>
+          <a:prstGeom prst="rect">
+            <a:avLst/>
+          </a:prstGeom>
+          <a:noFill/>
+          <a:ln>
+            <a:noFill/>
+          </a:ln>
+        </p:spPr>
+      </p:pic>
+      <p:sp>
+        <p:nvSpPr>
+          <p:cNvPr id="307" name="Google Shape;307;p28"/>
+          <p:cNvSpPr txBox="1"/>
+          <p:nvPr/>
+        </p:nvSpPr>
+        <p:spPr>
+          <a:xfrm>
+            <a:off x="971550" y="2714625"/>
+            <a:ext cx="4670583" cy="430887"/>
+          </a:xfrm>
+          <a:prstGeom prst="rect">
+            <a:avLst/>
+          </a:prstGeom>
+          <a:noFill/>
+          <a:ln>
+            <a:noFill/>
+          </a:ln>
+        </p:spPr>
+        <p:txBody>
+          <a:bodyPr spcFirstLastPara="1" wrap="square" lIns="0" tIns="0" rIns="0" bIns="0" anchor="t" anchorCtr="0">
+            <a:spAutoFit/>
+          </a:bodyPr>
+          <a:lstStyle/>
+          <a:p>
+            <a:pPr marL="0" marR="0" lvl="0" indent="0" algn="l" rtl="0">
+              <a:spcBef>
+                <a:spcPts val="0"/>
+              </a:spcBef>
+              <a:spcAft>
+                <a:spcPts val="0"/>
+              </a:spcAft>
+              <a:buNone/>
+            </a:pPr>
+            <a:r>
+              <a:rPr lang="en-US" sz="2800" b="1" i="0" u="none" strike="noStrike" cap="none" dirty="0">
+                <a:solidFill>
+                  <a:srgbClr val="238636"/>
+                </a:solidFill>
+                <a:latin typeface="Urbanist"/>
+                <a:ea typeface="Urbanist"/>
+                <a:cs typeface="Urbanist"/>
+                <a:sym typeface="Urbanist"/>
+              </a:rPr>
+              <a:t>Creating a Repository</a:t>
+            </a:r>
+            <a:endParaRPr sz="1600" dirty="0"/>
+          </a:p>
+        </p:txBody>
+      </p:sp>
+      <p:sp>
+        <p:nvSpPr>
+          <p:cNvPr id="308" name="Google Shape;308;p28"/>
+          <p:cNvSpPr txBox="1"/>
+          <p:nvPr/>
+        </p:nvSpPr>
+        <p:spPr>
+          <a:xfrm>
+            <a:off x="971550" y="3219450"/>
+            <a:ext cx="4448175" cy="393954"/>
+          </a:xfrm>
+          <a:prstGeom prst="rect">
+            <a:avLst/>
+          </a:prstGeom>
+          <a:noFill/>
+          <a:ln>
+            <a:noFill/>
+          </a:ln>
+        </p:spPr>
+        <p:txBody>
+          <a:bodyPr spcFirstLastPara="1" wrap="square" lIns="0" tIns="0" rIns="0" bIns="0" anchor="t" anchorCtr="0">
+            <a:spAutoFit/>
+          </a:bodyPr>
+          <a:lstStyle/>
+          <a:p>
+            <a:pPr marL="0" marR="0" lvl="0" indent="0" algn="l" rtl="0">
+              <a:lnSpc>
+                <a:spcPct val="160000"/>
+              </a:lnSpc>
+              <a:spcBef>
+                <a:spcPts val="0"/>
+              </a:spcBef>
+              <a:spcAft>
+                <a:spcPts val="0"/>
+              </a:spcAft>
+              <a:buNone/>
+            </a:pPr>
+            <a:r>
+              <a:rPr lang="en-US" sz="1600" b="0" i="0" u="none" strike="noStrike" cap="none">
+                <a:solidFill>
+                  <a:srgbClr val="8B949E"/>
+                </a:solidFill>
+                <a:latin typeface="Urbanist"/>
+                <a:ea typeface="Urbanist"/>
+                <a:cs typeface="Urbanist"/>
+                <a:sym typeface="Urbanist"/>
+              </a:rPr>
+              <a:t>1. Go to GitHub.com &amp; click "New".</a:t>
+            </a:r>
+            <a:endParaRPr sz="1600"/>
+          </a:p>
+        </p:txBody>
+      </p:sp>
+      <p:sp>
+        <p:nvSpPr>
+          <p:cNvPr id="309" name="Google Shape;309;p28"/>
+          <p:cNvSpPr txBox="1"/>
+          <p:nvPr/>
+        </p:nvSpPr>
+        <p:spPr>
+          <a:xfrm>
+            <a:off x="971550" y="3667125"/>
+            <a:ext cx="4448175" cy="393954"/>
+          </a:xfrm>
+          <a:prstGeom prst="rect">
+            <a:avLst/>
+          </a:prstGeom>
+          <a:noFill/>
+          <a:ln>
+            <a:noFill/>
+          </a:ln>
+        </p:spPr>
+        <p:txBody>
+          <a:bodyPr spcFirstLastPara="1" wrap="square" lIns="0" tIns="0" rIns="0" bIns="0" anchor="t" anchorCtr="0">
+            <a:spAutoFit/>
+          </a:bodyPr>
+          <a:lstStyle/>
+          <a:p>
+            <a:pPr marL="0" marR="0" lvl="0" indent="0" algn="l" rtl="0">
+              <a:lnSpc>
+                <a:spcPct val="160000"/>
+              </a:lnSpc>
+              <a:spcBef>
+                <a:spcPts val="0"/>
+              </a:spcBef>
+              <a:spcAft>
+                <a:spcPts val="0"/>
+              </a:spcAft>
+              <a:buNone/>
+            </a:pPr>
+            <a:r>
+              <a:rPr lang="en-US" sz="1600" b="0" i="0" u="none" strike="noStrike" cap="none">
+                <a:solidFill>
+                  <a:srgbClr val="8B949E"/>
+                </a:solidFill>
+                <a:latin typeface="Urbanist"/>
+                <a:ea typeface="Urbanist"/>
+                <a:cs typeface="Urbanist"/>
+                <a:sym typeface="Urbanist"/>
+              </a:rPr>
+              <a:t>2. Give it a name and description.</a:t>
+            </a:r>
+            <a:endParaRPr sz="1600"/>
+          </a:p>
+        </p:txBody>
+      </p:sp>
+      <p:sp>
+        <p:nvSpPr>
+          <p:cNvPr id="310" name="Google Shape;310;p28"/>
+          <p:cNvSpPr txBox="1"/>
+          <p:nvPr/>
+        </p:nvSpPr>
+        <p:spPr>
+          <a:xfrm>
+            <a:off x="971550" y="4114800"/>
+            <a:ext cx="4448175" cy="393954"/>
+          </a:xfrm>
+          <a:prstGeom prst="rect">
+            <a:avLst/>
+          </a:prstGeom>
+          <a:noFill/>
+          <a:ln>
+            <a:noFill/>
+          </a:ln>
+        </p:spPr>
+        <p:txBody>
+          <a:bodyPr spcFirstLastPara="1" wrap="square" lIns="0" tIns="0" rIns="0" bIns="0" anchor="t" anchorCtr="0">
+            <a:spAutoFit/>
+          </a:bodyPr>
+          <a:lstStyle/>
+          <a:p>
+            <a:pPr marL="0" marR="0" lvl="0" indent="0" algn="l" rtl="0">
+              <a:lnSpc>
+                <a:spcPct val="160000"/>
+              </a:lnSpc>
+              <a:spcBef>
+                <a:spcPts val="0"/>
+              </a:spcBef>
+              <a:spcAft>
+                <a:spcPts val="0"/>
+              </a:spcAft>
+              <a:buNone/>
+            </a:pPr>
+            <a:r>
+              <a:rPr lang="en-US" sz="1600" b="0" i="0" u="none" strike="noStrike" cap="none">
+                <a:solidFill>
+                  <a:srgbClr val="8B949E"/>
+                </a:solidFill>
+                <a:latin typeface="Urbanist"/>
+                <a:ea typeface="Urbanist"/>
+                <a:cs typeface="Urbanist"/>
+                <a:sym typeface="Urbanist"/>
+              </a:rPr>
+              <a:t>3. Choose Public or Private.</a:t>
+            </a:r>
+            <a:endParaRPr sz="1600"/>
+          </a:p>
+        </p:txBody>
+      </p:sp>
+      <p:sp>
+        <p:nvSpPr>
+          <p:cNvPr id="311" name="Google Shape;311;p28"/>
+          <p:cNvSpPr txBox="1"/>
+          <p:nvPr/>
+        </p:nvSpPr>
+        <p:spPr>
+          <a:xfrm>
+            <a:off x="971550" y="4562475"/>
+            <a:ext cx="4448175" cy="393954"/>
+          </a:xfrm>
+          <a:prstGeom prst="rect">
+            <a:avLst/>
+          </a:prstGeom>
+          <a:noFill/>
+          <a:ln>
+            <a:noFill/>
+          </a:ln>
+        </p:spPr>
+        <p:txBody>
+          <a:bodyPr spcFirstLastPara="1" wrap="square" lIns="0" tIns="0" rIns="0" bIns="0" anchor="t" anchorCtr="0">
+            <a:spAutoFit/>
+          </a:bodyPr>
+          <a:lstStyle/>
+          <a:p>
+            <a:pPr marL="0" marR="0" lvl="0" indent="0" algn="l" rtl="0">
+              <a:lnSpc>
+                <a:spcPct val="160000"/>
+              </a:lnSpc>
+              <a:spcBef>
+                <a:spcPts val="0"/>
+              </a:spcBef>
+              <a:spcAft>
+                <a:spcPts val="0"/>
+              </a:spcAft>
+              <a:buNone/>
+            </a:pPr>
+            <a:r>
+              <a:rPr lang="en-US" sz="1600" b="0" i="0" u="none" strike="noStrike" cap="none">
+                <a:solidFill>
+                  <a:srgbClr val="8B949E"/>
+                </a:solidFill>
+                <a:latin typeface="Urbanist"/>
+                <a:ea typeface="Urbanist"/>
+                <a:cs typeface="Urbanist"/>
+                <a:sym typeface="Urbanist"/>
+              </a:rPr>
+              <a:t>4. Clone it locally using git clone [URL].</a:t>
+            </a:r>
+            <a:endParaRPr sz="1600"/>
+          </a:p>
+        </p:txBody>
+      </p:sp>
+      <p:sp>
+        <p:nvSpPr>
+          <p:cNvPr id="312" name="Google Shape;312;p28"/>
+          <p:cNvSpPr txBox="1"/>
+          <p:nvPr/>
+        </p:nvSpPr>
+        <p:spPr>
+          <a:xfrm>
+            <a:off x="6772275" y="2714625"/>
+            <a:ext cx="4670583" cy="430887"/>
+          </a:xfrm>
+          <a:prstGeom prst="rect">
+            <a:avLst/>
+          </a:prstGeom>
+          <a:noFill/>
+          <a:ln>
+            <a:noFill/>
+          </a:ln>
+        </p:spPr>
+        <p:txBody>
+          <a:bodyPr spcFirstLastPara="1" wrap="square" lIns="0" tIns="0" rIns="0" bIns="0" anchor="t" anchorCtr="0">
+            <a:spAutoFit/>
+          </a:bodyPr>
+          <a:lstStyle/>
+          <a:p>
+            <a:pPr marL="0" marR="0" lvl="0" indent="0" algn="l" rtl="0">
+              <a:spcBef>
+                <a:spcPts val="0"/>
+              </a:spcBef>
+              <a:spcAft>
+                <a:spcPts val="0"/>
+              </a:spcAft>
+              <a:buNone/>
+            </a:pPr>
+            <a:r>
+              <a:rPr lang="en-US" sz="2800" b="1" i="0" u="none" strike="noStrike" cap="none">
+                <a:solidFill>
+                  <a:srgbClr val="238636"/>
+                </a:solidFill>
+                <a:latin typeface="Urbanist"/>
+                <a:ea typeface="Urbanist"/>
+                <a:cs typeface="Urbanist"/>
+                <a:sym typeface="Urbanist"/>
+              </a:rPr>
+              <a:t>Creating a Branch</a:t>
+            </a:r>
+            <a:endParaRPr sz="1600"/>
+          </a:p>
+        </p:txBody>
+      </p:sp>
+      <p:sp>
+        <p:nvSpPr>
+          <p:cNvPr id="313" name="Google Shape;313;p28"/>
+          <p:cNvSpPr txBox="1"/>
+          <p:nvPr/>
+        </p:nvSpPr>
+        <p:spPr>
+          <a:xfrm>
+            <a:off x="6772275" y="3219450"/>
+            <a:ext cx="4448175" cy="393954"/>
+          </a:xfrm>
+          <a:prstGeom prst="rect">
+            <a:avLst/>
+          </a:prstGeom>
+          <a:noFill/>
+          <a:ln>
+            <a:noFill/>
+          </a:ln>
+        </p:spPr>
+        <p:txBody>
+          <a:bodyPr spcFirstLastPara="1" wrap="square" lIns="0" tIns="0" rIns="0" bIns="0" anchor="t" anchorCtr="0">
+            <a:spAutoFit/>
+          </a:bodyPr>
+          <a:lstStyle/>
+          <a:p>
+            <a:pPr marL="0" marR="0" lvl="0" indent="0" algn="l" rtl="0">
+              <a:lnSpc>
+                <a:spcPct val="160000"/>
+              </a:lnSpc>
+              <a:spcBef>
+                <a:spcPts val="0"/>
+              </a:spcBef>
+              <a:spcAft>
+                <a:spcPts val="0"/>
+              </a:spcAft>
+              <a:buNone/>
+            </a:pPr>
+            <a:r>
+              <a:rPr lang="en-US" sz="1600" b="0" i="0" u="none" strike="noStrike" cap="none">
+                <a:solidFill>
+                  <a:srgbClr val="8B949E"/>
+                </a:solidFill>
+                <a:latin typeface="Urbanist"/>
+                <a:ea typeface="Urbanist"/>
+                <a:cs typeface="Urbanist"/>
+                <a:sym typeface="Urbanist"/>
+              </a:rPr>
+              <a:t>1. Use git checkout -b feature-name.</a:t>
+            </a:r>
+            <a:endParaRPr sz="1600"/>
+          </a:p>
+        </p:txBody>
+      </p:sp>
+      <p:sp>
+        <p:nvSpPr>
+          <p:cNvPr id="314" name="Google Shape;314;p28"/>
+          <p:cNvSpPr txBox="1"/>
+          <p:nvPr/>
+        </p:nvSpPr>
+        <p:spPr>
+          <a:xfrm>
+            <a:off x="6772275" y="3667125"/>
+            <a:ext cx="4448175" cy="787908"/>
+          </a:xfrm>
+          <a:prstGeom prst="rect">
+            <a:avLst/>
+          </a:prstGeom>
+          <a:noFill/>
+          <a:ln>
+            <a:noFill/>
+          </a:ln>
+        </p:spPr>
+        <p:txBody>
+          <a:bodyPr spcFirstLastPara="1" wrap="square" lIns="0" tIns="0" rIns="0" bIns="0" anchor="t" anchorCtr="0">
+            <a:spAutoFit/>
+          </a:bodyPr>
+          <a:lstStyle/>
+          <a:p>
+            <a:pPr marL="0" marR="0" lvl="0" indent="0" algn="l" rtl="0">
+              <a:lnSpc>
+                <a:spcPct val="160000"/>
+              </a:lnSpc>
+              <a:spcBef>
+                <a:spcPts val="0"/>
+              </a:spcBef>
+              <a:spcAft>
+                <a:spcPts val="0"/>
+              </a:spcAft>
+              <a:buNone/>
+            </a:pPr>
+            <a:r>
+              <a:rPr lang="en-US" sz="1600" b="0" i="0" u="none" strike="noStrike" cap="none">
+                <a:solidFill>
+                  <a:srgbClr val="8B949E"/>
+                </a:solidFill>
+                <a:latin typeface="Urbanist"/>
+                <a:ea typeface="Urbanist"/>
+                <a:cs typeface="Urbanist"/>
+                <a:sym typeface="Urbanist"/>
+              </a:rPr>
+              <a:t>2. This creates a separate timeline for your changes.</a:t>
+            </a:r>
+            <a:endParaRPr sz="1600"/>
+          </a:p>
+        </p:txBody>
+      </p:sp>
+      <p:sp>
+        <p:nvSpPr>
+          <p:cNvPr id="315" name="Google Shape;315;p28"/>
+          <p:cNvSpPr txBox="1"/>
+          <p:nvPr/>
+        </p:nvSpPr>
+        <p:spPr>
+          <a:xfrm>
+            <a:off x="6772275" y="4114800"/>
+            <a:ext cx="4448175" cy="393954"/>
+          </a:xfrm>
+          <a:prstGeom prst="rect">
+            <a:avLst/>
+          </a:prstGeom>
+          <a:noFill/>
+          <a:ln>
+            <a:noFill/>
+          </a:ln>
+        </p:spPr>
+        <p:txBody>
+          <a:bodyPr spcFirstLastPara="1" wrap="square" lIns="0" tIns="0" rIns="0" bIns="0" anchor="t" anchorCtr="0">
+            <a:spAutoFit/>
+          </a:bodyPr>
+          <a:lstStyle/>
+          <a:p>
+            <a:pPr marL="0" marR="0" lvl="0" indent="0" algn="l" rtl="0">
+              <a:lnSpc>
+                <a:spcPct val="160000"/>
+              </a:lnSpc>
+              <a:spcBef>
+                <a:spcPts val="0"/>
+              </a:spcBef>
+              <a:spcAft>
+                <a:spcPts val="0"/>
+              </a:spcAft>
+              <a:buNone/>
+            </a:pPr>
+            <a:r>
+              <a:rPr lang="en-US" sz="1600" b="0" i="0" u="none" strike="noStrike" cap="none">
+                <a:solidFill>
+                  <a:srgbClr val="8B949E"/>
+                </a:solidFill>
+                <a:latin typeface="Urbanist"/>
+                <a:ea typeface="Urbanist"/>
+                <a:cs typeface="Urbanist"/>
+                <a:sym typeface="Urbanist"/>
+              </a:rPr>
+              <a:t>3. Commits here don't affect the 'main' branch.</a:t>
+            </a:r>
+            <a:endParaRPr sz="1600"/>
+          </a:p>
+        </p:txBody>
+      </p:sp>
+      <p:sp>
+        <p:nvSpPr>
+          <p:cNvPr id="316" name="Google Shape;316;p28"/>
+          <p:cNvSpPr txBox="1"/>
+          <p:nvPr/>
+        </p:nvSpPr>
+        <p:spPr>
+          <a:xfrm>
+            <a:off x="6772275" y="4562475"/>
+            <a:ext cx="4448175" cy="393954"/>
+          </a:xfrm>
+          <a:prstGeom prst="rect">
+            <a:avLst/>
+          </a:prstGeom>
+          <a:noFill/>
+          <a:ln>
+            <a:noFill/>
+          </a:ln>
+        </p:spPr>
+        <p:txBody>
+          <a:bodyPr spcFirstLastPara="1" wrap="square" lIns="0" tIns="0" rIns="0" bIns="0" anchor="t" anchorCtr="0">
+            <a:spAutoFit/>
+          </a:bodyPr>
+          <a:lstStyle/>
+          <a:p>
+            <a:pPr marL="0" marR="0" lvl="0" indent="0" algn="l" rtl="0">
+              <a:lnSpc>
+                <a:spcPct val="160000"/>
+              </a:lnSpc>
+              <a:spcBef>
+                <a:spcPts val="0"/>
+              </a:spcBef>
+              <a:spcAft>
+                <a:spcPts val="0"/>
+              </a:spcAft>
+              <a:buNone/>
+            </a:pPr>
+            <a:r>
+              <a:rPr lang="en-US" sz="1600" b="0" i="0" u="none" strike="noStrike" cap="none">
+                <a:solidFill>
+                  <a:srgbClr val="8B949E"/>
+                </a:solidFill>
+                <a:latin typeface="Urbanist"/>
+                <a:ea typeface="Urbanist"/>
+                <a:cs typeface="Urbanist"/>
+                <a:sym typeface="Urbanist"/>
+              </a:rPr>
+              <a:t>4. Merge back when your feature is done!</a:t>
+            </a:r>
+            <a:endParaRPr sz="1600"/>
+          </a:p>
+        </p:txBody>
+      </p:sp>
+      <p:sp>
+        <p:nvSpPr>
+          <p:cNvPr id="317" name="Google Shape;317;p28"/>
+          <p:cNvSpPr txBox="1"/>
+          <p:nvPr/>
+        </p:nvSpPr>
+        <p:spPr>
+          <a:xfrm>
+            <a:off x="771525" y="581025"/>
+            <a:ext cx="11381422" cy="492443"/>
+          </a:xfrm>
+          <a:prstGeom prst="rect">
+            <a:avLst/>
+          </a:prstGeom>
+          <a:noFill/>
+          <a:ln>
+            <a:noFill/>
+          </a:ln>
+        </p:spPr>
+        <p:txBody>
+          <a:bodyPr spcFirstLastPara="1" wrap="square" lIns="0" tIns="0" rIns="0" bIns="0" anchor="t" anchorCtr="0">
+            <a:spAutoFit/>
+          </a:bodyPr>
+          <a:lstStyle/>
+          <a:p>
+            <a:pPr marL="0" marR="0" lvl="0" indent="0" algn="l" rtl="0">
+              <a:spcBef>
+                <a:spcPts val="0"/>
+              </a:spcBef>
+              <a:spcAft>
+                <a:spcPts val="0"/>
+              </a:spcAft>
+              <a:buNone/>
+            </a:pPr>
+            <a:r>
+              <a:rPr lang="en-US" sz="3200" b="1" i="0" u="none" strike="noStrike" cap="none">
+                <a:solidFill>
+                  <a:srgbClr val="F0F6FC"/>
+                </a:solidFill>
+                <a:latin typeface="Urbanist"/>
+                <a:ea typeface="Urbanist"/>
+                <a:cs typeface="Urbanist"/>
+                <a:sym typeface="Urbanist"/>
+              </a:rPr>
+              <a:t>Your First Repository</a:t>
+            </a:r>
+            <a:endParaRPr sz="1600"/>
+          </a:p>
+        </p:txBody>
+      </p:sp>
+      <p:sp>
+        <p:nvSpPr>
+          <p:cNvPr id="318" name="Google Shape;318;p28"/>
+          <p:cNvSpPr/>
+          <p:nvPr/>
+        </p:nvSpPr>
+        <p:spPr>
+          <a:xfrm>
+            <a:off x="581025" y="581025"/>
+            <a:ext cx="57150" cy="485775"/>
+          </a:xfrm>
+          <a:prstGeom prst="rect">
+            <a:avLst/>
+          </a:prstGeom>
+          <a:solidFill>
+            <a:srgbClr val="F05032"/>
+          </a:solidFill>
+          <a:ln>
+            <a:noFill/>
+          </a:ln>
+        </p:spPr>
+        <p:txBody>
+          <a:bodyPr spcFirstLastPara="1" wrap="square" lIns="91425" tIns="45700" rIns="91425" bIns="45700" anchor="ctr" anchorCtr="0">
+            <a:noAutofit/>
+          </a:bodyPr>
+          <a:lstStyle/>
+          <a:p>
+            <a:pPr marL="0" marR="0" lvl="0" indent="0" algn="ctr" rtl="0">
+              <a:spcBef>
+                <a:spcPts val="0"/>
+              </a:spcBef>
+              <a:spcAft>
+                <a:spcPts val="0"/>
+              </a:spcAft>
+              <a:buNone/>
+            </a:pPr>
+            <a:endParaRPr sz="2000" b="0" i="0" u="none" strike="noStrike" cap="none">
+              <a:solidFill>
+                <a:schemeClr val="dk1"/>
+              </a:solidFill>
+              <a:latin typeface="Calibri"/>
+              <a:ea typeface="Calibri"/>
+              <a:cs typeface="Calibri"/>
+              <a:sym typeface="Calibri"/>
+            </a:endParaRPr>
+          </a:p>
+        </p:txBody>
+      </p:sp>
+    </p:spTree>
+  </p:cSld>
+  <p:clrMapOvr>
+    <a:masterClrMapping/>
+  </p:clrMapOvr>
+  <mc:AlternateContent xmlns:mc="http://schemas.openxmlformats.org/markup-compatibility/2006" xmlns:p159="http://schemas.microsoft.com/office/powerpoint/2015/09/main">
+    <mc:Choice Requires="p159">
+      <p:transition xmlns:p14="http://schemas.microsoft.com/office/powerpoint/2010/main" spd="slow" p14:dur="2000">
+        <p159:morph option="byObject"/>
+      </p:transition>
+    </mc:Choice>
+    <mc:Fallback xmlns="">
+      <p:transition spd="slow">
+        <p:fade/>
+      </p:transition>
+    </mc:Fallback>
+  </mc:AlternateContent>
+</p:sld>
+</file>
+
+<file path=ppt/slides/slide16.xml><?xml version="1.0" encoding="utf-8"?>
+<p:sld xmlns:a="http://schemas.openxmlformats.org/drawingml/2006/main" xmlns:r="http://schemas.openxmlformats.org/officeDocument/2006/relationships" xmlns:p="http://schemas.openxmlformats.org/presentationml/2006/main">
+  <p:cSld>
+    <p:spTree>
+      <p:nvGrpSpPr>
+        <p:cNvPr id="1" name="Shape 83"/>
+        <p:cNvGrpSpPr/>
+        <p:nvPr/>
+      </p:nvGrpSpPr>
+      <p:grpSpPr>
+        <a:xfrm>
+          <a:off x="0" y="0"/>
+          <a:ext cx="0" cy="0"/>
+          <a:chOff x="0" y="0"/>
+          <a:chExt cx="0" cy="0"/>
+        </a:xfrm>
+      </p:grpSpPr>
+      <p:pic>
+        <p:nvPicPr>
+          <p:cNvPr id="84" name="Google Shape;84;p13" descr="image.png"/>
+          <p:cNvPicPr preferRelativeResize="0"/>
+          <p:nvPr/>
+        </p:nvPicPr>
+        <p:blipFill rotWithShape="1">
+          <a:blip r:embed="rId3">
+            <a:alphaModFix/>
+          </a:blip>
+          <a:srcRect/>
+          <a:stretch/>
+        </p:blipFill>
+        <p:spPr>
+          <a:xfrm>
+            <a:off x="30957" y="76200"/>
+            <a:ext cx="12192000" cy="6858000"/>
+          </a:xfrm>
+          <a:prstGeom prst="rect">
+            <a:avLst/>
+          </a:prstGeom>
+          <a:noFill/>
+          <a:ln>
+            <a:noFill/>
+          </a:ln>
+        </p:spPr>
+      </p:pic>
+      <p:pic>
+        <p:nvPicPr>
+          <p:cNvPr id="85" name="Google Shape;85;p13" descr="image.png"/>
+          <p:cNvPicPr preferRelativeResize="0"/>
+          <p:nvPr/>
+        </p:nvPicPr>
+        <p:blipFill rotWithShape="1">
+          <a:blip r:embed="rId4">
+            <a:alphaModFix/>
+          </a:blip>
+          <a:srcRect/>
+          <a:stretch/>
+        </p:blipFill>
+        <p:spPr>
+          <a:xfrm>
+            <a:off x="8572500" y="2083850"/>
+            <a:ext cx="3048000" cy="1971675"/>
+          </a:xfrm>
+          <a:prstGeom prst="rect">
+            <a:avLst/>
+          </a:prstGeom>
+          <a:noFill/>
+          <a:ln>
+            <a:noFill/>
+          </a:ln>
+        </p:spPr>
+      </p:pic>
+      <p:pic>
+        <p:nvPicPr>
+          <p:cNvPr id="86" name="Google Shape;86;p13" descr="image.png"/>
+          <p:cNvPicPr preferRelativeResize="0"/>
+          <p:nvPr/>
+        </p:nvPicPr>
+        <p:blipFill rotWithShape="1">
+          <a:blip r:embed="rId5">
+            <a:alphaModFix/>
+          </a:blip>
+          <a:srcRect/>
+          <a:stretch/>
+        </p:blipFill>
+        <p:spPr>
+          <a:xfrm>
+            <a:off x="8572500" y="4388815"/>
+            <a:ext cx="3048000" cy="1971675"/>
+          </a:xfrm>
+          <a:prstGeom prst="rect">
+            <a:avLst/>
+          </a:prstGeom>
+          <a:noFill/>
+          <a:ln>
+            <a:noFill/>
+          </a:ln>
+        </p:spPr>
+      </p:pic>
+      <p:sp>
+        <p:nvSpPr>
+          <p:cNvPr id="87" name="Google Shape;87;p13"/>
+          <p:cNvSpPr txBox="1"/>
+          <p:nvPr/>
+        </p:nvSpPr>
+        <p:spPr>
+          <a:xfrm>
+            <a:off x="809625" y="580434"/>
+            <a:ext cx="11351418" cy="484748"/>
+          </a:xfrm>
+          <a:prstGeom prst="rect">
+            <a:avLst/>
+          </a:prstGeom>
+          <a:noFill/>
+          <a:ln>
+            <a:noFill/>
+          </a:ln>
+        </p:spPr>
+        <p:txBody>
+          <a:bodyPr spcFirstLastPara="1" wrap="square" lIns="0" tIns="0" rIns="0" bIns="0" anchor="ctr" anchorCtr="0">
+            <a:spAutoFit/>
+          </a:bodyPr>
+          <a:lstStyle/>
+          <a:p>
+            <a:pPr marL="0" marR="0" lvl="0" indent="0" algn="l" rtl="0">
+              <a:spcBef>
+                <a:spcPts val="0"/>
+              </a:spcBef>
+              <a:spcAft>
+                <a:spcPts val="0"/>
+              </a:spcAft>
+              <a:buNone/>
+            </a:pPr>
+            <a:r>
+              <a:rPr lang="en-US" sz="3150" b="1" i="0" u="none" strike="noStrike" cap="none" dirty="0">
+                <a:solidFill>
+                  <a:srgbClr val="FFFFFF"/>
+                </a:solidFill>
+                <a:latin typeface="Urbanist"/>
+                <a:ea typeface="Urbanist"/>
+                <a:cs typeface="Urbanist"/>
+                <a:sym typeface="Urbanist"/>
+              </a:rPr>
+              <a:t>COLLABORATIVE SUB-BRANCHING WORKFLOW</a:t>
+            </a:r>
+            <a:endParaRPr sz="3150" dirty="0"/>
+          </a:p>
+        </p:txBody>
+      </p:sp>
+      <p:sp>
+        <p:nvSpPr>
+          <p:cNvPr id="89" name="Google Shape;89;p13"/>
+          <p:cNvSpPr txBox="1"/>
+          <p:nvPr/>
+        </p:nvSpPr>
+        <p:spPr>
+          <a:xfrm>
+            <a:off x="809625" y="1285875"/>
+            <a:ext cx="10753725" cy="257175"/>
+          </a:xfrm>
+          <a:prstGeom prst="rect">
+            <a:avLst/>
+          </a:prstGeom>
+          <a:noFill/>
+          <a:ln>
+            <a:noFill/>
+          </a:ln>
+        </p:spPr>
+        <p:txBody>
+          <a:bodyPr spcFirstLastPara="1" wrap="square" lIns="0" tIns="0" rIns="0" bIns="0" anchor="t" anchorCtr="0">
+            <a:spAutoFit/>
+          </a:bodyPr>
+          <a:lstStyle/>
+          <a:p>
+            <a:pPr marL="0" marR="0" lvl="0" indent="0" algn="l" rtl="0">
+              <a:spcBef>
+                <a:spcPts val="0"/>
+              </a:spcBef>
+              <a:spcAft>
+                <a:spcPts val="0"/>
+              </a:spcAft>
+              <a:buNone/>
+            </a:pPr>
+            <a:r>
+              <a:rPr lang="en-US" sz="1650" b="0" i="0" u="none" strike="noStrike" cap="none" dirty="0">
+                <a:solidFill>
+                  <a:srgbClr val="94A3B8"/>
+                </a:solidFill>
+                <a:latin typeface="Lato"/>
+                <a:ea typeface="Lato"/>
+                <a:cs typeface="Lato"/>
+                <a:sym typeface="Lato"/>
+              </a:rPr>
+              <a:t>Streamlining multi-developer contributions from isolation to final integration.</a:t>
+            </a:r>
+            <a:endParaRPr dirty="0"/>
+          </a:p>
+        </p:txBody>
+      </p:sp>
+      <p:graphicFrame>
+        <p:nvGraphicFramePr>
+          <p:cNvPr id="90" name="Google Shape;90;p13"/>
+          <p:cNvGraphicFramePr/>
+          <p:nvPr>
+            <p:extLst>
+              <p:ext uri="{D42A27DB-BD31-4B8C-83A1-F6EECF244321}">
+                <p14:modId xmlns:p14="http://schemas.microsoft.com/office/powerpoint/2010/main" val="356981083"/>
+              </p:ext>
+            </p:extLst>
+          </p:nvPr>
+        </p:nvGraphicFramePr>
+        <p:xfrm>
+          <a:off x="581025" y="2043705"/>
+          <a:ext cx="7620000" cy="4269752"/>
+        </p:xfrm>
+        <a:graphic>
+          <a:graphicData uri="http://schemas.openxmlformats.org/drawingml/2006/table">
+            <a:tbl>
+              <a:tblPr firstRow="1" bandRow="1">
+                <a:noFill/>
+              </a:tblPr>
+              <a:tblGrid>
+                <a:gridCol w="1361766">
+                  <a:extLst>
+                    <a:ext uri="{9D8B030D-6E8A-4147-A177-3AD203B41FA5}">
+                      <a16:colId xmlns:a16="http://schemas.microsoft.com/office/drawing/2014/main" val="20000"/>
+                    </a:ext>
+                  </a:extLst>
+                </a:gridCol>
+                <a:gridCol w="3324534">
+                  <a:extLst>
+                    <a:ext uri="{9D8B030D-6E8A-4147-A177-3AD203B41FA5}">
+                      <a16:colId xmlns:a16="http://schemas.microsoft.com/office/drawing/2014/main" val="20001"/>
+                    </a:ext>
+                  </a:extLst>
+                </a:gridCol>
+                <a:gridCol w="2933700">
+                  <a:extLst>
+                    <a:ext uri="{9D8B030D-6E8A-4147-A177-3AD203B41FA5}">
+                      <a16:colId xmlns:a16="http://schemas.microsoft.com/office/drawing/2014/main" val="20002"/>
+                    </a:ext>
+                  </a:extLst>
+                </a:gridCol>
+              </a:tblGrid>
+              <a:tr h="709608">
+                <a:tc>
+                  <a:txBody>
+                    <a:bodyPr/>
+                    <a:lstStyle/>
+                    <a:p>
+                      <a:pPr marL="0" marR="0" lvl="0" indent="0" algn="l" rtl="0">
+                        <a:spcBef>
+                          <a:spcPts val="0"/>
+                        </a:spcBef>
+                        <a:spcAft>
+                          <a:spcPts val="0"/>
+                        </a:spcAft>
+                        <a:buNone/>
+                      </a:pPr>
+                      <a:r>
+                        <a:rPr lang="en-US" sz="1350" b="0" i="0" u="none" strike="noStrike" cap="none">
+                          <a:solidFill>
+                            <a:srgbClr val="FFFFFF"/>
+                          </a:solidFill>
+                          <a:latin typeface="JetBrains Mono" panose="020B0604020202020204" charset="0"/>
+                          <a:ea typeface="Source Code Pro SemiBold"/>
+                          <a:cs typeface="JetBrains Mono" panose="020B0604020202020204" charset="0"/>
+                          <a:sym typeface="Source Code Pro SemiBold"/>
+                        </a:rPr>
+                        <a:t>Phase</a:t>
+                      </a:r>
+                      <a:endParaRPr>
+                        <a:latin typeface="JetBrains Mono" panose="020B0604020202020204" charset="0"/>
+                        <a:cs typeface="JetBrains Mono" panose="020B0604020202020204" charset="0"/>
+                      </a:endParaRPr>
+                    </a:p>
+                  </a:txBody>
+                  <a:tcPr marL="63500" marR="63500" marT="25400" marB="25400" anchor="ctr">
+                    <a:lnL w="9525" cap="flat" cmpd="sng">
+                      <a:solidFill>
+                        <a:srgbClr val="000000">
+                          <a:alpha val="0"/>
+                        </a:srgbClr>
+                      </a:solidFill>
+                      <a:prstDash val="solid"/>
+                      <a:round/>
+                      <a:headEnd type="none" w="sm" len="sm"/>
+                      <a:tailEnd type="none" w="sm" len="sm"/>
+                    </a:lnL>
+                    <a:lnR w="9525" cap="flat" cmpd="sng">
+                      <a:solidFill>
+                        <a:srgbClr val="000000">
+                          <a:alpha val="0"/>
+                        </a:srgbClr>
+                      </a:solidFill>
+                      <a:prstDash val="solid"/>
+                      <a:round/>
+                      <a:headEnd type="none" w="sm" len="sm"/>
+                      <a:tailEnd type="none" w="sm" len="sm"/>
+                    </a:lnR>
+                    <a:lnT w="9525" cap="flat" cmpd="sng">
+                      <a:solidFill>
+                        <a:srgbClr val="000000">
+                          <a:alpha val="0"/>
+                        </a:srgbClr>
+                      </a:solidFill>
+                      <a:prstDash val="solid"/>
+                      <a:round/>
+                      <a:headEnd type="none" w="sm" len="sm"/>
+                      <a:tailEnd type="none" w="sm" len="sm"/>
+                    </a:lnT>
+                    <a:lnB w="9525" cap="flat" cmpd="sng">
+                      <a:solidFill>
+                        <a:srgbClr val="000000">
+                          <a:alpha val="0"/>
+                        </a:srgbClr>
+                      </a:solidFill>
+                      <a:prstDash val="solid"/>
+                      <a:round/>
+                      <a:headEnd type="none" w="sm" len="sm"/>
+                      <a:tailEnd type="none" w="sm" len="sm"/>
+                    </a:lnB>
+                    <a:solidFill>
+                      <a:srgbClr val="2E7D32"/>
+                    </a:solidFill>
+                  </a:tcPr>
+                </a:tc>
+                <a:tc>
+                  <a:txBody>
+                    <a:bodyPr/>
+                    <a:lstStyle/>
+                    <a:p>
+                      <a:pPr marL="0" marR="0" lvl="0" indent="0" algn="l" rtl="0">
+                        <a:spcBef>
+                          <a:spcPts val="0"/>
+                        </a:spcBef>
+                        <a:spcAft>
+                          <a:spcPts val="0"/>
+                        </a:spcAft>
+                        <a:buNone/>
+                      </a:pPr>
+                      <a:r>
+                        <a:rPr lang="en-US" sz="1350" b="0" i="0" u="none" strike="noStrike" cap="none" dirty="0">
+                          <a:solidFill>
+                            <a:srgbClr val="FFFFFF"/>
+                          </a:solidFill>
+                          <a:latin typeface="JetBrains Mono" panose="020B0604020202020204" charset="0"/>
+                          <a:ea typeface="Source Code Pro SemiBold"/>
+                          <a:cs typeface="JetBrains Mono" panose="020B0604020202020204" charset="0"/>
+                          <a:sym typeface="Source Code Pro SemiBold"/>
+                        </a:rPr>
+                        <a:t>Objective &amp; Description</a:t>
+                      </a:r>
+                      <a:endParaRPr dirty="0">
+                        <a:latin typeface="JetBrains Mono" panose="020B0604020202020204" charset="0"/>
+                        <a:cs typeface="JetBrains Mono" panose="020B0604020202020204" charset="0"/>
+                      </a:endParaRPr>
+                    </a:p>
+                  </a:txBody>
+                  <a:tcPr marL="63500" marR="63500" marT="25400" marB="25400" anchor="ctr">
+                    <a:lnL w="9525" cap="flat" cmpd="sng">
+                      <a:solidFill>
+                        <a:srgbClr val="000000">
+                          <a:alpha val="0"/>
+                        </a:srgbClr>
+                      </a:solidFill>
+                      <a:prstDash val="solid"/>
+                      <a:round/>
+                      <a:headEnd type="none" w="sm" len="sm"/>
+                      <a:tailEnd type="none" w="sm" len="sm"/>
+                    </a:lnL>
+                    <a:lnR w="9525" cap="flat" cmpd="sng">
+                      <a:solidFill>
+                        <a:srgbClr val="000000">
+                          <a:alpha val="0"/>
+                        </a:srgbClr>
+                      </a:solidFill>
+                      <a:prstDash val="solid"/>
+                      <a:round/>
+                      <a:headEnd type="none" w="sm" len="sm"/>
+                      <a:tailEnd type="none" w="sm" len="sm"/>
+                    </a:lnR>
+                    <a:lnT w="9525" cap="flat" cmpd="sng">
+                      <a:solidFill>
+                        <a:srgbClr val="000000">
+                          <a:alpha val="0"/>
+                        </a:srgbClr>
+                      </a:solidFill>
+                      <a:prstDash val="solid"/>
+                      <a:round/>
+                      <a:headEnd type="none" w="sm" len="sm"/>
+                      <a:tailEnd type="none" w="sm" len="sm"/>
+                    </a:lnT>
+                    <a:lnB w="9525" cap="flat" cmpd="sng">
+                      <a:solidFill>
+                        <a:srgbClr val="000000">
+                          <a:alpha val="0"/>
+                        </a:srgbClr>
+                      </a:solidFill>
+                      <a:prstDash val="solid"/>
+                      <a:round/>
+                      <a:headEnd type="none" w="sm" len="sm"/>
+                      <a:tailEnd type="none" w="sm" len="sm"/>
+                    </a:lnB>
+                    <a:solidFill>
+                      <a:srgbClr val="2E7D32"/>
+                    </a:solidFill>
+                  </a:tcPr>
+                </a:tc>
+                <a:tc>
+                  <a:txBody>
+                    <a:bodyPr/>
+                    <a:lstStyle/>
+                    <a:p>
+                      <a:pPr marL="0" marR="0" lvl="0" indent="0" algn="l" rtl="0">
+                        <a:spcBef>
+                          <a:spcPts val="0"/>
+                        </a:spcBef>
+                        <a:spcAft>
+                          <a:spcPts val="0"/>
+                        </a:spcAft>
+                        <a:buNone/>
+                      </a:pPr>
+                      <a:r>
+                        <a:rPr lang="en-US" sz="1350" b="0" i="0" u="none" strike="noStrike" cap="none">
+                          <a:solidFill>
+                            <a:srgbClr val="FFFFFF"/>
+                          </a:solidFill>
+                          <a:latin typeface="JetBrains Mono" panose="020B0604020202020204" charset="0"/>
+                          <a:ea typeface="Source Code Pro SemiBold"/>
+                          <a:cs typeface="JetBrains Mono" panose="020B0604020202020204" charset="0"/>
+                          <a:sym typeface="Source Code Pro SemiBold"/>
+                        </a:rPr>
+                        <a:t>Terminal Commands</a:t>
+                      </a:r>
+                      <a:endParaRPr>
+                        <a:latin typeface="JetBrains Mono" panose="020B0604020202020204" charset="0"/>
+                        <a:cs typeface="JetBrains Mono" panose="020B0604020202020204" charset="0"/>
+                      </a:endParaRPr>
+                    </a:p>
+                  </a:txBody>
+                  <a:tcPr marL="63500" marR="63500" marT="25400" marB="25400" anchor="ctr">
+                    <a:lnL w="9525" cap="flat" cmpd="sng">
+                      <a:solidFill>
+                        <a:srgbClr val="000000">
+                          <a:alpha val="0"/>
+                        </a:srgbClr>
+                      </a:solidFill>
+                      <a:prstDash val="solid"/>
+                      <a:round/>
+                      <a:headEnd type="none" w="sm" len="sm"/>
+                      <a:tailEnd type="none" w="sm" len="sm"/>
+                    </a:lnL>
+                    <a:lnR w="9525" cap="flat" cmpd="sng">
+                      <a:solidFill>
+                        <a:srgbClr val="000000">
+                          <a:alpha val="0"/>
+                        </a:srgbClr>
+                      </a:solidFill>
+                      <a:prstDash val="solid"/>
+                      <a:round/>
+                      <a:headEnd type="none" w="sm" len="sm"/>
+                      <a:tailEnd type="none" w="sm" len="sm"/>
+                    </a:lnR>
+                    <a:lnT w="9525" cap="flat" cmpd="sng">
+                      <a:solidFill>
+                        <a:srgbClr val="000000">
+                          <a:alpha val="0"/>
+                        </a:srgbClr>
+                      </a:solidFill>
+                      <a:prstDash val="solid"/>
+                      <a:round/>
+                      <a:headEnd type="none" w="sm" len="sm"/>
+                      <a:tailEnd type="none" w="sm" len="sm"/>
+                    </a:lnT>
+                    <a:lnB w="9525" cap="flat" cmpd="sng">
+                      <a:solidFill>
+                        <a:srgbClr val="000000">
+                          <a:alpha val="0"/>
+                        </a:srgbClr>
+                      </a:solidFill>
+                      <a:prstDash val="solid"/>
+                      <a:round/>
+                      <a:headEnd type="none" w="sm" len="sm"/>
+                      <a:tailEnd type="none" w="sm" len="sm"/>
+                    </a:lnB>
+                    <a:solidFill>
+                      <a:srgbClr val="2E7D32"/>
+                    </a:solidFill>
+                  </a:tcPr>
+                </a:tc>
+                <a:extLst>
+                  <a:ext uri="{0D108BD9-81ED-4DB2-BD59-A6C34878D82A}">
+                    <a16:rowId xmlns:a16="http://schemas.microsoft.com/office/drawing/2014/main" val="10000"/>
+                  </a:ext>
+                </a:extLst>
+              </a:tr>
+              <a:tr h="709608">
+                <a:tc>
+                  <a:txBody>
+                    <a:bodyPr/>
+                    <a:lstStyle/>
+                    <a:p>
+                      <a:pPr marL="0" marR="0" lvl="0" indent="0" algn="l" rtl="0">
+                        <a:spcBef>
+                          <a:spcPts val="0"/>
+                        </a:spcBef>
+                        <a:spcAft>
+                          <a:spcPts val="0"/>
+                        </a:spcAft>
+                        <a:buNone/>
+                      </a:pPr>
+                      <a:r>
+                        <a:rPr lang="en-US" sz="1275" b="1" i="0" u="none" strike="noStrike" cap="none">
+                          <a:solidFill>
+                            <a:srgbClr val="1E293B"/>
+                          </a:solidFill>
+                          <a:latin typeface="JetBrains Mono" panose="020B0604020202020204" charset="0"/>
+                          <a:ea typeface="Lato"/>
+                          <a:cs typeface="JetBrains Mono" panose="020B0604020202020204" charset="0"/>
+                          <a:sym typeface="Lato"/>
+                        </a:rPr>
+                        <a:t>1. SYNC</a:t>
+                      </a:r>
+                      <a:endParaRPr>
+                        <a:latin typeface="JetBrains Mono" panose="020B0604020202020204" charset="0"/>
+                        <a:cs typeface="JetBrains Mono" panose="020B0604020202020204" charset="0"/>
+                      </a:endParaRPr>
+                    </a:p>
+                  </a:txBody>
+                  <a:tcPr marL="63500" marR="63500" marT="25400" marB="25400" anchor="ctr">
+                    <a:lnL w="9525" cap="flat" cmpd="sng">
+                      <a:solidFill>
+                        <a:srgbClr val="000000">
+                          <a:alpha val="0"/>
+                        </a:srgbClr>
+                      </a:solidFill>
+                      <a:prstDash val="solid"/>
+                      <a:round/>
+                      <a:headEnd type="none" w="sm" len="sm"/>
+                      <a:tailEnd type="none" w="sm" len="sm"/>
+                    </a:lnL>
+                    <a:lnR w="9525" cap="flat" cmpd="sng">
+                      <a:solidFill>
+                        <a:srgbClr val="000000">
+                          <a:alpha val="0"/>
+                        </a:srgbClr>
+                      </a:solidFill>
+                      <a:prstDash val="solid"/>
+                      <a:round/>
+                      <a:headEnd type="none" w="sm" len="sm"/>
+                      <a:tailEnd type="none" w="sm" len="sm"/>
+                    </a:lnR>
+                    <a:lnT w="9525" cap="flat" cmpd="sng">
+                      <a:solidFill>
+                        <a:srgbClr val="000000">
+                          <a:alpha val="0"/>
+                        </a:srgbClr>
+                      </a:solidFill>
+                      <a:prstDash val="solid"/>
+                      <a:round/>
+                      <a:headEnd type="none" w="sm" len="sm"/>
+                      <a:tailEnd type="none" w="sm" len="sm"/>
+                    </a:lnT>
+                    <a:lnB w="9525" cap="flat" cmpd="sng">
+                      <a:solidFill>
+                        <a:srgbClr val="000000">
+                          <a:alpha val="0"/>
+                        </a:srgbClr>
+                      </a:solidFill>
+                      <a:prstDash val="solid"/>
+                      <a:round/>
+                      <a:headEnd type="none" w="sm" len="sm"/>
+                      <a:tailEnd type="none" w="sm" len="sm"/>
+                    </a:lnB>
+                    <a:solidFill>
+                      <a:srgbClr val="CBD5E1"/>
+                    </a:solidFill>
+                  </a:tcPr>
+                </a:tc>
+                <a:tc>
+                  <a:txBody>
+                    <a:bodyPr/>
+                    <a:lstStyle/>
+                    <a:p>
+                      <a:pPr marL="0" marR="0" lvl="0" indent="0" algn="l" rtl="0">
+                        <a:spcBef>
+                          <a:spcPts val="0"/>
+                        </a:spcBef>
+                        <a:spcAft>
+                          <a:spcPts val="0"/>
+                        </a:spcAft>
+                        <a:buNone/>
+                      </a:pPr>
+                      <a:r>
+                        <a:rPr lang="en-US" sz="1275" b="0" i="0" u="none" strike="noStrike" cap="none" dirty="0">
+                          <a:solidFill>
+                            <a:srgbClr val="1E293B"/>
+                          </a:solidFill>
+                          <a:latin typeface="JetBrains Mono" panose="020B0604020202020204" charset="0"/>
+                          <a:ea typeface="Lato"/>
+                          <a:cs typeface="JetBrains Mono" panose="020B0604020202020204" charset="0"/>
+                          <a:sym typeface="Lato"/>
+                        </a:rPr>
+                        <a:t>Get the latest version of main from the cloud.</a:t>
+                      </a:r>
+                      <a:endParaRPr dirty="0">
+                        <a:latin typeface="JetBrains Mono" panose="020B0604020202020204" charset="0"/>
+                        <a:cs typeface="JetBrains Mono" panose="020B0604020202020204" charset="0"/>
+                      </a:endParaRPr>
+                    </a:p>
+                  </a:txBody>
+                  <a:tcPr marL="63500" marR="63500" marT="25400" marB="25400" anchor="ctr">
+                    <a:lnL w="9525" cap="flat" cmpd="sng">
+                      <a:solidFill>
+                        <a:srgbClr val="000000">
+                          <a:alpha val="0"/>
+                        </a:srgbClr>
+                      </a:solidFill>
+                      <a:prstDash val="solid"/>
+                      <a:round/>
+                      <a:headEnd type="none" w="sm" len="sm"/>
+                      <a:tailEnd type="none" w="sm" len="sm"/>
+                    </a:lnL>
+                    <a:lnR w="9525" cap="flat" cmpd="sng">
+                      <a:solidFill>
+                        <a:srgbClr val="000000">
+                          <a:alpha val="0"/>
+                        </a:srgbClr>
+                      </a:solidFill>
+                      <a:prstDash val="solid"/>
+                      <a:round/>
+                      <a:headEnd type="none" w="sm" len="sm"/>
+                      <a:tailEnd type="none" w="sm" len="sm"/>
+                    </a:lnR>
+                    <a:lnT w="9525" cap="flat" cmpd="sng">
+                      <a:solidFill>
+                        <a:srgbClr val="000000">
+                          <a:alpha val="0"/>
+                        </a:srgbClr>
+                      </a:solidFill>
+                      <a:prstDash val="solid"/>
+                      <a:round/>
+                      <a:headEnd type="none" w="sm" len="sm"/>
+                      <a:tailEnd type="none" w="sm" len="sm"/>
+                    </a:lnT>
+                    <a:lnB w="9525" cap="flat" cmpd="sng">
+                      <a:solidFill>
+                        <a:srgbClr val="000000">
+                          <a:alpha val="0"/>
+                        </a:srgbClr>
+                      </a:solidFill>
+                      <a:prstDash val="solid"/>
+                      <a:round/>
+                      <a:headEnd type="none" w="sm" len="sm"/>
+                      <a:tailEnd type="none" w="sm" len="sm"/>
+                    </a:lnB>
+                    <a:solidFill>
+                      <a:srgbClr val="CBD5E1"/>
+                    </a:solidFill>
+                  </a:tcPr>
+                </a:tc>
+                <a:tc>
+                  <a:txBody>
+                    <a:bodyPr/>
+                    <a:lstStyle/>
+                    <a:p>
+                      <a:pPr marL="0" marR="0" lvl="0" indent="0" algn="l" rtl="0">
+                        <a:spcBef>
+                          <a:spcPts val="0"/>
+                        </a:spcBef>
+                        <a:spcAft>
+                          <a:spcPts val="0"/>
+                        </a:spcAft>
+                        <a:buNone/>
+                      </a:pPr>
+                      <a:r>
+                        <a:rPr lang="en-US" sz="1200" b="0" i="0" u="none" strike="noStrike" cap="none" dirty="0">
+                          <a:solidFill>
+                            <a:srgbClr val="000000"/>
+                          </a:solidFill>
+                          <a:latin typeface="JetBrains Mono" panose="020B0604020202020204" charset="0"/>
+                          <a:ea typeface="Source Code Pro Medium"/>
+                          <a:cs typeface="JetBrains Mono" panose="020B0604020202020204" charset="0"/>
+                          <a:sym typeface="Source Code Pro Medium"/>
+                        </a:rPr>
+                        <a:t>git checkout main</a:t>
+                      </a:r>
+                      <a:br>
+                        <a:rPr lang="en-US" sz="1800" u="none" strike="noStrike" cap="none" dirty="0">
+                          <a:solidFill>
+                            <a:schemeClr val="dk1"/>
+                          </a:solidFill>
+                          <a:latin typeface="JetBrains Mono" panose="020B0604020202020204" charset="0"/>
+                          <a:ea typeface="Calibri"/>
+                          <a:cs typeface="JetBrains Mono" panose="020B0604020202020204" charset="0"/>
+                          <a:sym typeface="Calibri"/>
+                        </a:rPr>
+                      </a:br>
+                      <a:br>
+                        <a:rPr lang="en-US" sz="1200" b="0" i="0" u="none" strike="noStrike" cap="none" dirty="0">
+                          <a:solidFill>
+                            <a:srgbClr val="000000"/>
+                          </a:solidFill>
+                          <a:latin typeface="JetBrains Mono" panose="020B0604020202020204" charset="0"/>
+                          <a:ea typeface="Source Code Pro Medium"/>
+                          <a:cs typeface="JetBrains Mono" panose="020B0604020202020204" charset="0"/>
+                          <a:sym typeface="Source Code Pro Medium"/>
+                        </a:rPr>
+                      </a:br>
+                      <a:r>
+                        <a:rPr lang="en-US" sz="1200" b="0" i="0" u="none" strike="noStrike" cap="none" dirty="0">
+                          <a:solidFill>
+                            <a:srgbClr val="000000"/>
+                          </a:solidFill>
+                          <a:latin typeface="JetBrains Mono" panose="020B0604020202020204" charset="0"/>
+                          <a:ea typeface="Source Code Pro Medium"/>
+                          <a:cs typeface="JetBrains Mono" panose="020B0604020202020204" charset="0"/>
+                          <a:sym typeface="Source Code Pro Medium"/>
+                        </a:rPr>
+                        <a:t>git pull origin main</a:t>
+                      </a:r>
+                      <a:endParaRPr dirty="0">
+                        <a:latin typeface="JetBrains Mono" panose="020B0604020202020204" charset="0"/>
+                        <a:cs typeface="JetBrains Mono" panose="020B0604020202020204" charset="0"/>
+                      </a:endParaRPr>
+                    </a:p>
+                  </a:txBody>
+                  <a:tcPr marL="63500" marR="63500" marT="25400" marB="25400" anchor="ctr">
+                    <a:lnL w="9525" cap="flat" cmpd="sng">
+                      <a:solidFill>
+                        <a:srgbClr val="000000">
+                          <a:alpha val="0"/>
+                        </a:srgbClr>
+                      </a:solidFill>
+                      <a:prstDash val="solid"/>
+                      <a:round/>
+                      <a:headEnd type="none" w="sm" len="sm"/>
+                      <a:tailEnd type="none" w="sm" len="sm"/>
+                    </a:lnL>
+                    <a:lnR w="9525" cap="flat" cmpd="sng">
+                      <a:solidFill>
+                        <a:srgbClr val="000000">
+                          <a:alpha val="0"/>
+                        </a:srgbClr>
+                      </a:solidFill>
+                      <a:prstDash val="solid"/>
+                      <a:round/>
+                      <a:headEnd type="none" w="sm" len="sm"/>
+                      <a:tailEnd type="none" w="sm" len="sm"/>
+                    </a:lnR>
+                    <a:lnT w="9525" cap="flat" cmpd="sng">
+                      <a:solidFill>
+                        <a:srgbClr val="000000">
+                          <a:alpha val="0"/>
+                        </a:srgbClr>
+                      </a:solidFill>
+                      <a:prstDash val="solid"/>
+                      <a:round/>
+                      <a:headEnd type="none" w="sm" len="sm"/>
+                      <a:tailEnd type="none" w="sm" len="sm"/>
+                    </a:lnT>
+                    <a:lnB w="9525" cap="flat" cmpd="sng">
+                      <a:solidFill>
+                        <a:srgbClr val="000000">
+                          <a:alpha val="0"/>
+                        </a:srgbClr>
+                      </a:solidFill>
+                      <a:prstDash val="solid"/>
+                      <a:round/>
+                      <a:headEnd type="none" w="sm" len="sm"/>
+                      <a:tailEnd type="none" w="sm" len="sm"/>
+                    </a:lnB>
+                    <a:solidFill>
+                      <a:srgbClr val="CBD5E1"/>
+                    </a:solidFill>
+                  </a:tcPr>
+                </a:tc>
+                <a:extLst>
+                  <a:ext uri="{0D108BD9-81ED-4DB2-BD59-A6C34878D82A}">
+                    <a16:rowId xmlns:a16="http://schemas.microsoft.com/office/drawing/2014/main" val="10001"/>
+                  </a:ext>
+                </a:extLst>
+              </a:tr>
+              <a:tr h="721686">
+                <a:tc>
+                  <a:txBody>
+                    <a:bodyPr/>
+                    <a:lstStyle/>
+                    <a:p>
+                      <a:pPr marL="0" marR="0" lvl="0" indent="0" algn="l" rtl="0">
+                        <a:spcBef>
+                          <a:spcPts val="0"/>
+                        </a:spcBef>
+                        <a:spcAft>
+                          <a:spcPts val="0"/>
+                        </a:spcAft>
+                        <a:buNone/>
+                      </a:pPr>
+                      <a:r>
+                        <a:rPr lang="en-US" sz="1275" b="1" i="0" u="none" strike="noStrike" cap="none">
+                          <a:solidFill>
+                            <a:srgbClr val="1E293B"/>
+                          </a:solidFill>
+                          <a:latin typeface="JetBrains Mono" panose="020B0604020202020204" charset="0"/>
+                          <a:ea typeface="Lato"/>
+                          <a:cs typeface="JetBrains Mono" panose="020B0604020202020204" charset="0"/>
+                          <a:sym typeface="Lato"/>
+                        </a:rPr>
+                        <a:t>2. ISOLATE</a:t>
+                      </a:r>
+                      <a:endParaRPr>
+                        <a:latin typeface="JetBrains Mono" panose="020B0604020202020204" charset="0"/>
+                        <a:cs typeface="JetBrains Mono" panose="020B0604020202020204" charset="0"/>
+                      </a:endParaRPr>
+                    </a:p>
+                  </a:txBody>
+                  <a:tcPr marL="63500" marR="63500" marT="25400" marB="25400" anchor="ctr">
+                    <a:lnL w="9525" cap="flat" cmpd="sng">
+                      <a:solidFill>
+                        <a:srgbClr val="000000">
+                          <a:alpha val="0"/>
+                        </a:srgbClr>
+                      </a:solidFill>
+                      <a:prstDash val="solid"/>
+                      <a:round/>
+                      <a:headEnd type="none" w="sm" len="sm"/>
+                      <a:tailEnd type="none" w="sm" len="sm"/>
+                    </a:lnL>
+                    <a:lnR w="9525" cap="flat" cmpd="sng">
+                      <a:solidFill>
+                        <a:srgbClr val="000000">
+                          <a:alpha val="0"/>
+                        </a:srgbClr>
+                      </a:solidFill>
+                      <a:prstDash val="solid"/>
+                      <a:round/>
+                      <a:headEnd type="none" w="sm" len="sm"/>
+                      <a:tailEnd type="none" w="sm" len="sm"/>
+                    </a:lnR>
+                    <a:lnT w="9525" cap="flat" cmpd="sng">
+                      <a:solidFill>
+                        <a:srgbClr val="000000">
+                          <a:alpha val="0"/>
+                        </a:srgbClr>
+                      </a:solidFill>
+                      <a:prstDash val="solid"/>
+                      <a:round/>
+                      <a:headEnd type="none" w="sm" len="sm"/>
+                      <a:tailEnd type="none" w="sm" len="sm"/>
+                    </a:lnT>
+                    <a:lnB w="9525" cap="flat" cmpd="sng">
+                      <a:solidFill>
+                        <a:srgbClr val="000000">
+                          <a:alpha val="0"/>
+                        </a:srgbClr>
+                      </a:solidFill>
+                      <a:prstDash val="solid"/>
+                      <a:round/>
+                      <a:headEnd type="none" w="sm" len="sm"/>
+                      <a:tailEnd type="none" w="sm" len="sm"/>
+                    </a:lnB>
+                    <a:solidFill>
+                      <a:srgbClr val="F8FAFC"/>
+                    </a:solidFill>
+                  </a:tcPr>
+                </a:tc>
+                <a:tc>
+                  <a:txBody>
+                    <a:bodyPr/>
+                    <a:lstStyle/>
+                    <a:p>
+                      <a:pPr marL="0" marR="0" lvl="0" indent="0" algn="l" rtl="0">
+                        <a:spcBef>
+                          <a:spcPts val="0"/>
+                        </a:spcBef>
+                        <a:spcAft>
+                          <a:spcPts val="0"/>
+                        </a:spcAft>
+                        <a:buNone/>
+                      </a:pPr>
+                      <a:r>
+                        <a:rPr lang="en-US" sz="1275" b="0" i="0" u="none" strike="noStrike" cap="none">
+                          <a:solidFill>
+                            <a:srgbClr val="1E293B"/>
+                          </a:solidFill>
+                          <a:latin typeface="JetBrains Mono" panose="020B0604020202020204" charset="0"/>
+                          <a:ea typeface="Lato"/>
+                          <a:cs typeface="JetBrains Mono" panose="020B0604020202020204" charset="0"/>
+                          <a:sym typeface="Lato"/>
+                        </a:rPr>
+                        <a:t>Create a sub-branch for your specific feature.</a:t>
+                      </a:r>
+                      <a:endParaRPr>
+                        <a:latin typeface="JetBrains Mono" panose="020B0604020202020204" charset="0"/>
+                        <a:cs typeface="JetBrains Mono" panose="020B0604020202020204" charset="0"/>
+                      </a:endParaRPr>
+                    </a:p>
+                  </a:txBody>
+                  <a:tcPr marL="63500" marR="63500" marT="25400" marB="25400" anchor="ctr">
+                    <a:lnL w="9525" cap="flat" cmpd="sng">
+                      <a:solidFill>
+                        <a:srgbClr val="000000">
+                          <a:alpha val="0"/>
+                        </a:srgbClr>
+                      </a:solidFill>
+                      <a:prstDash val="solid"/>
+                      <a:round/>
+                      <a:headEnd type="none" w="sm" len="sm"/>
+                      <a:tailEnd type="none" w="sm" len="sm"/>
+                    </a:lnL>
+                    <a:lnR w="9525" cap="flat" cmpd="sng">
+                      <a:solidFill>
+                        <a:srgbClr val="000000">
+                          <a:alpha val="0"/>
+                        </a:srgbClr>
+                      </a:solidFill>
+                      <a:prstDash val="solid"/>
+                      <a:round/>
+                      <a:headEnd type="none" w="sm" len="sm"/>
+                      <a:tailEnd type="none" w="sm" len="sm"/>
+                    </a:lnR>
+                    <a:lnT w="9525" cap="flat" cmpd="sng">
+                      <a:solidFill>
+                        <a:srgbClr val="000000">
+                          <a:alpha val="0"/>
+                        </a:srgbClr>
+                      </a:solidFill>
+                      <a:prstDash val="solid"/>
+                      <a:round/>
+                      <a:headEnd type="none" w="sm" len="sm"/>
+                      <a:tailEnd type="none" w="sm" len="sm"/>
+                    </a:lnT>
+                    <a:lnB w="9525" cap="flat" cmpd="sng">
+                      <a:solidFill>
+                        <a:srgbClr val="000000">
+                          <a:alpha val="0"/>
+                        </a:srgbClr>
+                      </a:solidFill>
+                      <a:prstDash val="solid"/>
+                      <a:round/>
+                      <a:headEnd type="none" w="sm" len="sm"/>
+                      <a:tailEnd type="none" w="sm" len="sm"/>
+                    </a:lnB>
+                    <a:solidFill>
+                      <a:srgbClr val="F8FAFC"/>
+                    </a:solidFill>
+                  </a:tcPr>
+                </a:tc>
+                <a:tc>
+                  <a:txBody>
+                    <a:bodyPr/>
+                    <a:lstStyle/>
+                    <a:p>
+                      <a:pPr marL="0" marR="0" lvl="0" indent="0" algn="l" rtl="0">
+                        <a:spcBef>
+                          <a:spcPts val="0"/>
+                        </a:spcBef>
+                        <a:spcAft>
+                          <a:spcPts val="0"/>
+                        </a:spcAft>
+                        <a:buNone/>
+                      </a:pPr>
+                      <a:r>
+                        <a:rPr lang="en-US" sz="1200" b="0" i="0" u="none" strike="noStrike" cap="none">
+                          <a:solidFill>
+                            <a:srgbClr val="000000"/>
+                          </a:solidFill>
+                          <a:latin typeface="JetBrains Mono" panose="020B0604020202020204" charset="0"/>
+                          <a:ea typeface="Source Code Pro Medium"/>
+                          <a:cs typeface="JetBrains Mono" panose="020B0604020202020204" charset="0"/>
+                          <a:sym typeface="Source Code Pro Medium"/>
+                        </a:rPr>
+                        <a:t>git checkout -b feature-name</a:t>
+                      </a:r>
+                      <a:endParaRPr>
+                        <a:latin typeface="JetBrains Mono" panose="020B0604020202020204" charset="0"/>
+                        <a:cs typeface="JetBrains Mono" panose="020B0604020202020204" charset="0"/>
+                      </a:endParaRPr>
+                    </a:p>
+                  </a:txBody>
+                  <a:tcPr marL="63500" marR="63500" marT="25400" marB="25400" anchor="ctr">
+                    <a:lnL w="9525" cap="flat" cmpd="sng">
+                      <a:solidFill>
+                        <a:srgbClr val="000000">
+                          <a:alpha val="0"/>
+                        </a:srgbClr>
+                      </a:solidFill>
+                      <a:prstDash val="solid"/>
+                      <a:round/>
+                      <a:headEnd type="none" w="sm" len="sm"/>
+                      <a:tailEnd type="none" w="sm" len="sm"/>
+                    </a:lnL>
+                    <a:lnR w="9525" cap="flat" cmpd="sng">
+                      <a:solidFill>
+                        <a:srgbClr val="000000">
+                          <a:alpha val="0"/>
+                        </a:srgbClr>
+                      </a:solidFill>
+                      <a:prstDash val="solid"/>
+                      <a:round/>
+                      <a:headEnd type="none" w="sm" len="sm"/>
+                      <a:tailEnd type="none" w="sm" len="sm"/>
+                    </a:lnR>
+                    <a:lnT w="9525" cap="flat" cmpd="sng">
+                      <a:solidFill>
+                        <a:srgbClr val="000000">
+                          <a:alpha val="0"/>
+                        </a:srgbClr>
+                      </a:solidFill>
+                      <a:prstDash val="solid"/>
+                      <a:round/>
+                      <a:headEnd type="none" w="sm" len="sm"/>
+                      <a:tailEnd type="none" w="sm" len="sm"/>
+                    </a:lnT>
+                    <a:lnB w="9525" cap="flat" cmpd="sng">
+                      <a:solidFill>
+                        <a:srgbClr val="000000">
+                          <a:alpha val="0"/>
+                        </a:srgbClr>
+                      </a:solidFill>
+                      <a:prstDash val="solid"/>
+                      <a:round/>
+                      <a:headEnd type="none" w="sm" len="sm"/>
+                      <a:tailEnd type="none" w="sm" len="sm"/>
+                    </a:lnB>
+                    <a:solidFill>
+                      <a:srgbClr val="F8FAFC"/>
+                    </a:solidFill>
+                  </a:tcPr>
+                </a:tc>
+                <a:extLst>
+                  <a:ext uri="{0D108BD9-81ED-4DB2-BD59-A6C34878D82A}">
+                    <a16:rowId xmlns:a16="http://schemas.microsoft.com/office/drawing/2014/main" val="10002"/>
+                  </a:ext>
+                </a:extLst>
+              </a:tr>
+              <a:tr h="709608">
+                <a:tc>
+                  <a:txBody>
+                    <a:bodyPr/>
+                    <a:lstStyle/>
+                    <a:p>
+                      <a:pPr marL="0" marR="0" lvl="0" indent="0" algn="l" rtl="0">
+                        <a:spcBef>
+                          <a:spcPts val="0"/>
+                        </a:spcBef>
+                        <a:spcAft>
+                          <a:spcPts val="0"/>
+                        </a:spcAft>
+                        <a:buNone/>
+                      </a:pPr>
+                      <a:r>
+                        <a:rPr lang="en-US" sz="1275" b="1" i="0" u="none" strike="noStrike" cap="none">
+                          <a:solidFill>
+                            <a:srgbClr val="1E293B"/>
+                          </a:solidFill>
+                          <a:latin typeface="JetBrains Mono" panose="020B0604020202020204" charset="0"/>
+                          <a:ea typeface="Lato"/>
+                          <a:cs typeface="JetBrains Mono" panose="020B0604020202020204" charset="0"/>
+                          <a:sym typeface="Lato"/>
+                        </a:rPr>
+                        <a:t>3. SAVE</a:t>
+                      </a:r>
+                      <a:endParaRPr>
+                        <a:latin typeface="JetBrains Mono" panose="020B0604020202020204" charset="0"/>
+                        <a:cs typeface="JetBrains Mono" panose="020B0604020202020204" charset="0"/>
+                      </a:endParaRPr>
+                    </a:p>
+                  </a:txBody>
+                  <a:tcPr marL="63500" marR="63500" marT="25400" marB="25400" anchor="ctr">
+                    <a:lnL w="9525" cap="flat" cmpd="sng">
+                      <a:solidFill>
+                        <a:srgbClr val="000000">
+                          <a:alpha val="0"/>
+                        </a:srgbClr>
+                      </a:solidFill>
+                      <a:prstDash val="solid"/>
+                      <a:round/>
+                      <a:headEnd type="none" w="sm" len="sm"/>
+                      <a:tailEnd type="none" w="sm" len="sm"/>
+                    </a:lnL>
+                    <a:lnR w="9525" cap="flat" cmpd="sng">
+                      <a:solidFill>
+                        <a:srgbClr val="000000">
+                          <a:alpha val="0"/>
+                        </a:srgbClr>
+                      </a:solidFill>
+                      <a:prstDash val="solid"/>
+                      <a:round/>
+                      <a:headEnd type="none" w="sm" len="sm"/>
+                      <a:tailEnd type="none" w="sm" len="sm"/>
+                    </a:lnR>
+                    <a:lnT w="9525" cap="flat" cmpd="sng">
+                      <a:solidFill>
+                        <a:srgbClr val="000000">
+                          <a:alpha val="0"/>
+                        </a:srgbClr>
+                      </a:solidFill>
+                      <a:prstDash val="solid"/>
+                      <a:round/>
+                      <a:headEnd type="none" w="sm" len="sm"/>
+                      <a:tailEnd type="none" w="sm" len="sm"/>
+                    </a:lnT>
+                    <a:lnB w="9525" cap="flat" cmpd="sng">
+                      <a:solidFill>
+                        <a:srgbClr val="000000">
+                          <a:alpha val="0"/>
+                        </a:srgbClr>
+                      </a:solidFill>
+                      <a:prstDash val="solid"/>
+                      <a:round/>
+                      <a:headEnd type="none" w="sm" len="sm"/>
+                      <a:tailEnd type="none" w="sm" len="sm"/>
+                    </a:lnB>
+                    <a:solidFill>
+                      <a:srgbClr val="CBD5E1"/>
+                    </a:solidFill>
+                  </a:tcPr>
+                </a:tc>
+                <a:tc>
+                  <a:txBody>
+                    <a:bodyPr/>
+                    <a:lstStyle/>
+                    <a:p>
+                      <a:pPr marL="0" marR="0" lvl="0" indent="0" algn="l" rtl="0">
+                        <a:spcBef>
+                          <a:spcPts val="0"/>
+                        </a:spcBef>
+                        <a:spcAft>
+                          <a:spcPts val="0"/>
+                        </a:spcAft>
+                        <a:buNone/>
+                      </a:pPr>
+                      <a:r>
+                        <a:rPr lang="en-US" sz="1275" b="0" i="0" u="none" strike="noStrike" cap="none">
+                          <a:solidFill>
+                            <a:srgbClr val="1E293B"/>
+                          </a:solidFill>
+                          <a:latin typeface="JetBrains Mono" panose="020B0604020202020204" charset="0"/>
+                          <a:ea typeface="Lato"/>
+                          <a:cs typeface="JetBrains Mono" panose="020B0604020202020204" charset="0"/>
+                          <a:sym typeface="Lato"/>
+                        </a:rPr>
+                        <a:t>Stage and snapshot your progress locally.</a:t>
+                      </a:r>
+                      <a:endParaRPr>
+                        <a:latin typeface="JetBrains Mono" panose="020B0604020202020204" charset="0"/>
+                        <a:cs typeface="JetBrains Mono" panose="020B0604020202020204" charset="0"/>
+                      </a:endParaRPr>
+                    </a:p>
+                  </a:txBody>
+                  <a:tcPr marL="63500" marR="63500" marT="25400" marB="25400" anchor="ctr">
+                    <a:lnL w="9525" cap="flat" cmpd="sng">
+                      <a:solidFill>
+                        <a:srgbClr val="000000">
+                          <a:alpha val="0"/>
+                        </a:srgbClr>
+                      </a:solidFill>
+                      <a:prstDash val="solid"/>
+                      <a:round/>
+                      <a:headEnd type="none" w="sm" len="sm"/>
+                      <a:tailEnd type="none" w="sm" len="sm"/>
+                    </a:lnL>
+                    <a:lnR w="9525" cap="flat" cmpd="sng">
+                      <a:solidFill>
+                        <a:srgbClr val="000000">
+                          <a:alpha val="0"/>
+                        </a:srgbClr>
+                      </a:solidFill>
+                      <a:prstDash val="solid"/>
+                      <a:round/>
+                      <a:headEnd type="none" w="sm" len="sm"/>
+                      <a:tailEnd type="none" w="sm" len="sm"/>
+                    </a:lnR>
+                    <a:lnT w="9525" cap="flat" cmpd="sng">
+                      <a:solidFill>
+                        <a:srgbClr val="000000">
+                          <a:alpha val="0"/>
+                        </a:srgbClr>
+                      </a:solidFill>
+                      <a:prstDash val="solid"/>
+                      <a:round/>
+                      <a:headEnd type="none" w="sm" len="sm"/>
+                      <a:tailEnd type="none" w="sm" len="sm"/>
+                    </a:lnT>
+                    <a:lnB w="9525" cap="flat" cmpd="sng">
+                      <a:solidFill>
+                        <a:srgbClr val="000000">
+                          <a:alpha val="0"/>
+                        </a:srgbClr>
+                      </a:solidFill>
+                      <a:prstDash val="solid"/>
+                      <a:round/>
+                      <a:headEnd type="none" w="sm" len="sm"/>
+                      <a:tailEnd type="none" w="sm" len="sm"/>
+                    </a:lnB>
+                    <a:solidFill>
+                      <a:srgbClr val="CBD5E1"/>
+                    </a:solidFill>
+                  </a:tcPr>
+                </a:tc>
+                <a:tc>
+                  <a:txBody>
+                    <a:bodyPr/>
+                    <a:lstStyle/>
+                    <a:p>
+                      <a:pPr marL="0" marR="0" lvl="0" indent="0" algn="l" rtl="0">
+                        <a:spcBef>
+                          <a:spcPts val="0"/>
+                        </a:spcBef>
+                        <a:spcAft>
+                          <a:spcPts val="0"/>
+                        </a:spcAft>
+                        <a:buNone/>
+                      </a:pPr>
+                      <a:r>
+                        <a:rPr lang="en-US" sz="1200" b="0" i="0" u="none" strike="noStrike" cap="none" dirty="0">
+                          <a:solidFill>
+                            <a:srgbClr val="000000"/>
+                          </a:solidFill>
+                          <a:latin typeface="JetBrains Mono" panose="020B0604020202020204" charset="0"/>
+                          <a:ea typeface="Source Code Pro Medium"/>
+                          <a:cs typeface="JetBrains Mono" panose="020B0604020202020204" charset="0"/>
+                          <a:sym typeface="Source Code Pro Medium"/>
+                        </a:rPr>
+                        <a:t>git add .</a:t>
+                      </a:r>
+                      <a:br>
+                        <a:rPr lang="en-US" sz="1800" u="none" strike="noStrike" cap="none" dirty="0">
+                          <a:solidFill>
+                            <a:schemeClr val="dk1"/>
+                          </a:solidFill>
+                          <a:latin typeface="JetBrains Mono" panose="020B0604020202020204" charset="0"/>
+                          <a:ea typeface="Calibri"/>
+                          <a:cs typeface="JetBrains Mono" panose="020B0604020202020204" charset="0"/>
+                          <a:sym typeface="Calibri"/>
+                        </a:rPr>
+                      </a:br>
+                      <a:br>
+                        <a:rPr lang="en-US" sz="1200" b="0" i="0" u="none" strike="noStrike" cap="none" dirty="0">
+                          <a:solidFill>
+                            <a:srgbClr val="000000"/>
+                          </a:solidFill>
+                          <a:latin typeface="JetBrains Mono" panose="020B0604020202020204" charset="0"/>
+                          <a:ea typeface="Source Code Pro Medium"/>
+                          <a:cs typeface="JetBrains Mono" panose="020B0604020202020204" charset="0"/>
+                          <a:sym typeface="Source Code Pro Medium"/>
+                        </a:rPr>
+                      </a:br>
+                      <a:r>
+                        <a:rPr lang="en-US" sz="1200" b="0" i="0" u="none" strike="noStrike" cap="none" dirty="0">
+                          <a:solidFill>
+                            <a:srgbClr val="000000"/>
+                          </a:solidFill>
+                          <a:latin typeface="JetBrains Mono" panose="020B0604020202020204" charset="0"/>
+                          <a:ea typeface="Source Code Pro Medium"/>
+                          <a:cs typeface="JetBrains Mono" panose="020B0604020202020204" charset="0"/>
+                          <a:sym typeface="Source Code Pro Medium"/>
+                        </a:rPr>
+                        <a:t>git commit -m "Note"</a:t>
+                      </a:r>
+                      <a:endParaRPr dirty="0">
+                        <a:latin typeface="JetBrains Mono" panose="020B0604020202020204" charset="0"/>
+                        <a:cs typeface="JetBrains Mono" panose="020B0604020202020204" charset="0"/>
+                      </a:endParaRPr>
+                    </a:p>
+                  </a:txBody>
+                  <a:tcPr marL="63500" marR="63500" marT="25400" marB="25400" anchor="ctr">
+                    <a:lnL w="9525" cap="flat" cmpd="sng">
+                      <a:solidFill>
+                        <a:srgbClr val="000000">
+                          <a:alpha val="0"/>
+                        </a:srgbClr>
+                      </a:solidFill>
+                      <a:prstDash val="solid"/>
+                      <a:round/>
+                      <a:headEnd type="none" w="sm" len="sm"/>
+                      <a:tailEnd type="none" w="sm" len="sm"/>
+                    </a:lnL>
+                    <a:lnR w="9525" cap="flat" cmpd="sng">
+                      <a:solidFill>
+                        <a:srgbClr val="000000">
+                          <a:alpha val="0"/>
+                        </a:srgbClr>
+                      </a:solidFill>
+                      <a:prstDash val="solid"/>
+                      <a:round/>
+                      <a:headEnd type="none" w="sm" len="sm"/>
+                      <a:tailEnd type="none" w="sm" len="sm"/>
+                    </a:lnR>
+                    <a:lnT w="9525" cap="flat" cmpd="sng">
+                      <a:solidFill>
+                        <a:srgbClr val="000000">
+                          <a:alpha val="0"/>
+                        </a:srgbClr>
+                      </a:solidFill>
+                      <a:prstDash val="solid"/>
+                      <a:round/>
+                      <a:headEnd type="none" w="sm" len="sm"/>
+                      <a:tailEnd type="none" w="sm" len="sm"/>
+                    </a:lnT>
+                    <a:lnB w="9525" cap="flat" cmpd="sng">
+                      <a:solidFill>
+                        <a:srgbClr val="000000">
+                          <a:alpha val="0"/>
+                        </a:srgbClr>
+                      </a:solidFill>
+                      <a:prstDash val="solid"/>
+                      <a:round/>
+                      <a:headEnd type="none" w="sm" len="sm"/>
+                      <a:tailEnd type="none" w="sm" len="sm"/>
+                    </a:lnB>
+                    <a:solidFill>
+                      <a:srgbClr val="CBD5E1"/>
+                    </a:solidFill>
+                  </a:tcPr>
+                </a:tc>
+                <a:extLst>
+                  <a:ext uri="{0D108BD9-81ED-4DB2-BD59-A6C34878D82A}">
+                    <a16:rowId xmlns:a16="http://schemas.microsoft.com/office/drawing/2014/main" val="10003"/>
+                  </a:ext>
+                </a:extLst>
+              </a:tr>
+              <a:tr h="709608">
+                <a:tc>
+                  <a:txBody>
+                    <a:bodyPr/>
+                    <a:lstStyle/>
+                    <a:p>
+                      <a:pPr marL="0" marR="0" lvl="0" indent="0" algn="l" rtl="0">
+                        <a:spcBef>
+                          <a:spcPts val="0"/>
+                        </a:spcBef>
+                        <a:spcAft>
+                          <a:spcPts val="0"/>
+                        </a:spcAft>
+                        <a:buNone/>
+                      </a:pPr>
+                      <a:r>
+                        <a:rPr lang="en-US" sz="1275" b="1" i="0" u="none" strike="noStrike" cap="none">
+                          <a:solidFill>
+                            <a:srgbClr val="1E293B"/>
+                          </a:solidFill>
+                          <a:latin typeface="JetBrains Mono" panose="020B0604020202020204" charset="0"/>
+                          <a:ea typeface="Lato"/>
+                          <a:cs typeface="JetBrains Mono" panose="020B0604020202020204" charset="0"/>
+                          <a:sym typeface="Lato"/>
+                        </a:rPr>
+                        <a:t>4. UPLOAD</a:t>
+                      </a:r>
+                      <a:endParaRPr>
+                        <a:latin typeface="JetBrains Mono" panose="020B0604020202020204" charset="0"/>
+                        <a:cs typeface="JetBrains Mono" panose="020B0604020202020204" charset="0"/>
+                      </a:endParaRPr>
+                    </a:p>
+                  </a:txBody>
+                  <a:tcPr marL="63500" marR="63500" marT="25400" marB="25400" anchor="ctr">
+                    <a:lnL w="9525" cap="flat" cmpd="sng">
+                      <a:solidFill>
+                        <a:srgbClr val="000000">
+                          <a:alpha val="0"/>
+                        </a:srgbClr>
+                      </a:solidFill>
+                      <a:prstDash val="solid"/>
+                      <a:round/>
+                      <a:headEnd type="none" w="sm" len="sm"/>
+                      <a:tailEnd type="none" w="sm" len="sm"/>
+                    </a:lnL>
+                    <a:lnR w="9525" cap="flat" cmpd="sng">
+                      <a:solidFill>
+                        <a:srgbClr val="000000">
+                          <a:alpha val="0"/>
+                        </a:srgbClr>
+                      </a:solidFill>
+                      <a:prstDash val="solid"/>
+                      <a:round/>
+                      <a:headEnd type="none" w="sm" len="sm"/>
+                      <a:tailEnd type="none" w="sm" len="sm"/>
+                    </a:lnR>
+                    <a:lnT w="9525" cap="flat" cmpd="sng">
+                      <a:solidFill>
+                        <a:srgbClr val="000000">
+                          <a:alpha val="0"/>
+                        </a:srgbClr>
+                      </a:solidFill>
+                      <a:prstDash val="solid"/>
+                      <a:round/>
+                      <a:headEnd type="none" w="sm" len="sm"/>
+                      <a:tailEnd type="none" w="sm" len="sm"/>
+                    </a:lnT>
+                    <a:lnB w="9525" cap="flat" cmpd="sng">
+                      <a:solidFill>
+                        <a:srgbClr val="000000">
+                          <a:alpha val="0"/>
+                        </a:srgbClr>
+                      </a:solidFill>
+                      <a:prstDash val="solid"/>
+                      <a:round/>
+                      <a:headEnd type="none" w="sm" len="sm"/>
+                      <a:tailEnd type="none" w="sm" len="sm"/>
+                    </a:lnB>
+                    <a:solidFill>
+                      <a:srgbClr val="F8FAFC"/>
+                    </a:solidFill>
+                  </a:tcPr>
+                </a:tc>
+                <a:tc>
+                  <a:txBody>
+                    <a:bodyPr/>
+                    <a:lstStyle/>
+                    <a:p>
+                      <a:pPr marL="0" marR="0" lvl="0" indent="0" algn="l" rtl="0">
+                        <a:spcBef>
+                          <a:spcPts val="0"/>
+                        </a:spcBef>
+                        <a:spcAft>
+                          <a:spcPts val="0"/>
+                        </a:spcAft>
+                        <a:buNone/>
+                      </a:pPr>
+                      <a:r>
+                        <a:rPr lang="en-US" sz="1275" b="0" i="0" u="none" strike="noStrike" cap="none" dirty="0">
+                          <a:solidFill>
+                            <a:srgbClr val="1E293B"/>
+                          </a:solidFill>
+                          <a:latin typeface="JetBrains Mono" panose="020B0604020202020204" charset="0"/>
+                          <a:ea typeface="Lato"/>
+                          <a:cs typeface="JetBrains Mono" panose="020B0604020202020204" charset="0"/>
+                          <a:sym typeface="Lato"/>
+                        </a:rPr>
+                        <a:t>Share your timeline with the </a:t>
+                      </a:r>
+                    </a:p>
+                    <a:p>
+                      <a:pPr marL="0" marR="0" lvl="0" indent="0" algn="l" rtl="0">
+                        <a:spcBef>
+                          <a:spcPts val="0"/>
+                        </a:spcBef>
+                        <a:spcAft>
+                          <a:spcPts val="0"/>
+                        </a:spcAft>
+                        <a:buNone/>
+                      </a:pPr>
+                      <a:r>
+                        <a:rPr lang="en-US" sz="1275" b="0" i="0" u="none" strike="noStrike" cap="none" dirty="0">
+                          <a:solidFill>
+                            <a:srgbClr val="1E293B"/>
+                          </a:solidFill>
+                          <a:latin typeface="JetBrains Mono" panose="020B0604020202020204" charset="0"/>
+                          <a:ea typeface="Lato"/>
+                          <a:cs typeface="JetBrains Mono" panose="020B0604020202020204" charset="0"/>
+                          <a:sym typeface="Lato"/>
+                        </a:rPr>
+                        <a:t>team on GitHub.</a:t>
+                      </a:r>
+                      <a:endParaRPr dirty="0">
+                        <a:latin typeface="JetBrains Mono" panose="020B0604020202020204" charset="0"/>
+                        <a:cs typeface="JetBrains Mono" panose="020B0604020202020204" charset="0"/>
+                      </a:endParaRPr>
+                    </a:p>
+                  </a:txBody>
+                  <a:tcPr marL="63500" marR="63500" marT="25400" marB="25400" anchor="ctr">
+                    <a:lnL w="9525" cap="flat" cmpd="sng">
+                      <a:solidFill>
+                        <a:srgbClr val="000000">
+                          <a:alpha val="0"/>
+                        </a:srgbClr>
+                      </a:solidFill>
+                      <a:prstDash val="solid"/>
+                      <a:round/>
+                      <a:headEnd type="none" w="sm" len="sm"/>
+                      <a:tailEnd type="none" w="sm" len="sm"/>
+                    </a:lnL>
+                    <a:lnR w="9525" cap="flat" cmpd="sng">
+                      <a:solidFill>
+                        <a:srgbClr val="000000">
+                          <a:alpha val="0"/>
+                        </a:srgbClr>
+                      </a:solidFill>
+                      <a:prstDash val="solid"/>
+                      <a:round/>
+                      <a:headEnd type="none" w="sm" len="sm"/>
+                      <a:tailEnd type="none" w="sm" len="sm"/>
+                    </a:lnR>
+                    <a:lnT w="9525" cap="flat" cmpd="sng">
+                      <a:solidFill>
+                        <a:srgbClr val="000000">
+                          <a:alpha val="0"/>
+                        </a:srgbClr>
+                      </a:solidFill>
+                      <a:prstDash val="solid"/>
+                      <a:round/>
+                      <a:headEnd type="none" w="sm" len="sm"/>
+                      <a:tailEnd type="none" w="sm" len="sm"/>
+                    </a:lnT>
+                    <a:lnB w="9525" cap="flat" cmpd="sng">
+                      <a:solidFill>
+                        <a:srgbClr val="000000">
+                          <a:alpha val="0"/>
+                        </a:srgbClr>
+                      </a:solidFill>
+                      <a:prstDash val="solid"/>
+                      <a:round/>
+                      <a:headEnd type="none" w="sm" len="sm"/>
+                      <a:tailEnd type="none" w="sm" len="sm"/>
+                    </a:lnB>
+                    <a:solidFill>
+                      <a:srgbClr val="F8FAFC"/>
+                    </a:solidFill>
+                  </a:tcPr>
+                </a:tc>
+                <a:tc>
+                  <a:txBody>
+                    <a:bodyPr/>
+                    <a:lstStyle/>
+                    <a:p>
+                      <a:pPr marL="0" marR="0" lvl="0" indent="0" algn="l" rtl="0">
+                        <a:spcBef>
+                          <a:spcPts val="0"/>
+                        </a:spcBef>
+                        <a:spcAft>
+                          <a:spcPts val="0"/>
+                        </a:spcAft>
+                        <a:buNone/>
+                      </a:pPr>
+                      <a:r>
+                        <a:rPr lang="en-US" sz="1200" b="0" i="0" u="none" strike="noStrike" cap="none">
+                          <a:solidFill>
+                            <a:srgbClr val="000000"/>
+                          </a:solidFill>
+                          <a:latin typeface="JetBrains Mono" panose="020B0604020202020204" charset="0"/>
+                          <a:ea typeface="Source Code Pro Medium"/>
+                          <a:cs typeface="JetBrains Mono" panose="020B0604020202020204" charset="0"/>
+                          <a:sym typeface="Source Code Pro Medium"/>
+                        </a:rPr>
+                        <a:t>git push origin feature-name</a:t>
+                      </a:r>
+                      <a:endParaRPr>
+                        <a:latin typeface="JetBrains Mono" panose="020B0604020202020204" charset="0"/>
+                        <a:cs typeface="JetBrains Mono" panose="020B0604020202020204" charset="0"/>
+                      </a:endParaRPr>
+                    </a:p>
+                  </a:txBody>
+                  <a:tcPr marL="63500" marR="63500" marT="25400" marB="25400" anchor="ctr">
+                    <a:lnL w="9525" cap="flat" cmpd="sng">
+                      <a:solidFill>
+                        <a:srgbClr val="000000">
+                          <a:alpha val="0"/>
+                        </a:srgbClr>
+                      </a:solidFill>
+                      <a:prstDash val="solid"/>
+                      <a:round/>
+                      <a:headEnd type="none" w="sm" len="sm"/>
+                      <a:tailEnd type="none" w="sm" len="sm"/>
+                    </a:lnL>
+                    <a:lnR w="9525" cap="flat" cmpd="sng">
+                      <a:solidFill>
+                        <a:srgbClr val="000000">
+                          <a:alpha val="0"/>
+                        </a:srgbClr>
+                      </a:solidFill>
+                      <a:prstDash val="solid"/>
+                      <a:round/>
+                      <a:headEnd type="none" w="sm" len="sm"/>
+                      <a:tailEnd type="none" w="sm" len="sm"/>
+                    </a:lnR>
+                    <a:lnT w="9525" cap="flat" cmpd="sng">
+                      <a:solidFill>
+                        <a:srgbClr val="000000">
+                          <a:alpha val="0"/>
+                        </a:srgbClr>
+                      </a:solidFill>
+                      <a:prstDash val="solid"/>
+                      <a:round/>
+                      <a:headEnd type="none" w="sm" len="sm"/>
+                      <a:tailEnd type="none" w="sm" len="sm"/>
+                    </a:lnT>
+                    <a:lnB w="9525" cap="flat" cmpd="sng">
+                      <a:solidFill>
+                        <a:srgbClr val="000000">
+                          <a:alpha val="0"/>
+                        </a:srgbClr>
+                      </a:solidFill>
+                      <a:prstDash val="solid"/>
+                      <a:round/>
+                      <a:headEnd type="none" w="sm" len="sm"/>
+                      <a:tailEnd type="none" w="sm" len="sm"/>
+                    </a:lnB>
+                    <a:solidFill>
+                      <a:srgbClr val="F8FAFC"/>
+                    </a:solidFill>
+                  </a:tcPr>
+                </a:tc>
+                <a:extLst>
+                  <a:ext uri="{0D108BD9-81ED-4DB2-BD59-A6C34878D82A}">
+                    <a16:rowId xmlns:a16="http://schemas.microsoft.com/office/drawing/2014/main" val="10004"/>
+                  </a:ext>
+                </a:extLst>
+              </a:tr>
+              <a:tr h="709634">
+                <a:tc>
+                  <a:txBody>
+                    <a:bodyPr/>
+                    <a:lstStyle/>
+                    <a:p>
+                      <a:pPr marL="0" marR="0" lvl="0" indent="0" algn="l" rtl="0">
+                        <a:spcBef>
+                          <a:spcPts val="0"/>
+                        </a:spcBef>
+                        <a:spcAft>
+                          <a:spcPts val="0"/>
+                        </a:spcAft>
+                        <a:buNone/>
+                      </a:pPr>
+                      <a:r>
+                        <a:rPr lang="en-US" sz="1275" b="1" i="0" u="none" strike="noStrike" cap="none">
+                          <a:solidFill>
+                            <a:srgbClr val="1E293B"/>
+                          </a:solidFill>
+                          <a:latin typeface="JetBrains Mono" panose="020B0604020202020204" charset="0"/>
+                          <a:ea typeface="Lato"/>
+                          <a:cs typeface="JetBrains Mono" panose="020B0604020202020204" charset="0"/>
+                          <a:sym typeface="Lato"/>
+                        </a:rPr>
+                        <a:t>5. MERGE</a:t>
+                      </a:r>
+                      <a:endParaRPr>
+                        <a:latin typeface="JetBrains Mono" panose="020B0604020202020204" charset="0"/>
+                        <a:cs typeface="JetBrains Mono" panose="020B0604020202020204" charset="0"/>
+                      </a:endParaRPr>
+                    </a:p>
+                  </a:txBody>
+                  <a:tcPr marL="63500" marR="63500" marT="25400" marB="25400" anchor="ctr">
+                    <a:lnL w="9525" cap="flat" cmpd="sng">
+                      <a:solidFill>
+                        <a:srgbClr val="000000">
+                          <a:alpha val="0"/>
+                        </a:srgbClr>
+                      </a:solidFill>
+                      <a:prstDash val="solid"/>
+                      <a:round/>
+                      <a:headEnd type="none" w="sm" len="sm"/>
+                      <a:tailEnd type="none" w="sm" len="sm"/>
+                    </a:lnL>
+                    <a:lnR w="9525" cap="flat" cmpd="sng">
+                      <a:solidFill>
+                        <a:srgbClr val="000000">
+                          <a:alpha val="0"/>
+                        </a:srgbClr>
+                      </a:solidFill>
+                      <a:prstDash val="solid"/>
+                      <a:round/>
+                      <a:headEnd type="none" w="sm" len="sm"/>
+                      <a:tailEnd type="none" w="sm" len="sm"/>
+                    </a:lnR>
+                    <a:lnT w="9525" cap="flat" cmpd="sng">
+                      <a:solidFill>
+                        <a:srgbClr val="000000">
+                          <a:alpha val="0"/>
+                        </a:srgbClr>
+                      </a:solidFill>
+                      <a:prstDash val="solid"/>
+                      <a:round/>
+                      <a:headEnd type="none" w="sm" len="sm"/>
+                      <a:tailEnd type="none" w="sm" len="sm"/>
+                    </a:lnT>
+                    <a:lnB w="9525" cap="flat" cmpd="sng">
+                      <a:solidFill>
+                        <a:srgbClr val="000000">
+                          <a:alpha val="0"/>
+                        </a:srgbClr>
+                      </a:solidFill>
+                      <a:prstDash val="solid"/>
+                      <a:round/>
+                      <a:headEnd type="none" w="sm" len="sm"/>
+                      <a:tailEnd type="none" w="sm" len="sm"/>
+                    </a:lnB>
+                    <a:solidFill>
+                      <a:srgbClr val="CBD5E1"/>
+                    </a:solidFill>
+                  </a:tcPr>
+                </a:tc>
+                <a:tc>
+                  <a:txBody>
+                    <a:bodyPr/>
+                    <a:lstStyle/>
+                    <a:p>
+                      <a:pPr marL="0" marR="0" lvl="0" indent="0" algn="l" rtl="0">
+                        <a:spcBef>
+                          <a:spcPts val="0"/>
+                        </a:spcBef>
+                        <a:spcAft>
+                          <a:spcPts val="0"/>
+                        </a:spcAft>
+                        <a:buNone/>
+                      </a:pPr>
+                      <a:r>
+                        <a:rPr lang="en-US" sz="1275" b="0" i="0" u="none" strike="noStrike" cap="none">
+                          <a:solidFill>
+                            <a:srgbClr val="1E293B"/>
+                          </a:solidFill>
+                          <a:latin typeface="JetBrains Mono" panose="020B0604020202020204" charset="0"/>
+                          <a:ea typeface="Lato"/>
+                          <a:cs typeface="JetBrains Mono" panose="020B0604020202020204" charset="0"/>
+                          <a:sym typeface="Lato"/>
+                        </a:rPr>
+                        <a:t>Combine your feature back into the main code.</a:t>
+                      </a:r>
+                      <a:endParaRPr>
+                        <a:latin typeface="JetBrains Mono" panose="020B0604020202020204" charset="0"/>
+                        <a:cs typeface="JetBrains Mono" panose="020B0604020202020204" charset="0"/>
+                      </a:endParaRPr>
+                    </a:p>
+                  </a:txBody>
+                  <a:tcPr marL="63500" marR="63500" marT="25400" marB="25400" anchor="ctr">
+                    <a:lnL w="9525" cap="flat" cmpd="sng">
+                      <a:solidFill>
+                        <a:srgbClr val="000000">
+                          <a:alpha val="0"/>
+                        </a:srgbClr>
+                      </a:solidFill>
+                      <a:prstDash val="solid"/>
+                      <a:round/>
+                      <a:headEnd type="none" w="sm" len="sm"/>
+                      <a:tailEnd type="none" w="sm" len="sm"/>
+                    </a:lnL>
+                    <a:lnR w="9525" cap="flat" cmpd="sng">
+                      <a:solidFill>
+                        <a:srgbClr val="000000">
+                          <a:alpha val="0"/>
+                        </a:srgbClr>
+                      </a:solidFill>
+                      <a:prstDash val="solid"/>
+                      <a:round/>
+                      <a:headEnd type="none" w="sm" len="sm"/>
+                      <a:tailEnd type="none" w="sm" len="sm"/>
+                    </a:lnR>
+                    <a:lnT w="9525" cap="flat" cmpd="sng">
+                      <a:solidFill>
+                        <a:srgbClr val="000000">
+                          <a:alpha val="0"/>
+                        </a:srgbClr>
+                      </a:solidFill>
+                      <a:prstDash val="solid"/>
+                      <a:round/>
+                      <a:headEnd type="none" w="sm" len="sm"/>
+                      <a:tailEnd type="none" w="sm" len="sm"/>
+                    </a:lnT>
+                    <a:lnB w="9525" cap="flat" cmpd="sng">
+                      <a:solidFill>
+                        <a:srgbClr val="000000">
+                          <a:alpha val="0"/>
+                        </a:srgbClr>
+                      </a:solidFill>
+                      <a:prstDash val="solid"/>
+                      <a:round/>
+                      <a:headEnd type="none" w="sm" len="sm"/>
+                      <a:tailEnd type="none" w="sm" len="sm"/>
+                    </a:lnB>
+                    <a:solidFill>
+                      <a:srgbClr val="CBD5E1"/>
+                    </a:solidFill>
+                  </a:tcPr>
+                </a:tc>
+                <a:tc>
+                  <a:txBody>
+                    <a:bodyPr/>
+                    <a:lstStyle/>
+                    <a:p>
+                      <a:pPr marL="0" marR="0" lvl="0" indent="0" algn="l" rtl="0">
+                        <a:spcBef>
+                          <a:spcPts val="0"/>
+                        </a:spcBef>
+                        <a:spcAft>
+                          <a:spcPts val="0"/>
+                        </a:spcAft>
+                        <a:buNone/>
+                      </a:pPr>
+                      <a:r>
+                        <a:rPr lang="en-US" sz="1200" b="0" i="0" u="none" strike="noStrike" cap="none" dirty="0">
+                          <a:solidFill>
+                            <a:srgbClr val="000000"/>
+                          </a:solidFill>
+                          <a:latin typeface="JetBrains Mono" panose="020B0604020202020204" charset="0"/>
+                          <a:ea typeface="Source Code Pro Medium"/>
+                          <a:cs typeface="JetBrains Mono" panose="020B0604020202020204" charset="0"/>
+                          <a:sym typeface="Source Code Pro Medium"/>
+                        </a:rPr>
+                        <a:t>git checkout main</a:t>
+                      </a:r>
+                      <a:br>
+                        <a:rPr lang="en-US" sz="1800" u="none" strike="noStrike" cap="none" dirty="0">
+                          <a:solidFill>
+                            <a:schemeClr val="dk1"/>
+                          </a:solidFill>
+                          <a:latin typeface="JetBrains Mono" panose="020B0604020202020204" charset="0"/>
+                          <a:ea typeface="Calibri"/>
+                          <a:cs typeface="JetBrains Mono" panose="020B0604020202020204" charset="0"/>
+                          <a:sym typeface="Calibri"/>
+                        </a:rPr>
+                      </a:br>
+                      <a:br>
+                        <a:rPr lang="en-US" sz="1200" b="0" i="0" u="none" strike="noStrike" cap="none" dirty="0">
+                          <a:solidFill>
+                            <a:srgbClr val="000000"/>
+                          </a:solidFill>
+                          <a:latin typeface="JetBrains Mono" panose="020B0604020202020204" charset="0"/>
+                          <a:ea typeface="Source Code Pro Medium"/>
+                          <a:cs typeface="JetBrains Mono" panose="020B0604020202020204" charset="0"/>
+                          <a:sym typeface="Source Code Pro Medium"/>
+                        </a:rPr>
+                      </a:br>
+                      <a:r>
+                        <a:rPr lang="en-US" sz="1200" b="0" i="0" u="none" strike="noStrike" cap="none" dirty="0">
+                          <a:solidFill>
+                            <a:srgbClr val="000000"/>
+                          </a:solidFill>
+                          <a:latin typeface="JetBrains Mono" panose="020B0604020202020204" charset="0"/>
+                          <a:ea typeface="Source Code Pro Medium"/>
+                          <a:cs typeface="JetBrains Mono" panose="020B0604020202020204" charset="0"/>
+                          <a:sym typeface="Source Code Pro Medium"/>
+                        </a:rPr>
+                        <a:t>git merge feature-name</a:t>
+                      </a:r>
+                      <a:endParaRPr dirty="0">
+                        <a:latin typeface="JetBrains Mono" panose="020B0604020202020204" charset="0"/>
+                        <a:cs typeface="JetBrains Mono" panose="020B0604020202020204" charset="0"/>
+                      </a:endParaRPr>
+                    </a:p>
+                  </a:txBody>
+                  <a:tcPr marL="63500" marR="63500" marT="25400" marB="25400" anchor="ctr">
+                    <a:lnL w="9525" cap="flat" cmpd="sng">
+                      <a:solidFill>
+                        <a:srgbClr val="000000">
+                          <a:alpha val="0"/>
+                        </a:srgbClr>
+                      </a:solidFill>
+                      <a:prstDash val="solid"/>
+                      <a:round/>
+                      <a:headEnd type="none" w="sm" len="sm"/>
+                      <a:tailEnd type="none" w="sm" len="sm"/>
+                    </a:lnL>
+                    <a:lnR w="9525" cap="flat" cmpd="sng">
+                      <a:solidFill>
+                        <a:srgbClr val="000000">
+                          <a:alpha val="0"/>
+                        </a:srgbClr>
+                      </a:solidFill>
+                      <a:prstDash val="solid"/>
+                      <a:round/>
+                      <a:headEnd type="none" w="sm" len="sm"/>
+                      <a:tailEnd type="none" w="sm" len="sm"/>
+                    </a:lnR>
+                    <a:lnT w="9525" cap="flat" cmpd="sng">
+                      <a:solidFill>
+                        <a:srgbClr val="000000">
+                          <a:alpha val="0"/>
+                        </a:srgbClr>
+                      </a:solidFill>
+                      <a:prstDash val="solid"/>
+                      <a:round/>
+                      <a:headEnd type="none" w="sm" len="sm"/>
+                      <a:tailEnd type="none" w="sm" len="sm"/>
+                    </a:lnT>
+                    <a:lnB w="9525" cap="flat" cmpd="sng">
+                      <a:solidFill>
+                        <a:srgbClr val="000000">
+                          <a:alpha val="0"/>
+                        </a:srgbClr>
+                      </a:solidFill>
+                      <a:prstDash val="solid"/>
+                      <a:round/>
+                      <a:headEnd type="none" w="sm" len="sm"/>
+                      <a:tailEnd type="none" w="sm" len="sm"/>
+                    </a:lnB>
+                    <a:solidFill>
+                      <a:srgbClr val="CBD5E1"/>
+                    </a:solidFill>
+                  </a:tcPr>
+                </a:tc>
+                <a:extLst>
+                  <a:ext uri="{0D108BD9-81ED-4DB2-BD59-A6C34878D82A}">
+                    <a16:rowId xmlns:a16="http://schemas.microsoft.com/office/drawing/2014/main" val="10005"/>
+                  </a:ext>
+                </a:extLst>
+              </a:tr>
+            </a:tbl>
+          </a:graphicData>
+        </a:graphic>
+      </p:graphicFrame>
+      <p:sp>
+        <p:nvSpPr>
+          <p:cNvPr id="91" name="Google Shape;91;p13"/>
+          <p:cNvSpPr txBox="1"/>
+          <p:nvPr/>
+        </p:nvSpPr>
+        <p:spPr>
+          <a:xfrm>
+            <a:off x="9124950" y="2522000"/>
+            <a:ext cx="2360295" cy="228600"/>
+          </a:xfrm>
+          <a:prstGeom prst="rect">
+            <a:avLst/>
+          </a:prstGeom>
+          <a:noFill/>
+          <a:ln>
+            <a:noFill/>
+          </a:ln>
+        </p:spPr>
+        <p:txBody>
+          <a:bodyPr spcFirstLastPara="1" wrap="square" lIns="0" tIns="0" rIns="0" bIns="0" anchor="ctr" anchorCtr="0">
+            <a:spAutoFit/>
+          </a:bodyPr>
+          <a:lstStyle/>
+          <a:p>
+            <a:pPr marL="0" marR="0" lvl="0" indent="0" algn="l" rtl="0">
+              <a:spcBef>
+                <a:spcPts val="0"/>
+              </a:spcBef>
+              <a:spcAft>
+                <a:spcPts val="0"/>
+              </a:spcAft>
+              <a:buNone/>
+            </a:pPr>
+            <a:r>
+              <a:rPr lang="en-US" sz="1500" b="1" i="0" u="none" strike="noStrike" cap="none">
+                <a:solidFill>
+                  <a:srgbClr val="2DD4BF"/>
+                </a:solidFill>
+                <a:latin typeface="Urbanist"/>
+                <a:ea typeface="Urbanist"/>
+                <a:cs typeface="Urbanist"/>
+                <a:sym typeface="Urbanist"/>
+              </a:rPr>
+              <a:t>Productivity Tip</a:t>
+            </a:r>
+            <a:endParaRPr/>
+          </a:p>
+        </p:txBody>
+      </p:sp>
+      <p:sp>
+        <p:nvSpPr>
+          <p:cNvPr id="92" name="Google Shape;92;p13"/>
+          <p:cNvSpPr txBox="1"/>
+          <p:nvPr/>
+        </p:nvSpPr>
+        <p:spPr>
+          <a:xfrm>
+            <a:off x="8820150" y="2893475"/>
+            <a:ext cx="2552700" cy="914400"/>
+          </a:xfrm>
+          <a:prstGeom prst="rect">
+            <a:avLst/>
+          </a:prstGeom>
+          <a:noFill/>
+          <a:ln>
+            <a:noFill/>
+          </a:ln>
+        </p:spPr>
+        <p:txBody>
+          <a:bodyPr spcFirstLastPara="1" wrap="square" lIns="0" tIns="0" rIns="0" bIns="0" anchor="t" anchorCtr="0">
+            <a:spAutoFit/>
+          </a:bodyPr>
+          <a:lstStyle/>
+          <a:p>
+            <a:pPr marL="0" marR="0" lvl="0" indent="0" algn="l" rtl="0">
+              <a:lnSpc>
+                <a:spcPct val="150000"/>
+              </a:lnSpc>
+              <a:spcBef>
+                <a:spcPts val="0"/>
+              </a:spcBef>
+              <a:spcAft>
+                <a:spcPts val="0"/>
+              </a:spcAft>
+              <a:buNone/>
+            </a:pPr>
+            <a:r>
+              <a:rPr lang="en-US" sz="1200" b="0" i="0" u="none" strike="noStrike" cap="none">
+                <a:solidFill>
+                  <a:srgbClr val="94A3B8"/>
+                </a:solidFill>
+                <a:latin typeface="Lato"/>
+                <a:ea typeface="Lato"/>
+                <a:cs typeface="Lato"/>
+                <a:sym typeface="Lato"/>
+              </a:rPr>
+              <a:t>Never code directly on the main branch. Sub-branches allow you to experiment safely without breaking the production code for others.</a:t>
+            </a:r>
+            <a:endParaRPr/>
+          </a:p>
+        </p:txBody>
+      </p:sp>
+      <p:sp>
+        <p:nvSpPr>
+          <p:cNvPr id="93" name="Google Shape;93;p13"/>
+          <p:cNvSpPr txBox="1"/>
+          <p:nvPr/>
+        </p:nvSpPr>
+        <p:spPr>
+          <a:xfrm>
+            <a:off x="9124950" y="4826965"/>
+            <a:ext cx="2360295" cy="228600"/>
+          </a:xfrm>
+          <a:prstGeom prst="rect">
+            <a:avLst/>
+          </a:prstGeom>
+          <a:noFill/>
+          <a:ln>
+            <a:noFill/>
+          </a:ln>
+        </p:spPr>
+        <p:txBody>
+          <a:bodyPr spcFirstLastPara="1" wrap="square" lIns="0" tIns="0" rIns="0" bIns="0" anchor="ctr" anchorCtr="0">
+            <a:spAutoFit/>
+          </a:bodyPr>
+          <a:lstStyle/>
+          <a:p>
+            <a:pPr marL="0" marR="0" lvl="0" indent="0" algn="l" rtl="0">
+              <a:spcBef>
+                <a:spcPts val="0"/>
+              </a:spcBef>
+              <a:spcAft>
+                <a:spcPts val="0"/>
+              </a:spcAft>
+              <a:buNone/>
+            </a:pPr>
+            <a:r>
+              <a:rPr lang="en-US" sz="1500" b="1" i="0" u="none" strike="noStrike" cap="none">
+                <a:solidFill>
+                  <a:srgbClr val="F87171"/>
+                </a:solidFill>
+                <a:latin typeface="Urbanist"/>
+                <a:ea typeface="Urbanist"/>
+                <a:cs typeface="Urbanist"/>
+                <a:sym typeface="Urbanist"/>
+              </a:rPr>
+              <a:t>The Safety Net</a:t>
+            </a:r>
+            <a:endParaRPr/>
+          </a:p>
+        </p:txBody>
+      </p:sp>
+      <p:sp>
+        <p:nvSpPr>
+          <p:cNvPr id="94" name="Google Shape;94;p13"/>
+          <p:cNvSpPr txBox="1"/>
+          <p:nvPr/>
+        </p:nvSpPr>
+        <p:spPr>
+          <a:xfrm>
+            <a:off x="8820150" y="5198440"/>
+            <a:ext cx="2552700" cy="914400"/>
+          </a:xfrm>
+          <a:prstGeom prst="rect">
+            <a:avLst/>
+          </a:prstGeom>
+          <a:noFill/>
+          <a:ln>
+            <a:noFill/>
+          </a:ln>
+        </p:spPr>
+        <p:txBody>
+          <a:bodyPr spcFirstLastPara="1" wrap="square" lIns="0" tIns="0" rIns="0" bIns="0" anchor="t" anchorCtr="0">
+            <a:spAutoFit/>
+          </a:bodyPr>
+          <a:lstStyle/>
+          <a:p>
+            <a:pPr marL="0" marR="0" lvl="0" indent="0" algn="l" rtl="0">
+              <a:lnSpc>
+                <a:spcPct val="150000"/>
+              </a:lnSpc>
+              <a:spcBef>
+                <a:spcPts val="0"/>
+              </a:spcBef>
+              <a:spcAft>
+                <a:spcPts val="0"/>
+              </a:spcAft>
+              <a:buNone/>
+            </a:pPr>
+            <a:r>
+              <a:rPr lang="en-US" sz="1200" b="0" i="0" u="none" strike="noStrike" cap="none">
+                <a:solidFill>
+                  <a:srgbClr val="94A3B8"/>
+                </a:solidFill>
+                <a:latin typeface="Lato"/>
+                <a:ea typeface="Lato"/>
+                <a:cs typeface="Lato"/>
+                <a:sym typeface="Lato"/>
+              </a:rPr>
+              <a:t>If you encounter conflicts, always rebase or merge main into your branch locally before pushing to the remote repository.</a:t>
+            </a:r>
+            <a:endParaRPr/>
+          </a:p>
+        </p:txBody>
+      </p:sp>
+      <p:sp>
+        <p:nvSpPr>
+          <p:cNvPr id="107" name="Google Shape;107;p13"/>
+          <p:cNvSpPr/>
+          <p:nvPr/>
+        </p:nvSpPr>
+        <p:spPr>
+          <a:xfrm>
+            <a:off x="571500" y="6791325"/>
+            <a:ext cx="1371600" cy="19050"/>
+          </a:xfrm>
+          <a:prstGeom prst="rect">
+            <a:avLst/>
+          </a:prstGeom>
+          <a:solidFill>
+            <a:srgbClr val="0F172A"/>
+          </a:solidFill>
+          <a:ln>
+            <a:noFill/>
+          </a:ln>
+        </p:spPr>
+        <p:txBody>
+          <a:bodyPr spcFirstLastPara="1" wrap="square" lIns="91425" tIns="45700" rIns="91425" bIns="45700" anchor="ctr" anchorCtr="0">
+            <a:noAutofit/>
+          </a:bodyPr>
+          <a:lstStyle/>
+          <a:p>
+            <a:pPr marL="0" marR="0" lvl="0" indent="0" algn="ctr" rtl="0">
+              <a:spcBef>
+                <a:spcPts val="0"/>
+              </a:spcBef>
+              <a:spcAft>
+                <a:spcPts val="0"/>
+              </a:spcAft>
+              <a:buNone/>
+            </a:pPr>
+            <a:endParaRPr sz="1800" b="0" i="0" u="none" strike="noStrike" cap="none">
+              <a:solidFill>
+                <a:schemeClr val="dk1"/>
+              </a:solidFill>
+              <a:latin typeface="Calibri"/>
+              <a:ea typeface="Calibri"/>
+              <a:cs typeface="Calibri"/>
+              <a:sym typeface="Calibri"/>
+            </a:endParaRPr>
+          </a:p>
+        </p:txBody>
+      </p:sp>
+      <p:sp>
+        <p:nvSpPr>
+          <p:cNvPr id="108" name="Google Shape;108;p13"/>
+          <p:cNvSpPr/>
+          <p:nvPr/>
+        </p:nvSpPr>
+        <p:spPr>
+          <a:xfrm>
+            <a:off x="1943100" y="6791325"/>
+            <a:ext cx="3200400" cy="19050"/>
+          </a:xfrm>
+          <a:prstGeom prst="rect">
+            <a:avLst/>
+          </a:prstGeom>
+          <a:solidFill>
+            <a:srgbClr val="0F172A"/>
+          </a:solidFill>
+          <a:ln>
+            <a:noFill/>
+          </a:ln>
+        </p:spPr>
+        <p:txBody>
+          <a:bodyPr spcFirstLastPara="1" wrap="square" lIns="91425" tIns="45700" rIns="91425" bIns="45700" anchor="ctr" anchorCtr="0">
+            <a:noAutofit/>
+          </a:bodyPr>
+          <a:lstStyle/>
+          <a:p>
+            <a:pPr marL="0" marR="0" lvl="0" indent="0" algn="ctr" rtl="0">
+              <a:spcBef>
+                <a:spcPts val="0"/>
+              </a:spcBef>
+              <a:spcAft>
+                <a:spcPts val="0"/>
+              </a:spcAft>
+              <a:buNone/>
+            </a:pPr>
+            <a:endParaRPr sz="1800" b="0" i="0" u="none" strike="noStrike" cap="none">
+              <a:solidFill>
+                <a:schemeClr val="dk1"/>
+              </a:solidFill>
+              <a:latin typeface="Calibri"/>
+              <a:ea typeface="Calibri"/>
+              <a:cs typeface="Calibri"/>
+              <a:sym typeface="Calibri"/>
+            </a:endParaRPr>
+          </a:p>
+        </p:txBody>
+      </p:sp>
+      <p:sp>
+        <p:nvSpPr>
+          <p:cNvPr id="109" name="Google Shape;109;p13"/>
+          <p:cNvSpPr/>
+          <p:nvPr/>
+        </p:nvSpPr>
+        <p:spPr>
+          <a:xfrm>
+            <a:off x="5143500" y="6791325"/>
+            <a:ext cx="3048000" cy="19050"/>
+          </a:xfrm>
+          <a:prstGeom prst="rect">
+            <a:avLst/>
+          </a:prstGeom>
+          <a:solidFill>
+            <a:srgbClr val="0F172A"/>
+          </a:solidFill>
+          <a:ln>
+            <a:noFill/>
+          </a:ln>
+        </p:spPr>
+        <p:txBody>
+          <a:bodyPr spcFirstLastPara="1" wrap="square" lIns="91425" tIns="45700" rIns="91425" bIns="45700" anchor="ctr" anchorCtr="0">
+            <a:noAutofit/>
+          </a:bodyPr>
+          <a:lstStyle/>
+          <a:p>
+            <a:pPr marL="0" marR="0" lvl="0" indent="0" algn="ctr" rtl="0">
+              <a:spcBef>
+                <a:spcPts val="0"/>
+              </a:spcBef>
+              <a:spcAft>
+                <a:spcPts val="0"/>
+              </a:spcAft>
+              <a:buNone/>
+            </a:pPr>
+            <a:endParaRPr sz="1800" b="0" i="0" u="none" strike="noStrike" cap="none">
+              <a:solidFill>
+                <a:schemeClr val="dk1"/>
+              </a:solidFill>
+              <a:latin typeface="Calibri"/>
+              <a:ea typeface="Calibri"/>
+              <a:cs typeface="Calibri"/>
+              <a:sym typeface="Calibri"/>
+            </a:endParaRPr>
+          </a:p>
+        </p:txBody>
+      </p:sp>
+      <p:pic>
+        <p:nvPicPr>
+          <p:cNvPr id="110" name="Google Shape;110;p13" descr="image.png"/>
+          <p:cNvPicPr preferRelativeResize="0"/>
+          <p:nvPr/>
+        </p:nvPicPr>
+        <p:blipFill rotWithShape="1">
+          <a:blip r:embed="rId6">
+            <a:alphaModFix/>
+          </a:blip>
+          <a:srcRect/>
+          <a:stretch/>
+        </p:blipFill>
+        <p:spPr>
+          <a:xfrm>
+            <a:off x="8820150" y="2541050"/>
+            <a:ext cx="190500" cy="190500"/>
+          </a:xfrm>
+          <a:prstGeom prst="rect">
+            <a:avLst/>
+          </a:prstGeom>
+          <a:noFill/>
+          <a:ln>
+            <a:noFill/>
+          </a:ln>
+        </p:spPr>
+      </p:pic>
+      <p:pic>
+        <p:nvPicPr>
+          <p:cNvPr id="111" name="Google Shape;111;p13" descr="image.png"/>
+          <p:cNvPicPr preferRelativeResize="0"/>
+          <p:nvPr/>
+        </p:nvPicPr>
+        <p:blipFill rotWithShape="1">
+          <a:blip r:embed="rId7">
+            <a:alphaModFix/>
+          </a:blip>
+          <a:srcRect/>
+          <a:stretch/>
+        </p:blipFill>
+        <p:spPr>
+          <a:xfrm>
+            <a:off x="8820150" y="4846015"/>
+            <a:ext cx="190500" cy="190500"/>
+          </a:xfrm>
+          <a:prstGeom prst="rect">
+            <a:avLst/>
+          </a:prstGeom>
+          <a:noFill/>
+          <a:ln>
+            <a:noFill/>
+          </a:ln>
+        </p:spPr>
+      </p:pic>
+      <p:sp>
+        <p:nvSpPr>
+          <p:cNvPr id="3" name="Google Shape;95;p13">
+            <a:extLst>
+              <a:ext uri="{FF2B5EF4-FFF2-40B4-BE49-F238E27FC236}">
+                <a16:creationId xmlns:a16="http://schemas.microsoft.com/office/drawing/2014/main" id="{69A0A129-5BE4-28F0-5B4F-1C55318A5E20}"/>
+              </a:ext>
+            </a:extLst>
+          </p:cNvPr>
+          <p:cNvSpPr/>
+          <p:nvPr/>
+        </p:nvSpPr>
+        <p:spPr>
+          <a:xfrm>
+            <a:off x="520700" y="3505200"/>
+            <a:ext cx="1371600" cy="19050"/>
+          </a:xfrm>
+          <a:prstGeom prst="rect">
+            <a:avLst/>
+          </a:prstGeom>
+          <a:solidFill>
+            <a:srgbClr val="0F172A"/>
+          </a:solidFill>
+          <a:ln>
+            <a:noFill/>
+          </a:ln>
+        </p:spPr>
+        <p:txBody>
+          <a:bodyPr spcFirstLastPara="1" wrap="square" lIns="91425" tIns="45700" rIns="91425" bIns="45700" anchor="ctr" anchorCtr="0">
+            <a:noAutofit/>
+          </a:bodyPr>
+          <a:lstStyle/>
+          <a:p>
+            <a:pPr marL="0" marR="0" lvl="0" indent="0" algn="ctr" rtl="0">
+              <a:spcBef>
+                <a:spcPts val="0"/>
+              </a:spcBef>
+              <a:spcAft>
+                <a:spcPts val="0"/>
+              </a:spcAft>
+              <a:buNone/>
+            </a:pPr>
+            <a:endParaRPr sz="1800" b="0" i="0" u="none" strike="noStrike" cap="none">
+              <a:solidFill>
+                <a:schemeClr val="dk1"/>
+              </a:solidFill>
+              <a:latin typeface="Calibri"/>
+              <a:ea typeface="Calibri"/>
+              <a:cs typeface="Calibri"/>
+              <a:sym typeface="Calibri"/>
+            </a:endParaRPr>
+          </a:p>
+        </p:txBody>
+      </p:sp>
+      <p:sp>
+        <p:nvSpPr>
+          <p:cNvPr id="5" name="Google Shape;96;p13">
+            <a:extLst>
+              <a:ext uri="{FF2B5EF4-FFF2-40B4-BE49-F238E27FC236}">
+                <a16:creationId xmlns:a16="http://schemas.microsoft.com/office/drawing/2014/main" id="{9F0A426E-0AB4-2B4A-4F80-BA460AB7B8F9}"/>
+              </a:ext>
+            </a:extLst>
+          </p:cNvPr>
+          <p:cNvSpPr/>
+          <p:nvPr/>
+        </p:nvSpPr>
+        <p:spPr>
+          <a:xfrm>
+            <a:off x="1892300" y="3505200"/>
+            <a:ext cx="3200400" cy="19050"/>
+          </a:xfrm>
+          <a:prstGeom prst="rect">
+            <a:avLst/>
+          </a:prstGeom>
+          <a:solidFill>
+            <a:srgbClr val="0F172A"/>
+          </a:solidFill>
+          <a:ln>
+            <a:noFill/>
+          </a:ln>
+        </p:spPr>
+        <p:txBody>
+          <a:bodyPr spcFirstLastPara="1" wrap="square" lIns="91425" tIns="45700" rIns="91425" bIns="45700" anchor="ctr" anchorCtr="0">
+            <a:noAutofit/>
+          </a:bodyPr>
+          <a:lstStyle/>
+          <a:p>
+            <a:pPr marL="0" marR="0" lvl="0" indent="0" algn="ctr" rtl="0">
+              <a:spcBef>
+                <a:spcPts val="0"/>
+              </a:spcBef>
+              <a:spcAft>
+                <a:spcPts val="0"/>
+              </a:spcAft>
+              <a:buNone/>
+            </a:pPr>
+            <a:endParaRPr sz="1800" b="0" i="0" u="none" strike="noStrike" cap="none">
+              <a:solidFill>
+                <a:schemeClr val="dk1"/>
+              </a:solidFill>
+              <a:latin typeface="Calibri"/>
+              <a:ea typeface="Calibri"/>
+              <a:cs typeface="Calibri"/>
+              <a:sym typeface="Calibri"/>
+            </a:endParaRPr>
+          </a:p>
+        </p:txBody>
+      </p:sp>
+      <p:sp>
+        <p:nvSpPr>
+          <p:cNvPr id="7" name="Google Shape;97;p13">
+            <a:extLst>
+              <a:ext uri="{FF2B5EF4-FFF2-40B4-BE49-F238E27FC236}">
+                <a16:creationId xmlns:a16="http://schemas.microsoft.com/office/drawing/2014/main" id="{F88DC8ED-21D1-5B2A-BB19-29AA9CF0BA5F}"/>
+              </a:ext>
+            </a:extLst>
+          </p:cNvPr>
+          <p:cNvSpPr/>
+          <p:nvPr/>
+        </p:nvSpPr>
+        <p:spPr>
+          <a:xfrm>
+            <a:off x="5092700" y="3505200"/>
+            <a:ext cx="3048000" cy="19050"/>
+          </a:xfrm>
+          <a:prstGeom prst="rect">
+            <a:avLst/>
+          </a:prstGeom>
+          <a:solidFill>
+            <a:srgbClr val="0F172A"/>
+          </a:solidFill>
+          <a:ln>
+            <a:noFill/>
+          </a:ln>
+        </p:spPr>
+        <p:txBody>
+          <a:bodyPr spcFirstLastPara="1" wrap="square" lIns="91425" tIns="45700" rIns="91425" bIns="45700" anchor="ctr" anchorCtr="0">
+            <a:noAutofit/>
+          </a:bodyPr>
+          <a:lstStyle/>
+          <a:p>
+            <a:pPr marL="0" marR="0" lvl="0" indent="0" algn="ctr" rtl="0">
+              <a:spcBef>
+                <a:spcPts val="0"/>
+              </a:spcBef>
+              <a:spcAft>
+                <a:spcPts val="0"/>
+              </a:spcAft>
+              <a:buNone/>
+            </a:pPr>
+            <a:endParaRPr sz="1800" b="0" i="0" u="none" strike="noStrike" cap="none">
+              <a:solidFill>
+                <a:schemeClr val="dk1"/>
+              </a:solidFill>
+              <a:latin typeface="Calibri"/>
+              <a:ea typeface="Calibri"/>
+              <a:cs typeface="Calibri"/>
+              <a:sym typeface="Calibri"/>
+            </a:endParaRPr>
+          </a:p>
+        </p:txBody>
+      </p:sp>
+      <p:sp>
+        <p:nvSpPr>
+          <p:cNvPr id="9" name="Google Shape;95;p13">
+            <a:extLst>
+              <a:ext uri="{FF2B5EF4-FFF2-40B4-BE49-F238E27FC236}">
+                <a16:creationId xmlns:a16="http://schemas.microsoft.com/office/drawing/2014/main" id="{5144ABC4-5950-B5BE-8E18-FAAE58B06A5B}"/>
+              </a:ext>
+            </a:extLst>
+          </p:cNvPr>
+          <p:cNvSpPr/>
+          <p:nvPr/>
+        </p:nvSpPr>
+        <p:spPr>
+          <a:xfrm>
+            <a:off x="520700" y="4931740"/>
+            <a:ext cx="1371600" cy="19050"/>
+          </a:xfrm>
+          <a:prstGeom prst="rect">
+            <a:avLst/>
+          </a:prstGeom>
+          <a:solidFill>
+            <a:srgbClr val="0F172A"/>
+          </a:solidFill>
+          <a:ln>
+            <a:noFill/>
+          </a:ln>
+        </p:spPr>
+        <p:txBody>
+          <a:bodyPr spcFirstLastPara="1" wrap="square" lIns="91425" tIns="45700" rIns="91425" bIns="45700" anchor="ctr" anchorCtr="0">
+            <a:noAutofit/>
+          </a:bodyPr>
+          <a:lstStyle/>
+          <a:p>
+            <a:pPr marL="0" marR="0" lvl="0" indent="0" algn="ctr" rtl="0">
+              <a:spcBef>
+                <a:spcPts val="0"/>
+              </a:spcBef>
+              <a:spcAft>
+                <a:spcPts val="0"/>
+              </a:spcAft>
+              <a:buNone/>
+            </a:pPr>
+            <a:endParaRPr sz="1800" b="0" i="0" u="none" strike="noStrike" cap="none">
+              <a:solidFill>
+                <a:schemeClr val="dk1"/>
+              </a:solidFill>
+              <a:latin typeface="Calibri"/>
+              <a:ea typeface="Calibri"/>
+              <a:cs typeface="Calibri"/>
+              <a:sym typeface="Calibri"/>
+            </a:endParaRPr>
+          </a:p>
+        </p:txBody>
+      </p:sp>
+      <p:sp>
+        <p:nvSpPr>
+          <p:cNvPr id="11" name="Google Shape;96;p13">
+            <a:extLst>
+              <a:ext uri="{FF2B5EF4-FFF2-40B4-BE49-F238E27FC236}">
+                <a16:creationId xmlns:a16="http://schemas.microsoft.com/office/drawing/2014/main" id="{A3BEE4FF-F0EC-8CC3-CE7C-8AF3E0609DCB}"/>
+              </a:ext>
+            </a:extLst>
+          </p:cNvPr>
+          <p:cNvSpPr/>
+          <p:nvPr/>
+        </p:nvSpPr>
+        <p:spPr>
+          <a:xfrm>
+            <a:off x="1892300" y="4931740"/>
+            <a:ext cx="3200400" cy="19050"/>
+          </a:xfrm>
+          <a:prstGeom prst="rect">
+            <a:avLst/>
+          </a:prstGeom>
+          <a:solidFill>
+            <a:srgbClr val="0F172A"/>
+          </a:solidFill>
+          <a:ln>
+            <a:noFill/>
+          </a:ln>
+        </p:spPr>
+        <p:txBody>
+          <a:bodyPr spcFirstLastPara="1" wrap="square" lIns="91425" tIns="45700" rIns="91425" bIns="45700" anchor="ctr" anchorCtr="0">
+            <a:noAutofit/>
+          </a:bodyPr>
+          <a:lstStyle/>
+          <a:p>
+            <a:pPr marL="0" marR="0" lvl="0" indent="0" algn="ctr" rtl="0">
+              <a:spcBef>
+                <a:spcPts val="0"/>
+              </a:spcBef>
+              <a:spcAft>
+                <a:spcPts val="0"/>
+              </a:spcAft>
+              <a:buNone/>
+            </a:pPr>
+            <a:endParaRPr sz="1800" b="0" i="0" u="none" strike="noStrike" cap="none">
+              <a:solidFill>
+                <a:schemeClr val="dk1"/>
+              </a:solidFill>
+              <a:latin typeface="Calibri"/>
+              <a:ea typeface="Calibri"/>
+              <a:cs typeface="Calibri"/>
+              <a:sym typeface="Calibri"/>
+            </a:endParaRPr>
+          </a:p>
+        </p:txBody>
+      </p:sp>
+      <p:sp>
+        <p:nvSpPr>
+          <p:cNvPr id="13" name="Google Shape;97;p13">
+            <a:extLst>
+              <a:ext uri="{FF2B5EF4-FFF2-40B4-BE49-F238E27FC236}">
+                <a16:creationId xmlns:a16="http://schemas.microsoft.com/office/drawing/2014/main" id="{3F26DD0B-0A74-17FD-6EBE-85D3EE19C56C}"/>
+              </a:ext>
+            </a:extLst>
+          </p:cNvPr>
+          <p:cNvSpPr/>
+          <p:nvPr/>
+        </p:nvSpPr>
+        <p:spPr>
+          <a:xfrm>
+            <a:off x="5092700" y="4931740"/>
+            <a:ext cx="3048000" cy="19050"/>
+          </a:xfrm>
+          <a:prstGeom prst="rect">
+            <a:avLst/>
+          </a:prstGeom>
+          <a:solidFill>
+            <a:srgbClr val="0F172A"/>
+          </a:solidFill>
+          <a:ln>
+            <a:noFill/>
+          </a:ln>
+        </p:spPr>
+        <p:txBody>
+          <a:bodyPr spcFirstLastPara="1" wrap="square" lIns="91425" tIns="45700" rIns="91425" bIns="45700" anchor="ctr" anchorCtr="0">
+            <a:noAutofit/>
+          </a:bodyPr>
+          <a:lstStyle/>
+          <a:p>
+            <a:pPr marL="0" marR="0" lvl="0" indent="0" algn="ctr" rtl="0">
+              <a:spcBef>
+                <a:spcPts val="0"/>
+              </a:spcBef>
+              <a:spcAft>
+                <a:spcPts val="0"/>
+              </a:spcAft>
+              <a:buNone/>
+            </a:pPr>
+            <a:endParaRPr sz="1800" b="0" i="0" u="none" strike="noStrike" cap="none">
+              <a:solidFill>
+                <a:schemeClr val="dk1"/>
+              </a:solidFill>
+              <a:latin typeface="Calibri"/>
+              <a:ea typeface="Calibri"/>
+              <a:cs typeface="Calibri"/>
+              <a:sym typeface="Calibri"/>
+            </a:endParaRPr>
+          </a:p>
+        </p:txBody>
+      </p:sp>
+      <p:sp>
+        <p:nvSpPr>
+          <p:cNvPr id="15" name="Google Shape;95;p13">
+            <a:extLst>
+              <a:ext uri="{FF2B5EF4-FFF2-40B4-BE49-F238E27FC236}">
+                <a16:creationId xmlns:a16="http://schemas.microsoft.com/office/drawing/2014/main" id="{14EBA07D-4017-7392-C009-C49289345BD2}"/>
+              </a:ext>
+            </a:extLst>
+          </p:cNvPr>
+          <p:cNvSpPr/>
+          <p:nvPr/>
+        </p:nvSpPr>
+        <p:spPr>
+          <a:xfrm>
+            <a:off x="520700" y="5646115"/>
+            <a:ext cx="1371600" cy="19050"/>
+          </a:xfrm>
+          <a:prstGeom prst="rect">
+            <a:avLst/>
+          </a:prstGeom>
+          <a:solidFill>
+            <a:srgbClr val="0F172A"/>
+          </a:solidFill>
+          <a:ln>
+            <a:noFill/>
+          </a:ln>
+        </p:spPr>
+        <p:txBody>
+          <a:bodyPr spcFirstLastPara="1" wrap="square" lIns="91425" tIns="45700" rIns="91425" bIns="45700" anchor="ctr" anchorCtr="0">
+            <a:noAutofit/>
+          </a:bodyPr>
+          <a:lstStyle/>
+          <a:p>
+            <a:pPr marL="0" marR="0" lvl="0" indent="0" algn="ctr" rtl="0">
+              <a:spcBef>
+                <a:spcPts val="0"/>
+              </a:spcBef>
+              <a:spcAft>
+                <a:spcPts val="0"/>
+              </a:spcAft>
+              <a:buNone/>
+            </a:pPr>
+            <a:endParaRPr sz="1800" b="0" i="0" u="none" strike="noStrike" cap="none">
+              <a:solidFill>
+                <a:schemeClr val="dk1"/>
+              </a:solidFill>
+              <a:latin typeface="Calibri"/>
+              <a:ea typeface="Calibri"/>
+              <a:cs typeface="Calibri"/>
+              <a:sym typeface="Calibri"/>
+            </a:endParaRPr>
+          </a:p>
+        </p:txBody>
+      </p:sp>
+      <p:sp>
+        <p:nvSpPr>
+          <p:cNvPr id="17" name="Google Shape;96;p13">
+            <a:extLst>
+              <a:ext uri="{FF2B5EF4-FFF2-40B4-BE49-F238E27FC236}">
+                <a16:creationId xmlns:a16="http://schemas.microsoft.com/office/drawing/2014/main" id="{FE504817-7775-B2B4-4488-73D6E0917354}"/>
+              </a:ext>
+            </a:extLst>
+          </p:cNvPr>
+          <p:cNvSpPr/>
+          <p:nvPr/>
+        </p:nvSpPr>
+        <p:spPr>
+          <a:xfrm>
+            <a:off x="1892300" y="5646115"/>
+            <a:ext cx="3200400" cy="19050"/>
+          </a:xfrm>
+          <a:prstGeom prst="rect">
+            <a:avLst/>
+          </a:prstGeom>
+          <a:solidFill>
+            <a:srgbClr val="0F172A"/>
+          </a:solidFill>
+          <a:ln>
+            <a:noFill/>
+          </a:ln>
+        </p:spPr>
+        <p:txBody>
+          <a:bodyPr spcFirstLastPara="1" wrap="square" lIns="91425" tIns="45700" rIns="91425" bIns="45700" anchor="ctr" anchorCtr="0">
+            <a:noAutofit/>
+          </a:bodyPr>
+          <a:lstStyle/>
+          <a:p>
+            <a:pPr marL="0" marR="0" lvl="0" indent="0" algn="ctr" rtl="0">
+              <a:spcBef>
+                <a:spcPts val="0"/>
+              </a:spcBef>
+              <a:spcAft>
+                <a:spcPts val="0"/>
+              </a:spcAft>
+              <a:buNone/>
+            </a:pPr>
+            <a:endParaRPr sz="1800" b="0" i="0" u="none" strike="noStrike" cap="none">
+              <a:solidFill>
+                <a:schemeClr val="dk1"/>
+              </a:solidFill>
+              <a:latin typeface="Calibri"/>
+              <a:ea typeface="Calibri"/>
+              <a:cs typeface="Calibri"/>
+              <a:sym typeface="Calibri"/>
+            </a:endParaRPr>
+          </a:p>
+        </p:txBody>
+      </p:sp>
+      <p:sp>
+        <p:nvSpPr>
+          <p:cNvPr id="19" name="Google Shape;97;p13">
+            <a:extLst>
+              <a:ext uri="{FF2B5EF4-FFF2-40B4-BE49-F238E27FC236}">
+                <a16:creationId xmlns:a16="http://schemas.microsoft.com/office/drawing/2014/main" id="{F786C5A6-D23D-039C-51D6-DD56E2B9A7AF}"/>
+              </a:ext>
+            </a:extLst>
+          </p:cNvPr>
+          <p:cNvSpPr/>
+          <p:nvPr/>
+        </p:nvSpPr>
+        <p:spPr>
+          <a:xfrm>
+            <a:off x="5092700" y="5646115"/>
+            <a:ext cx="3048000" cy="19050"/>
+          </a:xfrm>
+          <a:prstGeom prst="rect">
+            <a:avLst/>
+          </a:prstGeom>
+          <a:solidFill>
+            <a:srgbClr val="0F172A"/>
+          </a:solidFill>
+          <a:ln>
+            <a:noFill/>
+          </a:ln>
+        </p:spPr>
+        <p:txBody>
+          <a:bodyPr spcFirstLastPara="1" wrap="square" lIns="91425" tIns="45700" rIns="91425" bIns="45700" anchor="ctr" anchorCtr="0">
+            <a:noAutofit/>
+          </a:bodyPr>
+          <a:lstStyle/>
+          <a:p>
+            <a:pPr marL="0" marR="0" lvl="0" indent="0" algn="ctr" rtl="0">
+              <a:spcBef>
+                <a:spcPts val="0"/>
+              </a:spcBef>
+              <a:spcAft>
+                <a:spcPts val="0"/>
+              </a:spcAft>
+              <a:buNone/>
+            </a:pPr>
+            <a:endParaRPr sz="1800" b="0" i="0" u="none" strike="noStrike" cap="none">
+              <a:solidFill>
+                <a:schemeClr val="dk1"/>
+              </a:solidFill>
+              <a:latin typeface="Calibri"/>
+              <a:ea typeface="Calibri"/>
+              <a:cs typeface="Calibri"/>
+              <a:sym typeface="Calibri"/>
+            </a:endParaRPr>
+          </a:p>
+        </p:txBody>
+      </p:sp>
+      <p:sp>
+        <p:nvSpPr>
+          <p:cNvPr id="21" name="Google Shape;95;p13">
+            <a:extLst>
+              <a:ext uri="{FF2B5EF4-FFF2-40B4-BE49-F238E27FC236}">
+                <a16:creationId xmlns:a16="http://schemas.microsoft.com/office/drawing/2014/main" id="{23DA95D5-8C35-4299-722A-28CECE96D5E2}"/>
+              </a:ext>
+            </a:extLst>
+          </p:cNvPr>
+          <p:cNvSpPr/>
+          <p:nvPr/>
+        </p:nvSpPr>
+        <p:spPr>
+          <a:xfrm>
+            <a:off x="520700" y="4236415"/>
+            <a:ext cx="1371600" cy="19050"/>
+          </a:xfrm>
+          <a:prstGeom prst="rect">
+            <a:avLst/>
+          </a:prstGeom>
+          <a:solidFill>
+            <a:srgbClr val="0F172A"/>
+          </a:solidFill>
+          <a:ln>
+            <a:noFill/>
+          </a:ln>
+        </p:spPr>
+        <p:txBody>
+          <a:bodyPr spcFirstLastPara="1" wrap="square" lIns="91425" tIns="45700" rIns="91425" bIns="45700" anchor="ctr" anchorCtr="0">
+            <a:noAutofit/>
+          </a:bodyPr>
+          <a:lstStyle/>
+          <a:p>
+            <a:pPr marL="0" marR="0" lvl="0" indent="0" algn="ctr" rtl="0">
+              <a:spcBef>
+                <a:spcPts val="0"/>
+              </a:spcBef>
+              <a:spcAft>
+                <a:spcPts val="0"/>
+              </a:spcAft>
+              <a:buNone/>
+            </a:pPr>
+            <a:endParaRPr sz="1800" b="0" i="0" u="none" strike="noStrike" cap="none">
+              <a:solidFill>
+                <a:schemeClr val="dk1"/>
+              </a:solidFill>
+              <a:latin typeface="Calibri"/>
+              <a:ea typeface="Calibri"/>
+              <a:cs typeface="Calibri"/>
+              <a:sym typeface="Calibri"/>
+            </a:endParaRPr>
+          </a:p>
+        </p:txBody>
+      </p:sp>
+      <p:sp>
+        <p:nvSpPr>
+          <p:cNvPr id="23" name="Google Shape;96;p13">
+            <a:extLst>
+              <a:ext uri="{FF2B5EF4-FFF2-40B4-BE49-F238E27FC236}">
+                <a16:creationId xmlns:a16="http://schemas.microsoft.com/office/drawing/2014/main" id="{CDDA6846-2874-0E13-AD16-750D44B96960}"/>
+              </a:ext>
+            </a:extLst>
+          </p:cNvPr>
+          <p:cNvSpPr/>
+          <p:nvPr/>
+        </p:nvSpPr>
+        <p:spPr>
+          <a:xfrm>
+            <a:off x="1892300" y="4236415"/>
+            <a:ext cx="3200400" cy="19050"/>
+          </a:xfrm>
+          <a:prstGeom prst="rect">
+            <a:avLst/>
+          </a:prstGeom>
+          <a:solidFill>
+            <a:srgbClr val="0F172A"/>
+          </a:solidFill>
+          <a:ln>
+            <a:noFill/>
+          </a:ln>
+        </p:spPr>
+        <p:txBody>
+          <a:bodyPr spcFirstLastPara="1" wrap="square" lIns="91425" tIns="45700" rIns="91425" bIns="45700" anchor="ctr" anchorCtr="0">
+            <a:noAutofit/>
+          </a:bodyPr>
+          <a:lstStyle/>
+          <a:p>
+            <a:pPr marL="0" marR="0" lvl="0" indent="0" algn="ctr" rtl="0">
+              <a:spcBef>
+                <a:spcPts val="0"/>
+              </a:spcBef>
+              <a:spcAft>
+                <a:spcPts val="0"/>
+              </a:spcAft>
+              <a:buNone/>
+            </a:pPr>
+            <a:endParaRPr sz="1800" b="0" i="0" u="none" strike="noStrike" cap="none">
+              <a:solidFill>
+                <a:schemeClr val="dk1"/>
+              </a:solidFill>
+              <a:latin typeface="Calibri"/>
+              <a:ea typeface="Calibri"/>
+              <a:cs typeface="Calibri"/>
+              <a:sym typeface="Calibri"/>
+            </a:endParaRPr>
+          </a:p>
+        </p:txBody>
+      </p:sp>
+      <p:sp>
+        <p:nvSpPr>
+          <p:cNvPr id="25" name="Google Shape;97;p13">
+            <a:extLst>
+              <a:ext uri="{FF2B5EF4-FFF2-40B4-BE49-F238E27FC236}">
+                <a16:creationId xmlns:a16="http://schemas.microsoft.com/office/drawing/2014/main" id="{173D1A86-2F29-CAB6-1F81-4A32CBB375C3}"/>
+              </a:ext>
+            </a:extLst>
+          </p:cNvPr>
+          <p:cNvSpPr/>
+          <p:nvPr/>
+        </p:nvSpPr>
+        <p:spPr>
+          <a:xfrm>
+            <a:off x="5092700" y="4236415"/>
+            <a:ext cx="3048000" cy="19050"/>
+          </a:xfrm>
+          <a:prstGeom prst="rect">
+            <a:avLst/>
+          </a:prstGeom>
+          <a:solidFill>
+            <a:srgbClr val="0F172A"/>
+          </a:solidFill>
+          <a:ln>
+            <a:noFill/>
+          </a:ln>
+        </p:spPr>
+        <p:txBody>
+          <a:bodyPr spcFirstLastPara="1" wrap="square" lIns="91425" tIns="45700" rIns="91425" bIns="45700" anchor="ctr" anchorCtr="0">
+            <a:noAutofit/>
+          </a:bodyPr>
+          <a:lstStyle/>
+          <a:p>
+            <a:pPr marL="0" marR="0" lvl="0" indent="0" algn="ctr" rtl="0">
+              <a:spcBef>
+                <a:spcPts val="0"/>
+              </a:spcBef>
+              <a:spcAft>
+                <a:spcPts val="0"/>
+              </a:spcAft>
+              <a:buNone/>
+            </a:pPr>
+            <a:endParaRPr sz="1800" b="0" i="0" u="none" strike="noStrike" cap="none">
+              <a:solidFill>
+                <a:schemeClr val="dk1"/>
+              </a:solidFill>
+              <a:latin typeface="Calibri"/>
+              <a:ea typeface="Calibri"/>
+              <a:cs typeface="Calibri"/>
+              <a:sym typeface="Calibri"/>
+            </a:endParaRPr>
+          </a:p>
+        </p:txBody>
+      </p:sp>
+      <p:sp>
+        <p:nvSpPr>
+          <p:cNvPr id="27" name="Google Shape;282;p26">
+            <a:extLst>
+              <a:ext uri="{FF2B5EF4-FFF2-40B4-BE49-F238E27FC236}">
+                <a16:creationId xmlns:a16="http://schemas.microsoft.com/office/drawing/2014/main" id="{C41C0CBB-28C3-A880-A725-3EFDEFDBCC77}"/>
+              </a:ext>
+            </a:extLst>
+          </p:cNvPr>
+          <p:cNvSpPr/>
+          <p:nvPr/>
+        </p:nvSpPr>
+        <p:spPr>
+          <a:xfrm>
+            <a:off x="581025" y="581025"/>
+            <a:ext cx="57150" cy="485775"/>
+          </a:xfrm>
+          <a:prstGeom prst="rect">
+            <a:avLst/>
+          </a:prstGeom>
+          <a:solidFill>
+            <a:srgbClr val="F05032"/>
+          </a:solidFill>
+          <a:ln>
+            <a:noFill/>
+          </a:ln>
+        </p:spPr>
+        <p:txBody>
+          <a:bodyPr spcFirstLastPara="1" wrap="square" lIns="91425" tIns="45700" rIns="91425" bIns="45700" anchor="ctr" anchorCtr="0">
+            <a:noAutofit/>
+          </a:bodyPr>
+          <a:lstStyle/>
+          <a:p>
+            <a:pPr marL="0" marR="0" lvl="0" indent="0" algn="ctr" rtl="0">
+              <a:spcBef>
+                <a:spcPts val="0"/>
+              </a:spcBef>
+              <a:spcAft>
+                <a:spcPts val="0"/>
+              </a:spcAft>
+              <a:buNone/>
+            </a:pPr>
+            <a:endParaRPr sz="1800" b="0" i="0" u="none" strike="noStrike" cap="none">
+              <a:solidFill>
+                <a:schemeClr val="dk1"/>
+              </a:solidFill>
+              <a:latin typeface="Calibri"/>
+              <a:ea typeface="Calibri"/>
+              <a:cs typeface="Calibri"/>
+              <a:sym typeface="Calibri"/>
+            </a:endParaRPr>
+          </a:p>
+        </p:txBody>
+      </p:sp>
+    </p:spTree>
+  </p:cSld>
+  <p:clrMapOvr>
+    <a:masterClrMapping/>
+  </p:clrMapOvr>
+</p:sld>
+</file>
+
+<file path=ppt/slides/slide17.xml><?xml version="1.0" encoding="utf-8"?>
 <p:sld xmlns:a="http://schemas.openxmlformats.org/drawingml/2006/main" xmlns:r="http://schemas.openxmlformats.org/officeDocument/2006/relationships" xmlns:p="http://schemas.openxmlformats.org/presentationml/2006/main">
   <p:cSld>
     <p:bg>
@@ -17948,13 +21785,13 @@
   <p:clrMapOvr>
     <a:masterClrMapping/>
   </p:clrMapOvr>
-  <mc:AlternateContent xmlns:mc="http://schemas.openxmlformats.org/markup-compatibility/2006">
-    <mc:Choice xmlns:p159="http://schemas.microsoft.com/office/powerpoint/2015/09/main" Requires="p159">
+  <mc:AlternateContent xmlns:mc="http://schemas.openxmlformats.org/markup-compatibility/2006" xmlns:p159="http://schemas.microsoft.com/office/powerpoint/2015/09/main">
+    <mc:Choice Requires="p159">
       <p:transition xmlns:p14="http://schemas.microsoft.com/office/powerpoint/2010/main" spd="slow" p14:dur="2000">
         <p159:morph option="byObject"/>
       </p:transition>
     </mc:Choice>
-    <mc:Fallback>
+    <mc:Fallback xmlns="">
       <p:transition spd="slow">
         <p:fade/>
       </p:transition>
@@ -17963,755 +21800,7 @@
 </p:sld>
 </file>
 
-<file path=ppt/slides/slide16.xml><?xml version="1.0" encoding="utf-8"?>
-<p:sld xmlns:a="http://schemas.openxmlformats.org/drawingml/2006/main" xmlns:r="http://schemas.openxmlformats.org/officeDocument/2006/relationships" xmlns:p="http://schemas.openxmlformats.org/presentationml/2006/main">
-  <p:cSld>
-    <p:bg>
-      <p:bgPr>
-        <a:solidFill>
-          <a:srgbClr val="161B22"/>
-        </a:solidFill>
-        <a:effectLst/>
-      </p:bgPr>
-    </p:bg>
-    <p:spTree>
-      <p:nvGrpSpPr>
-        <p:cNvPr id="1" name="Shape 303"/>
-        <p:cNvGrpSpPr/>
-        <p:nvPr/>
-      </p:nvGrpSpPr>
-      <p:grpSpPr>
-        <a:xfrm>
-          <a:off x="0" y="0"/>
-          <a:ext cx="0" cy="0"/>
-          <a:chOff x="0" y="0"/>
-          <a:chExt cx="0" cy="0"/>
-        </a:xfrm>
-      </p:grpSpPr>
-      <p:pic>
-        <p:nvPicPr>
-          <p:cNvPr id="304" name="Google Shape;304;p28" descr="image.png"/>
-          <p:cNvPicPr preferRelativeResize="0"/>
-          <p:nvPr/>
-        </p:nvPicPr>
-        <p:blipFill rotWithShape="1">
-          <a:blip r:embed="rId3">
-            <a:alphaModFix/>
-          </a:blip>
-          <a:srcRect/>
-          <a:stretch/>
-        </p:blipFill>
-        <p:spPr>
-          <a:xfrm>
-            <a:off x="0" y="0"/>
-            <a:ext cx="12192000" cy="6858000"/>
-          </a:xfrm>
-          <a:prstGeom prst="rect">
-            <a:avLst/>
-          </a:prstGeom>
-          <a:noFill/>
-          <a:ln>
-            <a:noFill/>
-          </a:ln>
-        </p:spPr>
-      </p:pic>
-      <p:pic>
-        <p:nvPicPr>
-          <p:cNvPr id="305" name="Google Shape;305;p28" descr="image.png"/>
-          <p:cNvPicPr preferRelativeResize="0"/>
-          <p:nvPr/>
-        </p:nvPicPr>
-        <p:blipFill rotWithShape="1">
-          <a:blip r:embed="rId4">
-            <a:alphaModFix/>
-          </a:blip>
-          <a:srcRect/>
-          <a:stretch/>
-        </p:blipFill>
-        <p:spPr>
-          <a:xfrm>
-            <a:off x="581025" y="2324100"/>
-            <a:ext cx="5229225" cy="3076575"/>
-          </a:xfrm>
-          <a:prstGeom prst="rect">
-            <a:avLst/>
-          </a:prstGeom>
-          <a:noFill/>
-          <a:ln>
-            <a:noFill/>
-          </a:ln>
-        </p:spPr>
-      </p:pic>
-      <p:pic>
-        <p:nvPicPr>
-          <p:cNvPr id="306" name="Google Shape;306;p28" descr="image.png"/>
-          <p:cNvPicPr preferRelativeResize="0"/>
-          <p:nvPr/>
-        </p:nvPicPr>
-        <p:blipFill rotWithShape="1">
-          <a:blip r:embed="rId5">
-            <a:alphaModFix/>
-          </a:blip>
-          <a:srcRect/>
-          <a:stretch/>
-        </p:blipFill>
-        <p:spPr>
-          <a:xfrm>
-            <a:off x="6381750" y="2324100"/>
-            <a:ext cx="5229225" cy="3076575"/>
-          </a:xfrm>
-          <a:prstGeom prst="rect">
-            <a:avLst/>
-          </a:prstGeom>
-          <a:noFill/>
-          <a:ln>
-            <a:noFill/>
-          </a:ln>
-        </p:spPr>
-      </p:pic>
-      <p:sp>
-        <p:nvSpPr>
-          <p:cNvPr id="307" name="Google Shape;307;p28"/>
-          <p:cNvSpPr txBox="1"/>
-          <p:nvPr/>
-        </p:nvSpPr>
-        <p:spPr>
-          <a:xfrm>
-            <a:off x="971550" y="2714625"/>
-            <a:ext cx="4670583" cy="430887"/>
-          </a:xfrm>
-          <a:prstGeom prst="rect">
-            <a:avLst/>
-          </a:prstGeom>
-          <a:noFill/>
-          <a:ln>
-            <a:noFill/>
-          </a:ln>
-        </p:spPr>
-        <p:txBody>
-          <a:bodyPr spcFirstLastPara="1" wrap="square" lIns="0" tIns="0" rIns="0" bIns="0" anchor="t" anchorCtr="0">
-            <a:spAutoFit/>
-          </a:bodyPr>
-          <a:lstStyle/>
-          <a:p>
-            <a:pPr marL="0" marR="0" lvl="0" indent="0" algn="l" rtl="0">
-              <a:spcBef>
-                <a:spcPts val="0"/>
-              </a:spcBef>
-              <a:spcAft>
-                <a:spcPts val="0"/>
-              </a:spcAft>
-              <a:buNone/>
-            </a:pPr>
-            <a:r>
-              <a:rPr lang="en-US" sz="2800" b="1" i="0" u="none" strike="noStrike" cap="none" dirty="0">
-                <a:solidFill>
-                  <a:srgbClr val="238636"/>
-                </a:solidFill>
-                <a:latin typeface="Urbanist"/>
-                <a:ea typeface="Urbanist"/>
-                <a:cs typeface="Urbanist"/>
-                <a:sym typeface="Urbanist"/>
-              </a:rPr>
-              <a:t>Creating a Repository</a:t>
-            </a:r>
-            <a:endParaRPr sz="1600" dirty="0"/>
-          </a:p>
-        </p:txBody>
-      </p:sp>
-      <p:sp>
-        <p:nvSpPr>
-          <p:cNvPr id="308" name="Google Shape;308;p28"/>
-          <p:cNvSpPr txBox="1"/>
-          <p:nvPr/>
-        </p:nvSpPr>
-        <p:spPr>
-          <a:xfrm>
-            <a:off x="971550" y="3219450"/>
-            <a:ext cx="4448175" cy="393954"/>
-          </a:xfrm>
-          <a:prstGeom prst="rect">
-            <a:avLst/>
-          </a:prstGeom>
-          <a:noFill/>
-          <a:ln>
-            <a:noFill/>
-          </a:ln>
-        </p:spPr>
-        <p:txBody>
-          <a:bodyPr spcFirstLastPara="1" wrap="square" lIns="0" tIns="0" rIns="0" bIns="0" anchor="t" anchorCtr="0">
-            <a:spAutoFit/>
-          </a:bodyPr>
-          <a:lstStyle/>
-          <a:p>
-            <a:pPr marL="0" marR="0" lvl="0" indent="0" algn="l" rtl="0">
-              <a:lnSpc>
-                <a:spcPct val="160000"/>
-              </a:lnSpc>
-              <a:spcBef>
-                <a:spcPts val="0"/>
-              </a:spcBef>
-              <a:spcAft>
-                <a:spcPts val="0"/>
-              </a:spcAft>
-              <a:buNone/>
-            </a:pPr>
-            <a:r>
-              <a:rPr lang="en-US" sz="1600" b="0" i="0" u="none" strike="noStrike" cap="none">
-                <a:solidFill>
-                  <a:srgbClr val="8B949E"/>
-                </a:solidFill>
-                <a:latin typeface="Urbanist"/>
-                <a:ea typeface="Urbanist"/>
-                <a:cs typeface="Urbanist"/>
-                <a:sym typeface="Urbanist"/>
-              </a:rPr>
-              <a:t>1. Go to GitHub.com &amp; click "New".</a:t>
-            </a:r>
-            <a:endParaRPr sz="1600"/>
-          </a:p>
-        </p:txBody>
-      </p:sp>
-      <p:sp>
-        <p:nvSpPr>
-          <p:cNvPr id="309" name="Google Shape;309;p28"/>
-          <p:cNvSpPr txBox="1"/>
-          <p:nvPr/>
-        </p:nvSpPr>
-        <p:spPr>
-          <a:xfrm>
-            <a:off x="971550" y="3667125"/>
-            <a:ext cx="4448175" cy="393954"/>
-          </a:xfrm>
-          <a:prstGeom prst="rect">
-            <a:avLst/>
-          </a:prstGeom>
-          <a:noFill/>
-          <a:ln>
-            <a:noFill/>
-          </a:ln>
-        </p:spPr>
-        <p:txBody>
-          <a:bodyPr spcFirstLastPara="1" wrap="square" lIns="0" tIns="0" rIns="0" bIns="0" anchor="t" anchorCtr="0">
-            <a:spAutoFit/>
-          </a:bodyPr>
-          <a:lstStyle/>
-          <a:p>
-            <a:pPr marL="0" marR="0" lvl="0" indent="0" algn="l" rtl="0">
-              <a:lnSpc>
-                <a:spcPct val="160000"/>
-              </a:lnSpc>
-              <a:spcBef>
-                <a:spcPts val="0"/>
-              </a:spcBef>
-              <a:spcAft>
-                <a:spcPts val="0"/>
-              </a:spcAft>
-              <a:buNone/>
-            </a:pPr>
-            <a:r>
-              <a:rPr lang="en-US" sz="1600" b="0" i="0" u="none" strike="noStrike" cap="none">
-                <a:solidFill>
-                  <a:srgbClr val="8B949E"/>
-                </a:solidFill>
-                <a:latin typeface="Urbanist"/>
-                <a:ea typeface="Urbanist"/>
-                <a:cs typeface="Urbanist"/>
-                <a:sym typeface="Urbanist"/>
-              </a:rPr>
-              <a:t>2. Give it a name and description.</a:t>
-            </a:r>
-            <a:endParaRPr sz="1600"/>
-          </a:p>
-        </p:txBody>
-      </p:sp>
-      <p:sp>
-        <p:nvSpPr>
-          <p:cNvPr id="310" name="Google Shape;310;p28"/>
-          <p:cNvSpPr txBox="1"/>
-          <p:nvPr/>
-        </p:nvSpPr>
-        <p:spPr>
-          <a:xfrm>
-            <a:off x="971550" y="4114800"/>
-            <a:ext cx="4448175" cy="393954"/>
-          </a:xfrm>
-          <a:prstGeom prst="rect">
-            <a:avLst/>
-          </a:prstGeom>
-          <a:noFill/>
-          <a:ln>
-            <a:noFill/>
-          </a:ln>
-        </p:spPr>
-        <p:txBody>
-          <a:bodyPr spcFirstLastPara="1" wrap="square" lIns="0" tIns="0" rIns="0" bIns="0" anchor="t" anchorCtr="0">
-            <a:spAutoFit/>
-          </a:bodyPr>
-          <a:lstStyle/>
-          <a:p>
-            <a:pPr marL="0" marR="0" lvl="0" indent="0" algn="l" rtl="0">
-              <a:lnSpc>
-                <a:spcPct val="160000"/>
-              </a:lnSpc>
-              <a:spcBef>
-                <a:spcPts val="0"/>
-              </a:spcBef>
-              <a:spcAft>
-                <a:spcPts val="0"/>
-              </a:spcAft>
-              <a:buNone/>
-            </a:pPr>
-            <a:r>
-              <a:rPr lang="en-US" sz="1600" b="0" i="0" u="none" strike="noStrike" cap="none">
-                <a:solidFill>
-                  <a:srgbClr val="8B949E"/>
-                </a:solidFill>
-                <a:latin typeface="Urbanist"/>
-                <a:ea typeface="Urbanist"/>
-                <a:cs typeface="Urbanist"/>
-                <a:sym typeface="Urbanist"/>
-              </a:rPr>
-              <a:t>3. Choose Public or Private.</a:t>
-            </a:r>
-            <a:endParaRPr sz="1600"/>
-          </a:p>
-        </p:txBody>
-      </p:sp>
-      <p:sp>
-        <p:nvSpPr>
-          <p:cNvPr id="311" name="Google Shape;311;p28"/>
-          <p:cNvSpPr txBox="1"/>
-          <p:nvPr/>
-        </p:nvSpPr>
-        <p:spPr>
-          <a:xfrm>
-            <a:off x="971550" y="4562475"/>
-            <a:ext cx="4448175" cy="393954"/>
-          </a:xfrm>
-          <a:prstGeom prst="rect">
-            <a:avLst/>
-          </a:prstGeom>
-          <a:noFill/>
-          <a:ln>
-            <a:noFill/>
-          </a:ln>
-        </p:spPr>
-        <p:txBody>
-          <a:bodyPr spcFirstLastPara="1" wrap="square" lIns="0" tIns="0" rIns="0" bIns="0" anchor="t" anchorCtr="0">
-            <a:spAutoFit/>
-          </a:bodyPr>
-          <a:lstStyle/>
-          <a:p>
-            <a:pPr marL="0" marR="0" lvl="0" indent="0" algn="l" rtl="0">
-              <a:lnSpc>
-                <a:spcPct val="160000"/>
-              </a:lnSpc>
-              <a:spcBef>
-                <a:spcPts val="0"/>
-              </a:spcBef>
-              <a:spcAft>
-                <a:spcPts val="0"/>
-              </a:spcAft>
-              <a:buNone/>
-            </a:pPr>
-            <a:r>
-              <a:rPr lang="en-US" sz="1600" b="0" i="0" u="none" strike="noStrike" cap="none">
-                <a:solidFill>
-                  <a:srgbClr val="8B949E"/>
-                </a:solidFill>
-                <a:latin typeface="Urbanist"/>
-                <a:ea typeface="Urbanist"/>
-                <a:cs typeface="Urbanist"/>
-                <a:sym typeface="Urbanist"/>
-              </a:rPr>
-              <a:t>4. Clone it locally using git clone [URL].</a:t>
-            </a:r>
-            <a:endParaRPr sz="1600"/>
-          </a:p>
-        </p:txBody>
-      </p:sp>
-      <p:sp>
-        <p:nvSpPr>
-          <p:cNvPr id="312" name="Google Shape;312;p28"/>
-          <p:cNvSpPr txBox="1"/>
-          <p:nvPr/>
-        </p:nvSpPr>
-        <p:spPr>
-          <a:xfrm>
-            <a:off x="6772275" y="2714625"/>
-            <a:ext cx="4670583" cy="430887"/>
-          </a:xfrm>
-          <a:prstGeom prst="rect">
-            <a:avLst/>
-          </a:prstGeom>
-          <a:noFill/>
-          <a:ln>
-            <a:noFill/>
-          </a:ln>
-        </p:spPr>
-        <p:txBody>
-          <a:bodyPr spcFirstLastPara="1" wrap="square" lIns="0" tIns="0" rIns="0" bIns="0" anchor="t" anchorCtr="0">
-            <a:spAutoFit/>
-          </a:bodyPr>
-          <a:lstStyle/>
-          <a:p>
-            <a:pPr marL="0" marR="0" lvl="0" indent="0" algn="l" rtl="0">
-              <a:spcBef>
-                <a:spcPts val="0"/>
-              </a:spcBef>
-              <a:spcAft>
-                <a:spcPts val="0"/>
-              </a:spcAft>
-              <a:buNone/>
-            </a:pPr>
-            <a:r>
-              <a:rPr lang="en-US" sz="2800" b="1" i="0" u="none" strike="noStrike" cap="none">
-                <a:solidFill>
-                  <a:srgbClr val="238636"/>
-                </a:solidFill>
-                <a:latin typeface="Urbanist"/>
-                <a:ea typeface="Urbanist"/>
-                <a:cs typeface="Urbanist"/>
-                <a:sym typeface="Urbanist"/>
-              </a:rPr>
-              <a:t>Creating a Branch</a:t>
-            </a:r>
-            <a:endParaRPr sz="1600"/>
-          </a:p>
-        </p:txBody>
-      </p:sp>
-      <p:sp>
-        <p:nvSpPr>
-          <p:cNvPr id="313" name="Google Shape;313;p28"/>
-          <p:cNvSpPr txBox="1"/>
-          <p:nvPr/>
-        </p:nvSpPr>
-        <p:spPr>
-          <a:xfrm>
-            <a:off x="6772275" y="3219450"/>
-            <a:ext cx="4448175" cy="393954"/>
-          </a:xfrm>
-          <a:prstGeom prst="rect">
-            <a:avLst/>
-          </a:prstGeom>
-          <a:noFill/>
-          <a:ln>
-            <a:noFill/>
-          </a:ln>
-        </p:spPr>
-        <p:txBody>
-          <a:bodyPr spcFirstLastPara="1" wrap="square" lIns="0" tIns="0" rIns="0" bIns="0" anchor="t" anchorCtr="0">
-            <a:spAutoFit/>
-          </a:bodyPr>
-          <a:lstStyle/>
-          <a:p>
-            <a:pPr marL="0" marR="0" lvl="0" indent="0" algn="l" rtl="0">
-              <a:lnSpc>
-                <a:spcPct val="160000"/>
-              </a:lnSpc>
-              <a:spcBef>
-                <a:spcPts val="0"/>
-              </a:spcBef>
-              <a:spcAft>
-                <a:spcPts val="0"/>
-              </a:spcAft>
-              <a:buNone/>
-            </a:pPr>
-            <a:r>
-              <a:rPr lang="en-US" sz="1600" b="0" i="0" u="none" strike="noStrike" cap="none">
-                <a:solidFill>
-                  <a:srgbClr val="8B949E"/>
-                </a:solidFill>
-                <a:latin typeface="Urbanist"/>
-                <a:ea typeface="Urbanist"/>
-                <a:cs typeface="Urbanist"/>
-                <a:sym typeface="Urbanist"/>
-              </a:rPr>
-              <a:t>1. Use git checkout -b feature-name.</a:t>
-            </a:r>
-            <a:endParaRPr sz="1600"/>
-          </a:p>
-        </p:txBody>
-      </p:sp>
-      <p:sp>
-        <p:nvSpPr>
-          <p:cNvPr id="314" name="Google Shape;314;p28"/>
-          <p:cNvSpPr txBox="1"/>
-          <p:nvPr/>
-        </p:nvSpPr>
-        <p:spPr>
-          <a:xfrm>
-            <a:off x="6772275" y="3667125"/>
-            <a:ext cx="4448175" cy="787908"/>
-          </a:xfrm>
-          <a:prstGeom prst="rect">
-            <a:avLst/>
-          </a:prstGeom>
-          <a:noFill/>
-          <a:ln>
-            <a:noFill/>
-          </a:ln>
-        </p:spPr>
-        <p:txBody>
-          <a:bodyPr spcFirstLastPara="1" wrap="square" lIns="0" tIns="0" rIns="0" bIns="0" anchor="t" anchorCtr="0">
-            <a:spAutoFit/>
-          </a:bodyPr>
-          <a:lstStyle/>
-          <a:p>
-            <a:pPr marL="0" marR="0" lvl="0" indent="0" algn="l" rtl="0">
-              <a:lnSpc>
-                <a:spcPct val="160000"/>
-              </a:lnSpc>
-              <a:spcBef>
-                <a:spcPts val="0"/>
-              </a:spcBef>
-              <a:spcAft>
-                <a:spcPts val="0"/>
-              </a:spcAft>
-              <a:buNone/>
-            </a:pPr>
-            <a:r>
-              <a:rPr lang="en-US" sz="1600" b="0" i="0" u="none" strike="noStrike" cap="none">
-                <a:solidFill>
-                  <a:srgbClr val="8B949E"/>
-                </a:solidFill>
-                <a:latin typeface="Urbanist"/>
-                <a:ea typeface="Urbanist"/>
-                <a:cs typeface="Urbanist"/>
-                <a:sym typeface="Urbanist"/>
-              </a:rPr>
-              <a:t>2. This creates a separate timeline for your changes.</a:t>
-            </a:r>
-            <a:endParaRPr sz="1600"/>
-          </a:p>
-        </p:txBody>
-      </p:sp>
-      <p:sp>
-        <p:nvSpPr>
-          <p:cNvPr id="315" name="Google Shape;315;p28"/>
-          <p:cNvSpPr txBox="1"/>
-          <p:nvPr/>
-        </p:nvSpPr>
-        <p:spPr>
-          <a:xfrm>
-            <a:off x="6772275" y="4114800"/>
-            <a:ext cx="4448175" cy="393954"/>
-          </a:xfrm>
-          <a:prstGeom prst="rect">
-            <a:avLst/>
-          </a:prstGeom>
-          <a:noFill/>
-          <a:ln>
-            <a:noFill/>
-          </a:ln>
-        </p:spPr>
-        <p:txBody>
-          <a:bodyPr spcFirstLastPara="1" wrap="square" lIns="0" tIns="0" rIns="0" bIns="0" anchor="t" anchorCtr="0">
-            <a:spAutoFit/>
-          </a:bodyPr>
-          <a:lstStyle/>
-          <a:p>
-            <a:pPr marL="0" marR="0" lvl="0" indent="0" algn="l" rtl="0">
-              <a:lnSpc>
-                <a:spcPct val="160000"/>
-              </a:lnSpc>
-              <a:spcBef>
-                <a:spcPts val="0"/>
-              </a:spcBef>
-              <a:spcAft>
-                <a:spcPts val="0"/>
-              </a:spcAft>
-              <a:buNone/>
-            </a:pPr>
-            <a:r>
-              <a:rPr lang="en-US" sz="1600" b="0" i="0" u="none" strike="noStrike" cap="none">
-                <a:solidFill>
-                  <a:srgbClr val="8B949E"/>
-                </a:solidFill>
-                <a:latin typeface="Urbanist"/>
-                <a:ea typeface="Urbanist"/>
-                <a:cs typeface="Urbanist"/>
-                <a:sym typeface="Urbanist"/>
-              </a:rPr>
-              <a:t>3. Commits here don't affect the 'main' branch.</a:t>
-            </a:r>
-            <a:endParaRPr sz="1600"/>
-          </a:p>
-        </p:txBody>
-      </p:sp>
-      <p:sp>
-        <p:nvSpPr>
-          <p:cNvPr id="316" name="Google Shape;316;p28"/>
-          <p:cNvSpPr txBox="1"/>
-          <p:nvPr/>
-        </p:nvSpPr>
-        <p:spPr>
-          <a:xfrm>
-            <a:off x="6772275" y="4562475"/>
-            <a:ext cx="4448175" cy="393954"/>
-          </a:xfrm>
-          <a:prstGeom prst="rect">
-            <a:avLst/>
-          </a:prstGeom>
-          <a:noFill/>
-          <a:ln>
-            <a:noFill/>
-          </a:ln>
-        </p:spPr>
-        <p:txBody>
-          <a:bodyPr spcFirstLastPara="1" wrap="square" lIns="0" tIns="0" rIns="0" bIns="0" anchor="t" anchorCtr="0">
-            <a:spAutoFit/>
-          </a:bodyPr>
-          <a:lstStyle/>
-          <a:p>
-            <a:pPr marL="0" marR="0" lvl="0" indent="0" algn="l" rtl="0">
-              <a:lnSpc>
-                <a:spcPct val="160000"/>
-              </a:lnSpc>
-              <a:spcBef>
-                <a:spcPts val="0"/>
-              </a:spcBef>
-              <a:spcAft>
-                <a:spcPts val="0"/>
-              </a:spcAft>
-              <a:buNone/>
-            </a:pPr>
-            <a:r>
-              <a:rPr lang="en-US" sz="1600" b="0" i="0" u="none" strike="noStrike" cap="none">
-                <a:solidFill>
-                  <a:srgbClr val="8B949E"/>
-                </a:solidFill>
-                <a:latin typeface="Urbanist"/>
-                <a:ea typeface="Urbanist"/>
-                <a:cs typeface="Urbanist"/>
-                <a:sym typeface="Urbanist"/>
-              </a:rPr>
-              <a:t>4. Merge back when your feature is done!</a:t>
-            </a:r>
-            <a:endParaRPr sz="1600"/>
-          </a:p>
-        </p:txBody>
-      </p:sp>
-      <p:sp>
-        <p:nvSpPr>
-          <p:cNvPr id="317" name="Google Shape;317;p28"/>
-          <p:cNvSpPr txBox="1"/>
-          <p:nvPr/>
-        </p:nvSpPr>
-        <p:spPr>
-          <a:xfrm>
-            <a:off x="771525" y="581025"/>
-            <a:ext cx="11381422" cy="492443"/>
-          </a:xfrm>
-          <a:prstGeom prst="rect">
-            <a:avLst/>
-          </a:prstGeom>
-          <a:noFill/>
-          <a:ln>
-            <a:noFill/>
-          </a:ln>
-        </p:spPr>
-        <p:txBody>
-          <a:bodyPr spcFirstLastPara="1" wrap="square" lIns="0" tIns="0" rIns="0" bIns="0" anchor="t" anchorCtr="0">
-            <a:spAutoFit/>
-          </a:bodyPr>
-          <a:lstStyle/>
-          <a:p>
-            <a:pPr marL="0" marR="0" lvl="0" indent="0" algn="l" rtl="0">
-              <a:spcBef>
-                <a:spcPts val="0"/>
-              </a:spcBef>
-              <a:spcAft>
-                <a:spcPts val="0"/>
-              </a:spcAft>
-              <a:buNone/>
-            </a:pPr>
-            <a:r>
-              <a:rPr lang="en-US" sz="3200" b="1" i="0" u="none" strike="noStrike" cap="none">
-                <a:solidFill>
-                  <a:srgbClr val="F0F6FC"/>
-                </a:solidFill>
-                <a:latin typeface="Urbanist"/>
-                <a:ea typeface="Urbanist"/>
-                <a:cs typeface="Urbanist"/>
-                <a:sym typeface="Urbanist"/>
-              </a:rPr>
-              <a:t>Your First Repository</a:t>
-            </a:r>
-            <a:endParaRPr sz="1600"/>
-          </a:p>
-        </p:txBody>
-      </p:sp>
-      <p:sp>
-        <p:nvSpPr>
-          <p:cNvPr id="318" name="Google Shape;318;p28"/>
-          <p:cNvSpPr/>
-          <p:nvPr/>
-        </p:nvSpPr>
-        <p:spPr>
-          <a:xfrm>
-            <a:off x="581025" y="581025"/>
-            <a:ext cx="57150" cy="485775"/>
-          </a:xfrm>
-          <a:prstGeom prst="rect">
-            <a:avLst/>
-          </a:prstGeom>
-          <a:solidFill>
-            <a:srgbClr val="F05032"/>
-          </a:solidFill>
-          <a:ln>
-            <a:noFill/>
-          </a:ln>
-        </p:spPr>
-        <p:txBody>
-          <a:bodyPr spcFirstLastPara="1" wrap="square" lIns="91425" tIns="45700" rIns="91425" bIns="45700" anchor="ctr" anchorCtr="0">
-            <a:noAutofit/>
-          </a:bodyPr>
-          <a:lstStyle/>
-          <a:p>
-            <a:pPr marL="0" marR="0" lvl="0" indent="0" algn="ctr" rtl="0">
-              <a:spcBef>
-                <a:spcPts val="0"/>
-              </a:spcBef>
-              <a:spcAft>
-                <a:spcPts val="0"/>
-              </a:spcAft>
-              <a:buNone/>
-            </a:pPr>
-            <a:endParaRPr sz="2000" b="0" i="0" u="none" strike="noStrike" cap="none">
-              <a:solidFill>
-                <a:schemeClr val="dk1"/>
-              </a:solidFill>
-              <a:latin typeface="Calibri"/>
-              <a:ea typeface="Calibri"/>
-              <a:cs typeface="Calibri"/>
-              <a:sym typeface="Calibri"/>
-            </a:endParaRPr>
-          </a:p>
-        </p:txBody>
-      </p:sp>
-    </p:spTree>
-  </p:cSld>
-  <p:clrMapOvr>
-    <a:masterClrMapping/>
-  </p:clrMapOvr>
-  <mc:AlternateContent xmlns:mc="http://schemas.openxmlformats.org/markup-compatibility/2006">
-    <mc:Choice xmlns:p159="http://schemas.microsoft.com/office/powerpoint/2015/09/main" Requires="p159">
-      <p:transition xmlns:p14="http://schemas.microsoft.com/office/powerpoint/2010/main" spd="slow" p14:dur="2000">
-        <p159:morph option="byObject"/>
-      </p:transition>
-    </mc:Choice>
-    <mc:Fallback>
-      <p:transition spd="slow">
-        <p:fade/>
-      </p:transition>
-    </mc:Fallback>
-  </mc:AlternateContent>
-</p:sld>
-</file>
-
-<file path=ppt/slides/slide17.xml><?xml version="1.0" encoding="utf-8"?>
+<file path=ppt/slides/slide18.xml><?xml version="1.0" encoding="utf-8"?>
 <p:sld xmlns:a="http://schemas.openxmlformats.org/drawingml/2006/main" xmlns:r="http://schemas.openxmlformats.org/officeDocument/2006/relationships" xmlns:p="http://schemas.openxmlformats.org/presentationml/2006/main">
   <p:cSld>
     <p:bg>
@@ -18874,13 +21963,13 @@
   <p:clrMapOvr>
     <a:masterClrMapping/>
   </p:clrMapOvr>
-  <mc:AlternateContent xmlns:mc="http://schemas.openxmlformats.org/markup-compatibility/2006">
-    <mc:Choice xmlns:p159="http://schemas.microsoft.com/office/powerpoint/2015/09/main" Requires="p159">
+  <mc:AlternateContent xmlns:mc="http://schemas.openxmlformats.org/markup-compatibility/2006" xmlns:p159="http://schemas.microsoft.com/office/powerpoint/2015/09/main">
+    <mc:Choice Requires="p159">
       <p:transition xmlns:p14="http://schemas.microsoft.com/office/powerpoint/2010/main" spd="slow" p14:dur="2000">
         <p159:morph option="byObject"/>
       </p:transition>
     </mc:Choice>
-    <mc:Fallback>
+    <mc:Fallback xmlns="">
       <p:transition spd="slow">
         <p:fade/>
       </p:transition>
@@ -19097,13 +22186,13 @@
   <p:clrMapOvr>
     <a:masterClrMapping/>
   </p:clrMapOvr>
-  <mc:AlternateContent xmlns:mc="http://schemas.openxmlformats.org/markup-compatibility/2006">
-    <mc:Choice xmlns:p159="http://schemas.microsoft.com/office/powerpoint/2015/09/main" Requires="p159">
+  <mc:AlternateContent xmlns:mc="http://schemas.openxmlformats.org/markup-compatibility/2006" xmlns:p159="http://schemas.microsoft.com/office/powerpoint/2015/09/main">
+    <mc:Choice Requires="p159">
       <p:transition xmlns:p14="http://schemas.microsoft.com/office/powerpoint/2010/main" spd="slow" p14:dur="2000">
         <p159:morph option="byObject"/>
       </p:transition>
     </mc:Choice>
-    <mc:Fallback>
+    <mc:Fallback xmlns="">
       <p:transition spd="slow">
         <p:fade/>
       </p:transition>
@@ -19678,13 +22767,13 @@
   <p:clrMapOvr>
     <a:masterClrMapping/>
   </p:clrMapOvr>
-  <mc:AlternateContent xmlns:mc="http://schemas.openxmlformats.org/markup-compatibility/2006">
-    <mc:Choice xmlns:p159="http://schemas.microsoft.com/office/powerpoint/2015/09/main" Requires="p159">
+  <mc:AlternateContent xmlns:mc="http://schemas.openxmlformats.org/markup-compatibility/2006" xmlns:p159="http://schemas.microsoft.com/office/powerpoint/2015/09/main">
+    <mc:Choice Requires="p159">
       <p:transition xmlns:p14="http://schemas.microsoft.com/office/powerpoint/2010/main" spd="slow" p14:dur="2000">
         <p159:morph option="byObject"/>
       </p:transition>
     </mc:Choice>
-    <mc:Fallback>
+    <mc:Fallback xmlns="">
       <p:transition spd="slow">
         <p:fade/>
       </p:transition>
@@ -20135,7 +23224,7 @@
         </p:blipFill>
         <p:spPr>
           <a:xfrm>
-            <a:off x="6381750" y="3977640"/>
+            <a:off x="6390466" y="4012692"/>
             <a:ext cx="257175" cy="247650"/>
           </a:xfrm>
           <a:prstGeom prst="rect">
@@ -20162,7 +23251,7 @@
         </p:blipFill>
         <p:spPr>
           <a:xfrm>
-            <a:off x="6381750" y="4486275"/>
+            <a:off x="6404753" y="4599241"/>
             <a:ext cx="200025" cy="247650"/>
           </a:xfrm>
           <a:prstGeom prst="rect">
@@ -20189,7 +23278,7 @@
         </p:blipFill>
         <p:spPr>
           <a:xfrm>
-            <a:off x="6381750" y="5029200"/>
+            <a:off x="6390466" y="5119497"/>
             <a:ext cx="228600" cy="247650"/>
           </a:xfrm>
           <a:prstGeom prst="rect">
@@ -20313,7 +23402,7 @@
         </p:nvSpPr>
         <p:spPr>
           <a:xfrm>
-            <a:off x="939800" y="1954212"/>
+            <a:off x="594387" y="1807563"/>
             <a:ext cx="5099050" cy="3743855"/>
           </a:xfrm>
           <a:prstGeom prst="roundRect">
@@ -20365,7 +23454,7 @@
         </p:blipFill>
         <p:spPr>
           <a:xfrm>
-            <a:off x="664977" y="2135453"/>
+            <a:off x="319564" y="1988804"/>
             <a:ext cx="5516748" cy="3503083"/>
           </a:xfrm>
           <a:prstGeom prst="rect">
@@ -20378,13 +23467,13 @@
   <p:clrMapOvr>
     <a:masterClrMapping/>
   </p:clrMapOvr>
-  <mc:AlternateContent xmlns:mc="http://schemas.openxmlformats.org/markup-compatibility/2006">
-    <mc:Choice xmlns:p159="http://schemas.microsoft.com/office/powerpoint/2015/09/main" Requires="p159">
+  <mc:AlternateContent xmlns:mc="http://schemas.openxmlformats.org/markup-compatibility/2006" xmlns:p159="http://schemas.microsoft.com/office/powerpoint/2015/09/main">
+    <mc:Choice Requires="p159">
       <p:transition xmlns:p14="http://schemas.microsoft.com/office/powerpoint/2010/main" spd="slow" p14:dur="2000">
         <p159:morph option="byObject"/>
       </p:transition>
     </mc:Choice>
-    <mc:Fallback>
+    <mc:Fallback xmlns="">
       <p:transition spd="slow">
         <p:fade/>
       </p:transition>
@@ -20468,7 +23557,9 @@
           </a:prstGeom>
           <a:noFill/>
           <a:ln>
-            <a:noFill/>
+            <a:solidFill>
+              <a:schemeClr val="tx1"/>
+            </a:solidFill>
           </a:ln>
         </p:spPr>
       </p:pic>
@@ -21019,13 +24110,13 @@
   <p:clrMapOvr>
     <a:masterClrMapping/>
   </p:clrMapOvr>
-  <mc:AlternateContent xmlns:mc="http://schemas.openxmlformats.org/markup-compatibility/2006">
-    <mc:Choice xmlns:p159="http://schemas.microsoft.com/office/powerpoint/2015/09/main" Requires="p159">
+  <mc:AlternateContent xmlns:mc="http://schemas.openxmlformats.org/markup-compatibility/2006" xmlns:p159="http://schemas.microsoft.com/office/powerpoint/2015/09/main">
+    <mc:Choice Requires="p159">
       <p:transition xmlns:p14="http://schemas.microsoft.com/office/powerpoint/2010/main" spd="slow" p14:dur="2000">
         <p159:morph option="byObject"/>
       </p:transition>
     </mc:Choice>
-    <mc:Fallback>
+    <mc:Fallback xmlns="">
       <p:transition spd="slow">
         <p:fade/>
       </p:transition>
@@ -21242,13 +24333,13 @@
   <p:clrMapOvr>
     <a:masterClrMapping/>
   </p:clrMapOvr>
-  <mc:AlternateContent xmlns:mc="http://schemas.openxmlformats.org/markup-compatibility/2006">
-    <mc:Choice xmlns:p159="http://schemas.microsoft.com/office/powerpoint/2015/09/main" Requires="p159">
+  <mc:AlternateContent xmlns:mc="http://schemas.openxmlformats.org/markup-compatibility/2006" xmlns:p159="http://schemas.microsoft.com/office/powerpoint/2015/09/main">
+    <mc:Choice Requires="p159">
       <p:transition xmlns:p14="http://schemas.microsoft.com/office/powerpoint/2010/main" spd="slow" p14:dur="2000">
         <p159:morph option="byObject"/>
       </p:transition>
     </mc:Choice>
-    <mc:Fallback>
+    <mc:Fallback xmlns="">
       <p:transition spd="slow">
         <p:fade/>
       </p:transition>
@@ -21732,13 +24823,13 @@
   <p:clrMapOvr>
     <a:masterClrMapping/>
   </p:clrMapOvr>
-  <mc:AlternateContent xmlns:mc="http://schemas.openxmlformats.org/markup-compatibility/2006">
-    <mc:Choice xmlns:p159="http://schemas.microsoft.com/office/powerpoint/2015/09/main" Requires="p159">
+  <mc:AlternateContent xmlns:mc="http://schemas.openxmlformats.org/markup-compatibility/2006" xmlns:p159="http://schemas.microsoft.com/office/powerpoint/2015/09/main">
+    <mc:Choice Requires="p159">
       <p:transition xmlns:p14="http://schemas.microsoft.com/office/powerpoint/2010/main" spd="slow" p14:dur="2000">
         <p159:morph option="byObject"/>
       </p:transition>
     </mc:Choice>
-    <mc:Fallback>
+    <mc:Fallback xmlns="">
       <p:transition spd="slow">
         <p:fade/>
       </p:transition>
@@ -22270,13 +25361,13 @@
   <p:clrMapOvr>
     <a:masterClrMapping/>
   </p:clrMapOvr>
-  <mc:AlternateContent xmlns:mc="http://schemas.openxmlformats.org/markup-compatibility/2006">
-    <mc:Choice xmlns:p159="http://schemas.microsoft.com/office/powerpoint/2015/09/main" Requires="p159">
+  <mc:AlternateContent xmlns:mc="http://schemas.openxmlformats.org/markup-compatibility/2006" xmlns:p159="http://schemas.microsoft.com/office/powerpoint/2015/09/main">
+    <mc:Choice Requires="p159">
       <p:transition xmlns:p14="http://schemas.microsoft.com/office/powerpoint/2010/main" spd="slow" p14:dur="2000">
         <p159:morph option="byObject"/>
       </p:transition>
     </mc:Choice>
-    <mc:Fallback>
+    <mc:Fallback xmlns="">
       <p:transition spd="slow">
         <p:fade/>
       </p:transition>
@@ -22849,13 +25940,13 @@
   <p:clrMapOvr>
     <a:masterClrMapping/>
   </p:clrMapOvr>
-  <mc:AlternateContent xmlns:mc="http://schemas.openxmlformats.org/markup-compatibility/2006">
-    <mc:Choice xmlns:p159="http://schemas.microsoft.com/office/powerpoint/2015/09/main" Requires="p159">
+  <mc:AlternateContent xmlns:mc="http://schemas.openxmlformats.org/markup-compatibility/2006" xmlns:p159="http://schemas.microsoft.com/office/powerpoint/2015/09/main">
+    <mc:Choice Requires="p159">
       <p:transition xmlns:p14="http://schemas.microsoft.com/office/powerpoint/2010/main" spd="slow" p14:dur="2000">
         <p159:morph option="byObject"/>
       </p:transition>
     </mc:Choice>
-    <mc:Fallback>
+    <mc:Fallback xmlns="">
       <p:transition spd="slow">
         <p:fade/>
       </p:transition>
